--- a/docs/AI-Harness-Intro.pptx
+++ b/docs/AI-Harness-Intro.pptx
@@ -4,6 +4,9 @@
   <p:sldMasterIdLst>
     <p:sldMasterId id="2147483648" r:id="rId1"/>
   </p:sldMasterIdLst>
+  <p:notesMasterIdLst>
+    <p:notesMasterId r:id="rId25"/>
+  </p:notesMasterIdLst>
   <p:sldIdLst>
     <p:sldId id="256" r:id="rId2"/>
     <p:sldId id="257" r:id="rId3"/>
@@ -15,12 +18,22 @@
     <p:sldId id="263" r:id="rId9"/>
     <p:sldId id="264" r:id="rId10"/>
     <p:sldId id="265" r:id="rId11"/>
+    <p:sldId id="266" r:id="rId12"/>
+    <p:sldId id="267" r:id="rId13"/>
+    <p:sldId id="268" r:id="rId14"/>
+    <p:sldId id="269" r:id="rId15"/>
+    <p:sldId id="270" r:id="rId16"/>
+    <p:sldId id="271" r:id="rId17"/>
+    <p:sldId id="272" r:id="rId18"/>
+    <p:sldId id="273" r:id="rId19"/>
+    <p:sldId id="274" r:id="rId20"/>
+    <p:sldId id="275" r:id="rId21"/>
+    <p:sldId id="276" r:id="rId22"/>
+    <p:sldId id="277" r:id="rId23"/>
+    <p:sldId id="278" r:id="rId24"/>
   </p:sldIdLst>
-  <p:notesMasterIdLst>
-    <p:notesMasterId r:id="rId12"/>
-  </p:notesMasterIdLst>
-  <p:sldSz cx="12191695" cy="6858000"/>
-  <p:notesSz cx="6858000" cy="12191695"/>
+  <p:sldSz cx="12192000" cy="6858000"/>
+  <p:notesSz cx="6858000" cy="12192000"/>
   <p:defaultTextStyle>
     <a:lvl1pPr marL="0" algn="l" defTabSz="914400" rtl="0" eaLnBrk="1" latinLnBrk="0" hangingPunct="1">
       <a:defRPr sz="1800" kern="1200">
@@ -113,6 +126,11 @@
       </a:defRPr>
     </a:lvl9pPr>
   </p:defaultTextStyle>
+  <p:extLst>
+    <p:ext uri="{EFAFB233-063F-42B5-8137-9DF3F51BA10A}">
+      <p15:sldGuideLst xmlns:p15="http://schemas.microsoft.com/office/powerpoint/2012/main"/>
+    </p:ext>
+  </p:extLst>
 </p:presentation>
 </file>
 
@@ -138,241 +156,17 @@
           <a:chExt cx="0" cy="0"/>
         </a:xfrm>
       </p:grpSpPr>
-      <p:sp>
-        <p:nvSpPr>
-          <p:cNvPr id="2" name="Header Placeholder 1"/>
-          <p:cNvSpPr>
-            <a:spLocks noGrp="1"/>
-          </p:cNvSpPr>
-          <p:nvPr>
-            <p:ph type="hdr" sz="quarter"/>
-          </p:nvPr>
-        </p:nvSpPr>
-        <p:spPr>
-          <a:xfrm>
-            <a:off x="0" y="0"/>
-            <a:ext cx="2971800" cy="458788"/>
-          </a:xfrm>
-          <a:prstGeom prst="rect">
-            <a:avLst/>
-          </a:prstGeom>
-        </p:spPr>
-        <p:txBody>
-          <a:bodyPr vert="horz" lIns="91440" tIns="45720" rIns="91440" bIns="45720" rtlCol="0"/>
-          <a:lstStyle>
-            <a:lvl1pPr algn="l">
-              <a:defRPr sz="1200"/>
-            </a:lvl1pPr>
-          </a:lstStyle>
-          <a:p>
-            <a:endParaRPr lang="en-US"/>
-          </a:p>
-        </p:txBody>
-      </p:sp>
-      <p:sp>
-        <p:nvSpPr>
-          <p:cNvPr id="3" name="Date Placeholder 2"/>
-          <p:cNvSpPr>
-            <a:spLocks noGrp="1"/>
-          </p:cNvSpPr>
-          <p:nvPr>
-            <p:ph type="dt" idx="1"/>
-          </p:nvPr>
-        </p:nvSpPr>
-        <p:spPr>
-          <a:xfrm>
-            <a:off x="3884613" y="0"/>
-            <a:ext cx="2971800" cy="458788"/>
-          </a:xfrm>
-          <a:prstGeom prst="rect">
-            <a:avLst/>
-          </a:prstGeom>
-        </p:spPr>
-        <p:txBody>
-          <a:bodyPr vert="horz" lIns="91440" tIns="45720" rIns="91440" bIns="45720" rtlCol="0"/>
-          <a:lstStyle>
-            <a:lvl1pPr algn="r">
-              <a:defRPr sz="1200"/>
-            </a:lvl1pPr>
-          </a:lstStyle>
-          <a:p>
-            <a:fld id="{5282F153-3F37-0F45-9E97-73ACFA13230C}" type="datetimeFigureOut">
-              <a:rPr lang="en-US"/>
-              <a:t>7/23/19</a:t>
-            </a:fld>
-            <a:endParaRPr lang="en-US"/>
-          </a:p>
-        </p:txBody>
-      </p:sp>
-      <p:sp>
-        <p:nvSpPr>
-          <p:cNvPr id="4" name="Slide Image Placeholder 3"/>
-          <p:cNvSpPr>
-            <a:spLocks noGrp="1" noRot="1" noChangeAspect="1"/>
-          </p:cNvSpPr>
-          <p:nvPr>
-            <p:ph type="sldImg" idx="2"/>
-          </p:nvPr>
-        </p:nvSpPr>
-        <p:spPr>
-          <a:xfrm>
-            <a:off x="685800" y="1143000"/>
-            <a:ext cx="5486400" cy="3086100"/>
-          </a:xfrm>
-          <a:prstGeom prst="rect">
-            <a:avLst/>
-          </a:prstGeom>
-          <a:noFill/>
-          <a:ln w="12700">
-            <a:solidFill>
-              <a:prstClr val="black"/>
-            </a:solidFill>
-          </a:ln>
-        </p:spPr>
-        <p:txBody>
-          <a:bodyPr vert="horz" lIns="91440" tIns="45720" rIns="91440" bIns="45720" rtlCol="0" anchor="ctr"/>
-          <a:lstStyle/>
-          <a:p>
-            <a:endParaRPr lang="en-US"/>
-          </a:p>
-        </p:txBody>
-      </p:sp>
-      <p:sp>
-        <p:nvSpPr>
-          <p:cNvPr id="5" name="Notes Placeholder 4"/>
-          <p:cNvSpPr>
-            <a:spLocks noGrp="1"/>
-          </p:cNvSpPr>
-          <p:nvPr>
-            <p:ph type="body" sz="quarter" idx="3"/>
-          </p:nvPr>
-        </p:nvSpPr>
-        <p:spPr>
-          <a:xfrm>
-            <a:off x="685800" y="4400550"/>
-            <a:ext cx="5486400" cy="3600450"/>
-          </a:xfrm>
-          <a:prstGeom prst="rect">
-            <a:avLst/>
-          </a:prstGeom>
-        </p:spPr>
-        <p:txBody>
-          <a:bodyPr vert="horz" lIns="91440" tIns="45720" rIns="91440" bIns="45720" rtlCol="0"/>
-          <a:lstStyle/>
-          <a:p>
-            <a:pPr lvl="0"/>
-            <a:r>
-              <a:rPr lang="en-US"/>
-              <a:t>Click to edit Master text styles</a:t>
-            </a:r>
-          </a:p>
-          <a:p>
-            <a:pPr lvl="1"/>
-            <a:r>
-              <a:rPr lang="en-US"/>
-              <a:t>Second level</a:t>
-            </a:r>
-          </a:p>
-          <a:p>
-            <a:pPr lvl="2"/>
-            <a:r>
-              <a:rPr lang="en-US"/>
-              <a:t>Third level</a:t>
-            </a:r>
-          </a:p>
-          <a:p>
-            <a:pPr lvl="3"/>
-            <a:r>
-              <a:rPr lang="en-US"/>
-              <a:t>Fourth level</a:t>
-            </a:r>
-          </a:p>
-          <a:p>
-            <a:pPr lvl="4"/>
-            <a:r>
-              <a:rPr lang="en-US"/>
-              <a:t>Fifth level</a:t>
-            </a:r>
-          </a:p>
-        </p:txBody>
-      </p:sp>
-      <p:sp>
-        <p:nvSpPr>
-          <p:cNvPr id="6" name="Footer Placeholder 5"/>
-          <p:cNvSpPr>
-            <a:spLocks noGrp="1"/>
-          </p:cNvSpPr>
-          <p:nvPr>
-            <p:ph type="ftr" sz="quarter" idx="4"/>
-          </p:nvPr>
-        </p:nvSpPr>
-        <p:spPr>
-          <a:xfrm>
-            <a:off x="0" y="8685213"/>
-            <a:ext cx="2971800" cy="458787"/>
-          </a:xfrm>
-          <a:prstGeom prst="rect">
-            <a:avLst/>
-          </a:prstGeom>
-        </p:spPr>
-        <p:txBody>
-          <a:bodyPr vert="horz" lIns="91440" tIns="45720" rIns="91440" bIns="45720" rtlCol="0" anchor="b"/>
-          <a:lstStyle>
-            <a:lvl1pPr algn="l">
-              <a:defRPr sz="1200"/>
-            </a:lvl1pPr>
-          </a:lstStyle>
-          <a:p>
-            <a:endParaRPr lang="en-US"/>
-          </a:p>
-        </p:txBody>
-      </p:sp>
-      <p:sp>
-        <p:nvSpPr>
-          <p:cNvPr id="7" name="Slide Number Placeholder 6"/>
-          <p:cNvSpPr>
-            <a:spLocks noGrp="1"/>
-          </p:cNvSpPr>
-          <p:nvPr>
-            <p:ph type="sldNum" sz="quarter" idx="5"/>
-          </p:nvPr>
-        </p:nvSpPr>
-        <p:spPr>
-          <a:xfrm>
-            <a:off x="3884613" y="8685213"/>
-            <a:ext cx="2971800" cy="458787"/>
-          </a:xfrm>
-          <a:prstGeom prst="rect">
-            <a:avLst/>
-          </a:prstGeom>
-        </p:spPr>
-        <p:txBody>
-          <a:bodyPr vert="horz" lIns="91440" tIns="45720" rIns="91440" bIns="45720" rtlCol="0" anchor="b"/>
-          <a:lstStyle>
-            <a:lvl1pPr algn="r">
-              <a:defRPr sz="1200"/>
-            </a:lvl1pPr>
-          </a:lstStyle>
-          <a:p>
-            <a:fld id="{CE5E9CC1-C706-0F49-92D6-E571CC5EEA8F}" type="slidenum">
-              <a:rPr lang="en-US"/>
-              <a:t>‹#›</a:t>
-            </a:fld>
-            <a:endParaRPr lang="en-US"/>
-          </a:p>
-        </p:txBody>
-      </p:sp>
     </p:spTree>
     <p:extLst>
       <p:ext uri="{BB962C8B-B14F-4D97-AF65-F5344CB8AC3E}">
-        <p14:creationId xmlns:p14="http://schemas.microsoft.com/office/powerpoint/2010/main" val="1024086991"/>
+        <p14:creationId xmlns:p14="http://schemas.microsoft.com/office/powerpoint/2010/main" val="1099630894"/>
       </p:ext>
     </p:extLst>
   </p:cSld>
   <p:clrMap bg1="lt1" tx1="dk1" bg2="lt2" tx2="dk2" accent1="accent1" accent2="accent2" accent3="accent3" accent4="accent4" accent5="accent5" accent6="accent6" hlink="hlink" folHlink="folHlink"/>
   <p:notesStyle>
     <a:lvl1pPr marL="0" algn="l" defTabSz="914400" rtl="0" eaLnBrk="1" latinLnBrk="0" hangingPunct="1">
-      <a:defRPr sz="1200" kern="1200">
+      <a:defRPr kumimoji="1" sz="1200" kern="1200">
         <a:solidFill>
           <a:schemeClr val="tx1"/>
         </a:solidFill>
@@ -382,7 +176,7 @@
       </a:defRPr>
     </a:lvl1pPr>
     <a:lvl2pPr marL="457200" algn="l" defTabSz="914400" rtl="0" eaLnBrk="1" latinLnBrk="0" hangingPunct="1">
-      <a:defRPr sz="1200" kern="1200">
+      <a:defRPr kumimoji="1" sz="1200" kern="1200">
         <a:solidFill>
           <a:schemeClr val="tx1"/>
         </a:solidFill>
@@ -392,7 +186,7 @@
       </a:defRPr>
     </a:lvl2pPr>
     <a:lvl3pPr marL="914400" algn="l" defTabSz="914400" rtl="0" eaLnBrk="1" latinLnBrk="0" hangingPunct="1">
-      <a:defRPr sz="1200" kern="1200">
+      <a:defRPr kumimoji="1" sz="1200" kern="1200">
         <a:solidFill>
           <a:schemeClr val="tx1"/>
         </a:solidFill>
@@ -402,7 +196,7 @@
       </a:defRPr>
     </a:lvl3pPr>
     <a:lvl4pPr marL="1371600" algn="l" defTabSz="914400" rtl="0" eaLnBrk="1" latinLnBrk="0" hangingPunct="1">
-      <a:defRPr sz="1200" kern="1200">
+      <a:defRPr kumimoji="1" sz="1200" kern="1200">
         <a:solidFill>
           <a:schemeClr val="tx1"/>
         </a:solidFill>
@@ -412,7 +206,7 @@
       </a:defRPr>
     </a:lvl4pPr>
     <a:lvl5pPr marL="1828800" algn="l" defTabSz="914400" rtl="0" eaLnBrk="1" latinLnBrk="0" hangingPunct="1">
-      <a:defRPr sz="1200" kern="1200">
+      <a:defRPr kumimoji="1" sz="1200" kern="1200">
         <a:solidFill>
           <a:schemeClr val="tx1"/>
         </a:solidFill>
@@ -422,7 +216,7 @@
       </a:defRPr>
     </a:lvl5pPr>
     <a:lvl6pPr marL="2286000" algn="l" defTabSz="914400" rtl="0" eaLnBrk="1" latinLnBrk="0" hangingPunct="1">
-      <a:defRPr sz="1200" kern="1200">
+      <a:defRPr kumimoji="1" sz="1200" kern="1200">
         <a:solidFill>
           <a:schemeClr val="tx1"/>
         </a:solidFill>
@@ -432,7 +226,7 @@
       </a:defRPr>
     </a:lvl6pPr>
     <a:lvl7pPr marL="2743200" algn="l" defTabSz="914400" rtl="0" eaLnBrk="1" latinLnBrk="0" hangingPunct="1">
-      <a:defRPr sz="1200" kern="1200">
+      <a:defRPr kumimoji="1" sz="1200" kern="1200">
         <a:solidFill>
           <a:schemeClr val="tx1"/>
         </a:solidFill>
@@ -442,7 +236,7 @@
       </a:defRPr>
     </a:lvl7pPr>
     <a:lvl8pPr marL="3200400" algn="l" defTabSz="914400" rtl="0" eaLnBrk="1" latinLnBrk="0" hangingPunct="1">
-      <a:defRPr sz="1200" kern="1200">
+      <a:defRPr kumimoji="1" sz="1200" kern="1200">
         <a:solidFill>
           <a:schemeClr val="tx1"/>
         </a:solidFill>
@@ -452,7 +246,7 @@
       </a:defRPr>
     </a:lvl8pPr>
     <a:lvl9pPr marL="3657600" algn="l" defTabSz="914400" rtl="0" eaLnBrk="1" latinLnBrk="0" hangingPunct="1">
-      <a:defRPr sz="1200" kern="1200">
+      <a:defRPr kumimoji="1" sz="1200" kern="1200">
         <a:solidFill>
           <a:schemeClr val="tx1"/>
         </a:solidFill>
@@ -513,7 +307,6 @@
               <a:rPr lang="en-US" dirty="0"/>
               <a:t>AI Harness is a governance layer for AI coding agents: keep the speed, regain security, control and visibility.</a:t>
             </a:r>
-            <a:endParaRPr lang="en-US" dirty="0"/>
           </a:p>
         </p:txBody>
       </p:sp>
@@ -597,10 +390,6 @@
           <a:bodyPr/>
           <a:lstStyle/>
           <a:p>
-            <a:r>
-              <a:rPr lang="en-US" dirty="0"/>
-              <a:t/>
-            </a:r>
             <a:endParaRPr lang="en-US" dirty="0"/>
           </a:p>
         </p:txBody>
@@ -632,6 +421,978 @@
     <p:extLst>
       <p:ext uri="{BB962C8B-B14F-4D97-AF65-F5344CB8AC3E}">
         <p14:creationId xmlns:p14="http://schemas.microsoft.com/office/powerpoint/2010/main" val="1024086991"/>
+      </p:ext>
+    </p:extLst>
+  </p:cSld>
+  <p:clrMapOvr>
+    <a:masterClrMapping/>
+  </p:clrMapOvr>
+</p:notes>
+</file>
+
+<file path=ppt/notesSlides/notesSlide11.xml><?xml version="1.0" encoding="utf-8"?>
+<p:notes xmlns:a="http://schemas.openxmlformats.org/drawingml/2006/main" xmlns:r="http://schemas.openxmlformats.org/officeDocument/2006/relationships" xmlns:p="http://schemas.openxmlformats.org/presentationml/2006/main">
+  <p:cSld>
+    <p:spTree>
+      <p:nvGrpSpPr>
+        <p:cNvPr id="1" name="">
+          <a:extLst>
+            <a:ext uri="{FF2B5EF4-FFF2-40B4-BE49-F238E27FC236}">
+              <a16:creationId xmlns:a16="http://schemas.microsoft.com/office/drawing/2014/main" id="{2692ADCA-3E86-94BC-A6A1-D2405715F44D}"/>
+            </a:ext>
+          </a:extLst>
+        </p:cNvPr>
+        <p:cNvGrpSpPr/>
+        <p:nvPr/>
+      </p:nvGrpSpPr>
+      <p:grpSpPr>
+        <a:xfrm>
+          <a:off x="0" y="0"/>
+          <a:ext cx="0" cy="0"/>
+          <a:chOff x="0" y="0"/>
+          <a:chExt cx="0" cy="0"/>
+        </a:xfrm>
+      </p:grpSpPr>
+      <p:sp>
+        <p:nvSpPr>
+          <p:cNvPr id="2" name="Slide Image Placeholder 1">
+            <a:extLst>
+              <a:ext uri="{FF2B5EF4-FFF2-40B4-BE49-F238E27FC236}">
+                <a16:creationId xmlns:a16="http://schemas.microsoft.com/office/drawing/2014/main" id="{CDCD5EB5-14CA-A4BB-17C7-C0774BB69F25}"/>
+              </a:ext>
+            </a:extLst>
+          </p:cNvPr>
+          <p:cNvSpPr>
+            <a:spLocks noGrp="1" noRot="1" noChangeAspect="1"/>
+          </p:cNvSpPr>
+          <p:nvPr>
+            <p:ph type="sldImg"/>
+          </p:nvPr>
+        </p:nvSpPr>
+        <p:spPr/>
+      </p:sp>
+      <p:sp>
+        <p:nvSpPr>
+          <p:cNvPr id="3" name="Notes Placeholder 2">
+            <a:extLst>
+              <a:ext uri="{FF2B5EF4-FFF2-40B4-BE49-F238E27FC236}">
+                <a16:creationId xmlns:a16="http://schemas.microsoft.com/office/drawing/2014/main" id="{D044EDF5-D78E-D700-1861-06133E771880}"/>
+              </a:ext>
+            </a:extLst>
+          </p:cNvPr>
+          <p:cNvSpPr>
+            <a:spLocks noGrp="1"/>
+          </p:cNvSpPr>
+          <p:nvPr>
+            <p:ph type="body" idx="1"/>
+          </p:nvPr>
+        </p:nvSpPr>
+        <p:spPr/>
+        <p:txBody>
+          <a:bodyPr/>
+          <a:lstStyle/>
+          <a:p>
+            <a:endParaRPr lang="en-US" dirty="0"/>
+          </a:p>
+        </p:txBody>
+      </p:sp>
+      <p:sp>
+        <p:nvSpPr>
+          <p:cNvPr id="4" name="Slide Number Placeholder 3">
+            <a:extLst>
+              <a:ext uri="{FF2B5EF4-FFF2-40B4-BE49-F238E27FC236}">
+                <a16:creationId xmlns:a16="http://schemas.microsoft.com/office/drawing/2014/main" id="{E2F10DBB-B67F-C033-5B46-0CCE88DAC355}"/>
+              </a:ext>
+            </a:extLst>
+          </p:cNvPr>
+          <p:cNvSpPr>
+            <a:spLocks noGrp="1"/>
+          </p:cNvSpPr>
+          <p:nvPr>
+            <p:ph type="sldNum" sz="quarter" idx="10"/>
+          </p:nvPr>
+        </p:nvSpPr>
+        <p:spPr/>
+        <p:txBody>
+          <a:bodyPr/>
+          <a:lstStyle/>
+          <a:p>
+            <a:fld id="{F7021451-1387-4CA6-816F-3879F97B5CBC}" type="slidenum">
+              <a:rPr lang="en-US"/>
+              <a:t>11</a:t>
+            </a:fld>
+            <a:endParaRPr lang="en-US"/>
+          </a:p>
+        </p:txBody>
+      </p:sp>
+    </p:spTree>
+    <p:extLst>
+      <p:ext uri="{BB962C8B-B14F-4D97-AF65-F5344CB8AC3E}">
+        <p14:creationId xmlns:p14="http://schemas.microsoft.com/office/powerpoint/2010/main" val="2963633693"/>
+      </p:ext>
+    </p:extLst>
+  </p:cSld>
+  <p:clrMapOvr>
+    <a:masterClrMapping/>
+  </p:clrMapOvr>
+</p:notes>
+</file>
+
+<file path=ppt/notesSlides/notesSlide12.xml><?xml version="1.0" encoding="utf-8"?>
+<p:notes xmlns:a="http://schemas.openxmlformats.org/drawingml/2006/main" xmlns:r="http://schemas.openxmlformats.org/officeDocument/2006/relationships" xmlns:p="http://schemas.openxmlformats.org/presentationml/2006/main">
+  <p:cSld>
+    <p:spTree>
+      <p:nvGrpSpPr>
+        <p:cNvPr id="1" name="">
+          <a:extLst>
+            <a:ext uri="{FF2B5EF4-FFF2-40B4-BE49-F238E27FC236}">
+              <a16:creationId xmlns:a16="http://schemas.microsoft.com/office/drawing/2014/main" id="{5280F043-FA1F-8361-A0F5-FDBB9782B009}"/>
+            </a:ext>
+          </a:extLst>
+        </p:cNvPr>
+        <p:cNvGrpSpPr/>
+        <p:nvPr/>
+      </p:nvGrpSpPr>
+      <p:grpSpPr>
+        <a:xfrm>
+          <a:off x="0" y="0"/>
+          <a:ext cx="0" cy="0"/>
+          <a:chOff x="0" y="0"/>
+          <a:chExt cx="0" cy="0"/>
+        </a:xfrm>
+      </p:grpSpPr>
+      <p:sp>
+        <p:nvSpPr>
+          <p:cNvPr id="2" name="Slide Image Placeholder 1">
+            <a:extLst>
+              <a:ext uri="{FF2B5EF4-FFF2-40B4-BE49-F238E27FC236}">
+                <a16:creationId xmlns:a16="http://schemas.microsoft.com/office/drawing/2014/main" id="{58C1A351-AF81-1D1C-BC56-7B121DB967BA}"/>
+              </a:ext>
+            </a:extLst>
+          </p:cNvPr>
+          <p:cNvSpPr>
+            <a:spLocks noGrp="1" noRot="1" noChangeAspect="1"/>
+          </p:cNvSpPr>
+          <p:nvPr>
+            <p:ph type="sldImg"/>
+          </p:nvPr>
+        </p:nvSpPr>
+        <p:spPr/>
+      </p:sp>
+      <p:sp>
+        <p:nvSpPr>
+          <p:cNvPr id="3" name="Notes Placeholder 2">
+            <a:extLst>
+              <a:ext uri="{FF2B5EF4-FFF2-40B4-BE49-F238E27FC236}">
+                <a16:creationId xmlns:a16="http://schemas.microsoft.com/office/drawing/2014/main" id="{1B01BF84-51D4-6CA0-32B2-F68D1B9AC22D}"/>
+              </a:ext>
+            </a:extLst>
+          </p:cNvPr>
+          <p:cNvSpPr>
+            <a:spLocks noGrp="1"/>
+          </p:cNvSpPr>
+          <p:nvPr>
+            <p:ph type="body" idx="1"/>
+          </p:nvPr>
+        </p:nvSpPr>
+        <p:spPr/>
+        <p:txBody>
+          <a:bodyPr/>
+          <a:lstStyle/>
+          <a:p>
+            <a:endParaRPr lang="en-US" dirty="0"/>
+          </a:p>
+        </p:txBody>
+      </p:sp>
+      <p:sp>
+        <p:nvSpPr>
+          <p:cNvPr id="4" name="Slide Number Placeholder 3">
+            <a:extLst>
+              <a:ext uri="{FF2B5EF4-FFF2-40B4-BE49-F238E27FC236}">
+                <a16:creationId xmlns:a16="http://schemas.microsoft.com/office/drawing/2014/main" id="{3ED3274B-E22A-2502-07F4-95C1C146575A}"/>
+              </a:ext>
+            </a:extLst>
+          </p:cNvPr>
+          <p:cNvSpPr>
+            <a:spLocks noGrp="1"/>
+          </p:cNvSpPr>
+          <p:nvPr>
+            <p:ph type="sldNum" sz="quarter" idx="10"/>
+          </p:nvPr>
+        </p:nvSpPr>
+        <p:spPr/>
+        <p:txBody>
+          <a:bodyPr/>
+          <a:lstStyle/>
+          <a:p>
+            <a:fld id="{F7021451-1387-4CA6-816F-3879F97B5CBC}" type="slidenum">
+              <a:rPr lang="en-US"/>
+              <a:t>12</a:t>
+            </a:fld>
+            <a:endParaRPr lang="en-US"/>
+          </a:p>
+        </p:txBody>
+      </p:sp>
+    </p:spTree>
+    <p:extLst>
+      <p:ext uri="{BB962C8B-B14F-4D97-AF65-F5344CB8AC3E}">
+        <p14:creationId xmlns:p14="http://schemas.microsoft.com/office/powerpoint/2010/main" val="3066290410"/>
+      </p:ext>
+    </p:extLst>
+  </p:cSld>
+  <p:clrMapOvr>
+    <a:masterClrMapping/>
+  </p:clrMapOvr>
+</p:notes>
+</file>
+
+<file path=ppt/notesSlides/notesSlide13.xml><?xml version="1.0" encoding="utf-8"?>
+<p:notes xmlns:a="http://schemas.openxmlformats.org/drawingml/2006/main" xmlns:r="http://schemas.openxmlformats.org/officeDocument/2006/relationships" xmlns:p="http://schemas.openxmlformats.org/presentationml/2006/main">
+  <p:cSld>
+    <p:spTree>
+      <p:nvGrpSpPr>
+        <p:cNvPr id="1" name="">
+          <a:extLst>
+            <a:ext uri="{FF2B5EF4-FFF2-40B4-BE49-F238E27FC236}">
+              <a16:creationId xmlns:a16="http://schemas.microsoft.com/office/drawing/2014/main" id="{0D804AF4-B91E-1DD3-8008-564504DF78DA}"/>
+            </a:ext>
+          </a:extLst>
+        </p:cNvPr>
+        <p:cNvGrpSpPr/>
+        <p:nvPr/>
+      </p:nvGrpSpPr>
+      <p:grpSpPr>
+        <a:xfrm>
+          <a:off x="0" y="0"/>
+          <a:ext cx="0" cy="0"/>
+          <a:chOff x="0" y="0"/>
+          <a:chExt cx="0" cy="0"/>
+        </a:xfrm>
+      </p:grpSpPr>
+      <p:sp>
+        <p:nvSpPr>
+          <p:cNvPr id="2" name="Slide Image Placeholder 1">
+            <a:extLst>
+              <a:ext uri="{FF2B5EF4-FFF2-40B4-BE49-F238E27FC236}">
+                <a16:creationId xmlns:a16="http://schemas.microsoft.com/office/drawing/2014/main" id="{64836EFA-2E86-A30E-F660-F209AB4369C1}"/>
+              </a:ext>
+            </a:extLst>
+          </p:cNvPr>
+          <p:cNvSpPr>
+            <a:spLocks noGrp="1" noRot="1" noChangeAspect="1"/>
+          </p:cNvSpPr>
+          <p:nvPr>
+            <p:ph type="sldImg"/>
+          </p:nvPr>
+        </p:nvSpPr>
+        <p:spPr/>
+      </p:sp>
+      <p:sp>
+        <p:nvSpPr>
+          <p:cNvPr id="3" name="Notes Placeholder 2">
+            <a:extLst>
+              <a:ext uri="{FF2B5EF4-FFF2-40B4-BE49-F238E27FC236}">
+                <a16:creationId xmlns:a16="http://schemas.microsoft.com/office/drawing/2014/main" id="{0ECAB0CB-AA6E-C89B-2BE0-BB18836D0DC9}"/>
+              </a:ext>
+            </a:extLst>
+          </p:cNvPr>
+          <p:cNvSpPr>
+            <a:spLocks noGrp="1"/>
+          </p:cNvSpPr>
+          <p:nvPr>
+            <p:ph type="body" idx="1"/>
+          </p:nvPr>
+        </p:nvSpPr>
+        <p:spPr/>
+        <p:txBody>
+          <a:bodyPr/>
+          <a:lstStyle/>
+          <a:p>
+            <a:endParaRPr lang="en-US" dirty="0"/>
+          </a:p>
+        </p:txBody>
+      </p:sp>
+      <p:sp>
+        <p:nvSpPr>
+          <p:cNvPr id="4" name="Slide Number Placeholder 3">
+            <a:extLst>
+              <a:ext uri="{FF2B5EF4-FFF2-40B4-BE49-F238E27FC236}">
+                <a16:creationId xmlns:a16="http://schemas.microsoft.com/office/drawing/2014/main" id="{4CA15124-E822-1434-DCFA-5AB91F99E026}"/>
+              </a:ext>
+            </a:extLst>
+          </p:cNvPr>
+          <p:cNvSpPr>
+            <a:spLocks noGrp="1"/>
+          </p:cNvSpPr>
+          <p:nvPr>
+            <p:ph type="sldNum" sz="quarter" idx="10"/>
+          </p:nvPr>
+        </p:nvSpPr>
+        <p:spPr/>
+        <p:txBody>
+          <a:bodyPr/>
+          <a:lstStyle/>
+          <a:p>
+            <a:fld id="{F7021451-1387-4CA6-816F-3879F97B5CBC}" type="slidenum">
+              <a:rPr lang="en-US"/>
+              <a:t>13</a:t>
+            </a:fld>
+            <a:endParaRPr lang="en-US"/>
+          </a:p>
+        </p:txBody>
+      </p:sp>
+    </p:spTree>
+    <p:extLst>
+      <p:ext uri="{BB962C8B-B14F-4D97-AF65-F5344CB8AC3E}">
+        <p14:creationId xmlns:p14="http://schemas.microsoft.com/office/powerpoint/2010/main" val="981583132"/>
+      </p:ext>
+    </p:extLst>
+  </p:cSld>
+  <p:clrMapOvr>
+    <a:masterClrMapping/>
+  </p:clrMapOvr>
+</p:notes>
+</file>
+
+<file path=ppt/notesSlides/notesSlide14.xml><?xml version="1.0" encoding="utf-8"?>
+<p:notes xmlns:a="http://schemas.openxmlformats.org/drawingml/2006/main" xmlns:r="http://schemas.openxmlformats.org/officeDocument/2006/relationships" xmlns:p="http://schemas.openxmlformats.org/presentationml/2006/main">
+  <p:cSld>
+    <p:spTree>
+      <p:nvGrpSpPr>
+        <p:cNvPr id="1" name="">
+          <a:extLst>
+            <a:ext uri="{FF2B5EF4-FFF2-40B4-BE49-F238E27FC236}">
+              <a16:creationId xmlns:a16="http://schemas.microsoft.com/office/drawing/2014/main" id="{C226EF80-C0ED-BD72-A555-94D89BA140F2}"/>
+            </a:ext>
+          </a:extLst>
+        </p:cNvPr>
+        <p:cNvGrpSpPr/>
+        <p:nvPr/>
+      </p:nvGrpSpPr>
+      <p:grpSpPr>
+        <a:xfrm>
+          <a:off x="0" y="0"/>
+          <a:ext cx="0" cy="0"/>
+          <a:chOff x="0" y="0"/>
+          <a:chExt cx="0" cy="0"/>
+        </a:xfrm>
+      </p:grpSpPr>
+      <p:sp>
+        <p:nvSpPr>
+          <p:cNvPr id="2" name="Slide Image Placeholder 1">
+            <a:extLst>
+              <a:ext uri="{FF2B5EF4-FFF2-40B4-BE49-F238E27FC236}">
+                <a16:creationId xmlns:a16="http://schemas.microsoft.com/office/drawing/2014/main" id="{5CD1C1FD-8BCA-B32A-0E86-ECF60E37217F}"/>
+              </a:ext>
+            </a:extLst>
+          </p:cNvPr>
+          <p:cNvSpPr>
+            <a:spLocks noGrp="1" noRot="1" noChangeAspect="1"/>
+          </p:cNvSpPr>
+          <p:nvPr>
+            <p:ph type="sldImg"/>
+          </p:nvPr>
+        </p:nvSpPr>
+        <p:spPr/>
+      </p:sp>
+      <p:sp>
+        <p:nvSpPr>
+          <p:cNvPr id="3" name="Notes Placeholder 2">
+            <a:extLst>
+              <a:ext uri="{FF2B5EF4-FFF2-40B4-BE49-F238E27FC236}">
+                <a16:creationId xmlns:a16="http://schemas.microsoft.com/office/drawing/2014/main" id="{7CF461A8-882A-C17F-E413-4F341D0FEB0E}"/>
+              </a:ext>
+            </a:extLst>
+          </p:cNvPr>
+          <p:cNvSpPr>
+            <a:spLocks noGrp="1"/>
+          </p:cNvSpPr>
+          <p:nvPr>
+            <p:ph type="body" idx="1"/>
+          </p:nvPr>
+        </p:nvSpPr>
+        <p:spPr/>
+        <p:txBody>
+          <a:bodyPr/>
+          <a:lstStyle/>
+          <a:p>
+            <a:endParaRPr lang="en-US" dirty="0"/>
+          </a:p>
+        </p:txBody>
+      </p:sp>
+      <p:sp>
+        <p:nvSpPr>
+          <p:cNvPr id="4" name="Slide Number Placeholder 3">
+            <a:extLst>
+              <a:ext uri="{FF2B5EF4-FFF2-40B4-BE49-F238E27FC236}">
+                <a16:creationId xmlns:a16="http://schemas.microsoft.com/office/drawing/2014/main" id="{92B08E37-6F64-FAF4-E20A-7467BB658612}"/>
+              </a:ext>
+            </a:extLst>
+          </p:cNvPr>
+          <p:cNvSpPr>
+            <a:spLocks noGrp="1"/>
+          </p:cNvSpPr>
+          <p:nvPr>
+            <p:ph type="sldNum" sz="quarter" idx="10"/>
+          </p:nvPr>
+        </p:nvSpPr>
+        <p:spPr/>
+        <p:txBody>
+          <a:bodyPr/>
+          <a:lstStyle/>
+          <a:p>
+            <a:fld id="{F7021451-1387-4CA6-816F-3879F97B5CBC}" type="slidenum">
+              <a:rPr lang="en-US"/>
+              <a:t>14</a:t>
+            </a:fld>
+            <a:endParaRPr lang="en-US"/>
+          </a:p>
+        </p:txBody>
+      </p:sp>
+    </p:spTree>
+    <p:extLst>
+      <p:ext uri="{BB962C8B-B14F-4D97-AF65-F5344CB8AC3E}">
+        <p14:creationId xmlns:p14="http://schemas.microsoft.com/office/powerpoint/2010/main" val="1890083457"/>
+      </p:ext>
+    </p:extLst>
+  </p:cSld>
+  <p:clrMapOvr>
+    <a:masterClrMapping/>
+  </p:clrMapOvr>
+</p:notes>
+</file>
+
+<file path=ppt/notesSlides/notesSlide15.xml><?xml version="1.0" encoding="utf-8"?>
+<p:notes xmlns:a="http://schemas.openxmlformats.org/drawingml/2006/main" xmlns:r="http://schemas.openxmlformats.org/officeDocument/2006/relationships" xmlns:p="http://schemas.openxmlformats.org/presentationml/2006/main">
+  <p:cSld>
+    <p:spTree>
+      <p:nvGrpSpPr>
+        <p:cNvPr id="1" name="">
+          <a:extLst>
+            <a:ext uri="{FF2B5EF4-FFF2-40B4-BE49-F238E27FC236}">
+              <a16:creationId xmlns:a16="http://schemas.microsoft.com/office/drawing/2014/main" id="{8EF5C935-8EAD-9829-0C5C-F6FAB8338203}"/>
+            </a:ext>
+          </a:extLst>
+        </p:cNvPr>
+        <p:cNvGrpSpPr/>
+        <p:nvPr/>
+      </p:nvGrpSpPr>
+      <p:grpSpPr>
+        <a:xfrm>
+          <a:off x="0" y="0"/>
+          <a:ext cx="0" cy="0"/>
+          <a:chOff x="0" y="0"/>
+          <a:chExt cx="0" cy="0"/>
+        </a:xfrm>
+      </p:grpSpPr>
+      <p:sp>
+        <p:nvSpPr>
+          <p:cNvPr id="2" name="Slide Image Placeholder 1">
+            <a:extLst>
+              <a:ext uri="{FF2B5EF4-FFF2-40B4-BE49-F238E27FC236}">
+                <a16:creationId xmlns:a16="http://schemas.microsoft.com/office/drawing/2014/main" id="{47F630F9-71FD-0FD5-5E67-6D83FA3B6C70}"/>
+              </a:ext>
+            </a:extLst>
+          </p:cNvPr>
+          <p:cNvSpPr>
+            <a:spLocks noGrp="1" noRot="1" noChangeAspect="1"/>
+          </p:cNvSpPr>
+          <p:nvPr>
+            <p:ph type="sldImg"/>
+          </p:nvPr>
+        </p:nvSpPr>
+        <p:spPr/>
+      </p:sp>
+      <p:sp>
+        <p:nvSpPr>
+          <p:cNvPr id="3" name="Notes Placeholder 2">
+            <a:extLst>
+              <a:ext uri="{FF2B5EF4-FFF2-40B4-BE49-F238E27FC236}">
+                <a16:creationId xmlns:a16="http://schemas.microsoft.com/office/drawing/2014/main" id="{947B6A0D-293B-09CC-89FA-279984480018}"/>
+              </a:ext>
+            </a:extLst>
+          </p:cNvPr>
+          <p:cNvSpPr>
+            <a:spLocks noGrp="1"/>
+          </p:cNvSpPr>
+          <p:nvPr>
+            <p:ph type="body" idx="1"/>
+          </p:nvPr>
+        </p:nvSpPr>
+        <p:spPr/>
+        <p:txBody>
+          <a:bodyPr/>
+          <a:lstStyle/>
+          <a:p>
+            <a:endParaRPr lang="en-US" dirty="0"/>
+          </a:p>
+        </p:txBody>
+      </p:sp>
+      <p:sp>
+        <p:nvSpPr>
+          <p:cNvPr id="4" name="Slide Number Placeholder 3">
+            <a:extLst>
+              <a:ext uri="{FF2B5EF4-FFF2-40B4-BE49-F238E27FC236}">
+                <a16:creationId xmlns:a16="http://schemas.microsoft.com/office/drawing/2014/main" id="{43D99406-42CE-BB87-6B44-CEB679833403}"/>
+              </a:ext>
+            </a:extLst>
+          </p:cNvPr>
+          <p:cNvSpPr>
+            <a:spLocks noGrp="1"/>
+          </p:cNvSpPr>
+          <p:nvPr>
+            <p:ph type="sldNum" sz="quarter" idx="10"/>
+          </p:nvPr>
+        </p:nvSpPr>
+        <p:spPr/>
+        <p:txBody>
+          <a:bodyPr/>
+          <a:lstStyle/>
+          <a:p>
+            <a:fld id="{F7021451-1387-4CA6-816F-3879F97B5CBC}" type="slidenum">
+              <a:rPr lang="en-US"/>
+              <a:t>15</a:t>
+            </a:fld>
+            <a:endParaRPr lang="en-US"/>
+          </a:p>
+        </p:txBody>
+      </p:sp>
+    </p:spTree>
+    <p:extLst>
+      <p:ext uri="{BB962C8B-B14F-4D97-AF65-F5344CB8AC3E}">
+        <p14:creationId xmlns:p14="http://schemas.microsoft.com/office/powerpoint/2010/main" val="1898657865"/>
+      </p:ext>
+    </p:extLst>
+  </p:cSld>
+  <p:clrMapOvr>
+    <a:masterClrMapping/>
+  </p:clrMapOvr>
+</p:notes>
+</file>
+
+<file path=ppt/notesSlides/notesSlide16.xml><?xml version="1.0" encoding="utf-8"?>
+<p:notes xmlns:a="http://schemas.openxmlformats.org/drawingml/2006/main" xmlns:r="http://schemas.openxmlformats.org/officeDocument/2006/relationships" xmlns:p="http://schemas.openxmlformats.org/presentationml/2006/main">
+  <p:cSld>
+    <p:spTree>
+      <p:nvGrpSpPr>
+        <p:cNvPr id="1" name="">
+          <a:extLst>
+            <a:ext uri="{FF2B5EF4-FFF2-40B4-BE49-F238E27FC236}">
+              <a16:creationId xmlns:a16="http://schemas.microsoft.com/office/drawing/2014/main" id="{EF4E849B-396B-6BA9-99B5-8AF6DECDA5B0}"/>
+            </a:ext>
+          </a:extLst>
+        </p:cNvPr>
+        <p:cNvGrpSpPr/>
+        <p:nvPr/>
+      </p:nvGrpSpPr>
+      <p:grpSpPr>
+        <a:xfrm>
+          <a:off x="0" y="0"/>
+          <a:ext cx="0" cy="0"/>
+          <a:chOff x="0" y="0"/>
+          <a:chExt cx="0" cy="0"/>
+        </a:xfrm>
+      </p:grpSpPr>
+      <p:sp>
+        <p:nvSpPr>
+          <p:cNvPr id="2" name="Slide Image Placeholder 1">
+            <a:extLst>
+              <a:ext uri="{FF2B5EF4-FFF2-40B4-BE49-F238E27FC236}">
+                <a16:creationId xmlns:a16="http://schemas.microsoft.com/office/drawing/2014/main" id="{76BF14BE-D77F-EBE3-3700-86CEDB743AB1}"/>
+              </a:ext>
+            </a:extLst>
+          </p:cNvPr>
+          <p:cNvSpPr>
+            <a:spLocks noGrp="1" noRot="1" noChangeAspect="1"/>
+          </p:cNvSpPr>
+          <p:nvPr>
+            <p:ph type="sldImg"/>
+          </p:nvPr>
+        </p:nvSpPr>
+        <p:spPr/>
+      </p:sp>
+      <p:sp>
+        <p:nvSpPr>
+          <p:cNvPr id="3" name="Notes Placeholder 2">
+            <a:extLst>
+              <a:ext uri="{FF2B5EF4-FFF2-40B4-BE49-F238E27FC236}">
+                <a16:creationId xmlns:a16="http://schemas.microsoft.com/office/drawing/2014/main" id="{EE1B632B-92F9-7733-A075-980A27048942}"/>
+              </a:ext>
+            </a:extLst>
+          </p:cNvPr>
+          <p:cNvSpPr>
+            <a:spLocks noGrp="1"/>
+          </p:cNvSpPr>
+          <p:nvPr>
+            <p:ph type="body" idx="1"/>
+          </p:nvPr>
+        </p:nvSpPr>
+        <p:spPr/>
+        <p:txBody>
+          <a:bodyPr/>
+          <a:lstStyle/>
+          <a:p>
+            <a:endParaRPr lang="en-US" dirty="0"/>
+          </a:p>
+        </p:txBody>
+      </p:sp>
+      <p:sp>
+        <p:nvSpPr>
+          <p:cNvPr id="4" name="Slide Number Placeholder 3">
+            <a:extLst>
+              <a:ext uri="{FF2B5EF4-FFF2-40B4-BE49-F238E27FC236}">
+                <a16:creationId xmlns:a16="http://schemas.microsoft.com/office/drawing/2014/main" id="{926DD5EF-DDF1-32C9-A800-32E95AA0EC8B}"/>
+              </a:ext>
+            </a:extLst>
+          </p:cNvPr>
+          <p:cNvSpPr>
+            <a:spLocks noGrp="1"/>
+          </p:cNvSpPr>
+          <p:nvPr>
+            <p:ph type="sldNum" sz="quarter" idx="10"/>
+          </p:nvPr>
+        </p:nvSpPr>
+        <p:spPr/>
+        <p:txBody>
+          <a:bodyPr/>
+          <a:lstStyle/>
+          <a:p>
+            <a:fld id="{F7021451-1387-4CA6-816F-3879F97B5CBC}" type="slidenum">
+              <a:rPr lang="en-US"/>
+              <a:t>16</a:t>
+            </a:fld>
+            <a:endParaRPr lang="en-US"/>
+          </a:p>
+        </p:txBody>
+      </p:sp>
+    </p:spTree>
+    <p:extLst>
+      <p:ext uri="{BB962C8B-B14F-4D97-AF65-F5344CB8AC3E}">
+        <p14:creationId xmlns:p14="http://schemas.microsoft.com/office/powerpoint/2010/main" val="348932361"/>
+      </p:ext>
+    </p:extLst>
+  </p:cSld>
+  <p:clrMapOvr>
+    <a:masterClrMapping/>
+  </p:clrMapOvr>
+</p:notes>
+</file>
+
+<file path=ppt/notesSlides/notesSlide17.xml><?xml version="1.0" encoding="utf-8"?>
+<p:notes xmlns:a="http://schemas.openxmlformats.org/drawingml/2006/main" xmlns:r="http://schemas.openxmlformats.org/officeDocument/2006/relationships" xmlns:p="http://schemas.openxmlformats.org/presentationml/2006/main">
+  <p:cSld>
+    <p:spTree>
+      <p:nvGrpSpPr>
+        <p:cNvPr id="1" name="">
+          <a:extLst>
+            <a:ext uri="{FF2B5EF4-FFF2-40B4-BE49-F238E27FC236}">
+              <a16:creationId xmlns:a16="http://schemas.microsoft.com/office/drawing/2014/main" id="{75B6C11F-B62B-B35F-08F0-BA45F24CC41E}"/>
+            </a:ext>
+          </a:extLst>
+        </p:cNvPr>
+        <p:cNvGrpSpPr/>
+        <p:nvPr/>
+      </p:nvGrpSpPr>
+      <p:grpSpPr>
+        <a:xfrm>
+          <a:off x="0" y="0"/>
+          <a:ext cx="0" cy="0"/>
+          <a:chOff x="0" y="0"/>
+          <a:chExt cx="0" cy="0"/>
+        </a:xfrm>
+      </p:grpSpPr>
+      <p:sp>
+        <p:nvSpPr>
+          <p:cNvPr id="2" name="Slide Image Placeholder 1">
+            <a:extLst>
+              <a:ext uri="{FF2B5EF4-FFF2-40B4-BE49-F238E27FC236}">
+                <a16:creationId xmlns:a16="http://schemas.microsoft.com/office/drawing/2014/main" id="{997681FC-9C7E-945D-47C9-C263900D677D}"/>
+              </a:ext>
+            </a:extLst>
+          </p:cNvPr>
+          <p:cNvSpPr>
+            <a:spLocks noGrp="1" noRot="1" noChangeAspect="1"/>
+          </p:cNvSpPr>
+          <p:nvPr>
+            <p:ph type="sldImg"/>
+          </p:nvPr>
+        </p:nvSpPr>
+        <p:spPr/>
+      </p:sp>
+      <p:sp>
+        <p:nvSpPr>
+          <p:cNvPr id="3" name="Notes Placeholder 2">
+            <a:extLst>
+              <a:ext uri="{FF2B5EF4-FFF2-40B4-BE49-F238E27FC236}">
+                <a16:creationId xmlns:a16="http://schemas.microsoft.com/office/drawing/2014/main" id="{EA9C00AD-C347-E9FC-CBF6-B878F64C3CCD}"/>
+              </a:ext>
+            </a:extLst>
+          </p:cNvPr>
+          <p:cNvSpPr>
+            <a:spLocks noGrp="1"/>
+          </p:cNvSpPr>
+          <p:nvPr>
+            <p:ph type="body" idx="1"/>
+          </p:nvPr>
+        </p:nvSpPr>
+        <p:spPr/>
+        <p:txBody>
+          <a:bodyPr/>
+          <a:lstStyle/>
+          <a:p>
+            <a:endParaRPr lang="en-US" dirty="0"/>
+          </a:p>
+        </p:txBody>
+      </p:sp>
+      <p:sp>
+        <p:nvSpPr>
+          <p:cNvPr id="4" name="Slide Number Placeholder 3">
+            <a:extLst>
+              <a:ext uri="{FF2B5EF4-FFF2-40B4-BE49-F238E27FC236}">
+                <a16:creationId xmlns:a16="http://schemas.microsoft.com/office/drawing/2014/main" id="{5A3F0BE1-B46E-807F-C1EE-9ED9C8E02CE7}"/>
+              </a:ext>
+            </a:extLst>
+          </p:cNvPr>
+          <p:cNvSpPr>
+            <a:spLocks noGrp="1"/>
+          </p:cNvSpPr>
+          <p:nvPr>
+            <p:ph type="sldNum" sz="quarter" idx="10"/>
+          </p:nvPr>
+        </p:nvSpPr>
+        <p:spPr/>
+        <p:txBody>
+          <a:bodyPr/>
+          <a:lstStyle/>
+          <a:p>
+            <a:fld id="{F7021451-1387-4CA6-816F-3879F97B5CBC}" type="slidenum">
+              <a:rPr lang="en-US"/>
+              <a:t>17</a:t>
+            </a:fld>
+            <a:endParaRPr lang="en-US"/>
+          </a:p>
+        </p:txBody>
+      </p:sp>
+    </p:spTree>
+    <p:extLst>
+      <p:ext uri="{BB962C8B-B14F-4D97-AF65-F5344CB8AC3E}">
+        <p14:creationId xmlns:p14="http://schemas.microsoft.com/office/powerpoint/2010/main" val="1152784305"/>
+      </p:ext>
+    </p:extLst>
+  </p:cSld>
+  <p:clrMapOvr>
+    <a:masterClrMapping/>
+  </p:clrMapOvr>
+</p:notes>
+</file>
+
+<file path=ppt/notesSlides/notesSlide18.xml><?xml version="1.0" encoding="utf-8"?>
+<p:notes xmlns:a="http://schemas.openxmlformats.org/drawingml/2006/main" xmlns:r="http://schemas.openxmlformats.org/officeDocument/2006/relationships" xmlns:p="http://schemas.openxmlformats.org/presentationml/2006/main">
+  <p:cSld>
+    <p:spTree>
+      <p:nvGrpSpPr>
+        <p:cNvPr id="1" name="">
+          <a:extLst>
+            <a:ext uri="{FF2B5EF4-FFF2-40B4-BE49-F238E27FC236}">
+              <a16:creationId xmlns:a16="http://schemas.microsoft.com/office/drawing/2014/main" id="{74AECEC1-191B-8E91-A9AE-A4F8A9D9A356}"/>
+            </a:ext>
+          </a:extLst>
+        </p:cNvPr>
+        <p:cNvGrpSpPr/>
+        <p:nvPr/>
+      </p:nvGrpSpPr>
+      <p:grpSpPr>
+        <a:xfrm>
+          <a:off x="0" y="0"/>
+          <a:ext cx="0" cy="0"/>
+          <a:chOff x="0" y="0"/>
+          <a:chExt cx="0" cy="0"/>
+        </a:xfrm>
+      </p:grpSpPr>
+      <p:sp>
+        <p:nvSpPr>
+          <p:cNvPr id="2" name="Slide Image Placeholder 1">
+            <a:extLst>
+              <a:ext uri="{FF2B5EF4-FFF2-40B4-BE49-F238E27FC236}">
+                <a16:creationId xmlns:a16="http://schemas.microsoft.com/office/drawing/2014/main" id="{5FDF0183-36D6-E1AF-8919-B3A763625963}"/>
+              </a:ext>
+            </a:extLst>
+          </p:cNvPr>
+          <p:cNvSpPr>
+            <a:spLocks noGrp="1" noRot="1" noChangeAspect="1"/>
+          </p:cNvSpPr>
+          <p:nvPr>
+            <p:ph type="sldImg"/>
+          </p:nvPr>
+        </p:nvSpPr>
+        <p:spPr/>
+      </p:sp>
+      <p:sp>
+        <p:nvSpPr>
+          <p:cNvPr id="3" name="Notes Placeholder 2">
+            <a:extLst>
+              <a:ext uri="{FF2B5EF4-FFF2-40B4-BE49-F238E27FC236}">
+                <a16:creationId xmlns:a16="http://schemas.microsoft.com/office/drawing/2014/main" id="{89C33086-1828-361E-445F-54B9519F71CA}"/>
+              </a:ext>
+            </a:extLst>
+          </p:cNvPr>
+          <p:cNvSpPr>
+            <a:spLocks noGrp="1"/>
+          </p:cNvSpPr>
+          <p:nvPr>
+            <p:ph type="body" idx="1"/>
+          </p:nvPr>
+        </p:nvSpPr>
+        <p:spPr/>
+        <p:txBody>
+          <a:bodyPr/>
+          <a:lstStyle/>
+          <a:p>
+            <a:endParaRPr lang="en-US" dirty="0"/>
+          </a:p>
+        </p:txBody>
+      </p:sp>
+      <p:sp>
+        <p:nvSpPr>
+          <p:cNvPr id="4" name="Slide Number Placeholder 3">
+            <a:extLst>
+              <a:ext uri="{FF2B5EF4-FFF2-40B4-BE49-F238E27FC236}">
+                <a16:creationId xmlns:a16="http://schemas.microsoft.com/office/drawing/2014/main" id="{16020312-8557-505D-1FE4-03CF20DAD9D7}"/>
+              </a:ext>
+            </a:extLst>
+          </p:cNvPr>
+          <p:cNvSpPr>
+            <a:spLocks noGrp="1"/>
+          </p:cNvSpPr>
+          <p:nvPr>
+            <p:ph type="sldNum" sz="quarter" idx="10"/>
+          </p:nvPr>
+        </p:nvSpPr>
+        <p:spPr/>
+        <p:txBody>
+          <a:bodyPr/>
+          <a:lstStyle/>
+          <a:p>
+            <a:fld id="{F7021451-1387-4CA6-816F-3879F97B5CBC}" type="slidenum">
+              <a:rPr lang="en-US"/>
+              <a:t>18</a:t>
+            </a:fld>
+            <a:endParaRPr lang="en-US"/>
+          </a:p>
+        </p:txBody>
+      </p:sp>
+    </p:spTree>
+    <p:extLst>
+      <p:ext uri="{BB962C8B-B14F-4D97-AF65-F5344CB8AC3E}">
+        <p14:creationId xmlns:p14="http://schemas.microsoft.com/office/powerpoint/2010/main" val="647088938"/>
+      </p:ext>
+    </p:extLst>
+  </p:cSld>
+  <p:clrMapOvr>
+    <a:masterClrMapping/>
+  </p:clrMapOvr>
+</p:notes>
+</file>
+
+<file path=ppt/notesSlides/notesSlide19.xml><?xml version="1.0" encoding="utf-8"?>
+<p:notes xmlns:a="http://schemas.openxmlformats.org/drawingml/2006/main" xmlns:r="http://schemas.openxmlformats.org/officeDocument/2006/relationships" xmlns:p="http://schemas.openxmlformats.org/presentationml/2006/main">
+  <p:cSld>
+    <p:spTree>
+      <p:nvGrpSpPr>
+        <p:cNvPr id="1" name="">
+          <a:extLst>
+            <a:ext uri="{FF2B5EF4-FFF2-40B4-BE49-F238E27FC236}">
+              <a16:creationId xmlns:a16="http://schemas.microsoft.com/office/drawing/2014/main" id="{AAD8884D-25F1-E1BB-D155-390BBF18A888}"/>
+            </a:ext>
+          </a:extLst>
+        </p:cNvPr>
+        <p:cNvGrpSpPr/>
+        <p:nvPr/>
+      </p:nvGrpSpPr>
+      <p:grpSpPr>
+        <a:xfrm>
+          <a:off x="0" y="0"/>
+          <a:ext cx="0" cy="0"/>
+          <a:chOff x="0" y="0"/>
+          <a:chExt cx="0" cy="0"/>
+        </a:xfrm>
+      </p:grpSpPr>
+      <p:sp>
+        <p:nvSpPr>
+          <p:cNvPr id="2" name="Slide Image Placeholder 1">
+            <a:extLst>
+              <a:ext uri="{FF2B5EF4-FFF2-40B4-BE49-F238E27FC236}">
+                <a16:creationId xmlns:a16="http://schemas.microsoft.com/office/drawing/2014/main" id="{4B7EB3F5-F59A-CB6E-7163-94A1C51E3A6C}"/>
+              </a:ext>
+            </a:extLst>
+          </p:cNvPr>
+          <p:cNvSpPr>
+            <a:spLocks noGrp="1" noRot="1" noChangeAspect="1"/>
+          </p:cNvSpPr>
+          <p:nvPr>
+            <p:ph type="sldImg"/>
+          </p:nvPr>
+        </p:nvSpPr>
+        <p:spPr/>
+      </p:sp>
+      <p:sp>
+        <p:nvSpPr>
+          <p:cNvPr id="3" name="Notes Placeholder 2">
+            <a:extLst>
+              <a:ext uri="{FF2B5EF4-FFF2-40B4-BE49-F238E27FC236}">
+                <a16:creationId xmlns:a16="http://schemas.microsoft.com/office/drawing/2014/main" id="{FD43CEF2-D664-738F-C168-19C12D92083A}"/>
+              </a:ext>
+            </a:extLst>
+          </p:cNvPr>
+          <p:cNvSpPr>
+            <a:spLocks noGrp="1"/>
+          </p:cNvSpPr>
+          <p:nvPr>
+            <p:ph type="body" idx="1"/>
+          </p:nvPr>
+        </p:nvSpPr>
+        <p:spPr/>
+        <p:txBody>
+          <a:bodyPr/>
+          <a:lstStyle/>
+          <a:p>
+            <a:endParaRPr lang="en-US" dirty="0"/>
+          </a:p>
+        </p:txBody>
+      </p:sp>
+      <p:sp>
+        <p:nvSpPr>
+          <p:cNvPr id="4" name="Slide Number Placeholder 3">
+            <a:extLst>
+              <a:ext uri="{FF2B5EF4-FFF2-40B4-BE49-F238E27FC236}">
+                <a16:creationId xmlns:a16="http://schemas.microsoft.com/office/drawing/2014/main" id="{584A5B6D-B3FB-DBDB-205E-17B038C72213}"/>
+              </a:ext>
+            </a:extLst>
+          </p:cNvPr>
+          <p:cNvSpPr>
+            <a:spLocks noGrp="1"/>
+          </p:cNvSpPr>
+          <p:nvPr>
+            <p:ph type="sldNum" sz="quarter" idx="10"/>
+          </p:nvPr>
+        </p:nvSpPr>
+        <p:spPr/>
+        <p:txBody>
+          <a:bodyPr/>
+          <a:lstStyle/>
+          <a:p>
+            <a:fld id="{F7021451-1387-4CA6-816F-3879F97B5CBC}" type="slidenum">
+              <a:rPr lang="en-US"/>
+              <a:t>19</a:t>
+            </a:fld>
+            <a:endParaRPr lang="en-US"/>
+          </a:p>
+        </p:txBody>
+      </p:sp>
+    </p:spTree>
+    <p:extLst>
+      <p:ext uri="{BB962C8B-B14F-4D97-AF65-F5344CB8AC3E}">
+        <p14:creationId xmlns:p14="http://schemas.microsoft.com/office/powerpoint/2010/main" val="1234338132"/>
       </p:ext>
     </p:extLst>
   </p:cSld>
@@ -685,10 +1446,6 @@
           <a:bodyPr/>
           <a:lstStyle/>
           <a:p>
-            <a:r>
-              <a:rPr lang="en-US" dirty="0"/>
-              <a:t/>
-            </a:r>
             <a:endParaRPr lang="en-US" dirty="0"/>
           </a:p>
         </p:txBody>
@@ -720,6 +1477,438 @@
     <p:extLst>
       <p:ext uri="{BB962C8B-B14F-4D97-AF65-F5344CB8AC3E}">
         <p14:creationId xmlns:p14="http://schemas.microsoft.com/office/powerpoint/2010/main" val="1024086991"/>
+      </p:ext>
+    </p:extLst>
+  </p:cSld>
+  <p:clrMapOvr>
+    <a:masterClrMapping/>
+  </p:clrMapOvr>
+</p:notes>
+</file>
+
+<file path=ppt/notesSlides/notesSlide20.xml><?xml version="1.0" encoding="utf-8"?>
+<p:notes xmlns:a="http://schemas.openxmlformats.org/drawingml/2006/main" xmlns:r="http://schemas.openxmlformats.org/officeDocument/2006/relationships" xmlns:p="http://schemas.openxmlformats.org/presentationml/2006/main">
+  <p:cSld>
+    <p:spTree>
+      <p:nvGrpSpPr>
+        <p:cNvPr id="1" name="">
+          <a:extLst>
+            <a:ext uri="{FF2B5EF4-FFF2-40B4-BE49-F238E27FC236}">
+              <a16:creationId xmlns:a16="http://schemas.microsoft.com/office/drawing/2014/main" id="{56ED2005-2375-E533-4188-FEE3F8D1A343}"/>
+            </a:ext>
+          </a:extLst>
+        </p:cNvPr>
+        <p:cNvGrpSpPr/>
+        <p:nvPr/>
+      </p:nvGrpSpPr>
+      <p:grpSpPr>
+        <a:xfrm>
+          <a:off x="0" y="0"/>
+          <a:ext cx="0" cy="0"/>
+          <a:chOff x="0" y="0"/>
+          <a:chExt cx="0" cy="0"/>
+        </a:xfrm>
+      </p:grpSpPr>
+      <p:sp>
+        <p:nvSpPr>
+          <p:cNvPr id="2" name="Slide Image Placeholder 1">
+            <a:extLst>
+              <a:ext uri="{FF2B5EF4-FFF2-40B4-BE49-F238E27FC236}">
+                <a16:creationId xmlns:a16="http://schemas.microsoft.com/office/drawing/2014/main" id="{5935502C-5358-A0BF-8B4A-94CE715831E1}"/>
+              </a:ext>
+            </a:extLst>
+          </p:cNvPr>
+          <p:cNvSpPr>
+            <a:spLocks noGrp="1" noRot="1" noChangeAspect="1"/>
+          </p:cNvSpPr>
+          <p:nvPr>
+            <p:ph type="sldImg"/>
+          </p:nvPr>
+        </p:nvSpPr>
+        <p:spPr/>
+      </p:sp>
+      <p:sp>
+        <p:nvSpPr>
+          <p:cNvPr id="3" name="Notes Placeholder 2">
+            <a:extLst>
+              <a:ext uri="{FF2B5EF4-FFF2-40B4-BE49-F238E27FC236}">
+                <a16:creationId xmlns:a16="http://schemas.microsoft.com/office/drawing/2014/main" id="{F8752F0D-35AE-92EF-8843-E1A6A13B8F97}"/>
+              </a:ext>
+            </a:extLst>
+          </p:cNvPr>
+          <p:cNvSpPr>
+            <a:spLocks noGrp="1"/>
+          </p:cNvSpPr>
+          <p:nvPr>
+            <p:ph type="body" idx="1"/>
+          </p:nvPr>
+        </p:nvSpPr>
+        <p:spPr/>
+        <p:txBody>
+          <a:bodyPr/>
+          <a:lstStyle/>
+          <a:p>
+            <a:endParaRPr lang="en-US" dirty="0"/>
+          </a:p>
+        </p:txBody>
+      </p:sp>
+      <p:sp>
+        <p:nvSpPr>
+          <p:cNvPr id="4" name="Slide Number Placeholder 3">
+            <a:extLst>
+              <a:ext uri="{FF2B5EF4-FFF2-40B4-BE49-F238E27FC236}">
+                <a16:creationId xmlns:a16="http://schemas.microsoft.com/office/drawing/2014/main" id="{581E89FC-930C-785C-223E-2C100F840CD1}"/>
+              </a:ext>
+            </a:extLst>
+          </p:cNvPr>
+          <p:cNvSpPr>
+            <a:spLocks noGrp="1"/>
+          </p:cNvSpPr>
+          <p:nvPr>
+            <p:ph type="sldNum" sz="quarter" idx="10"/>
+          </p:nvPr>
+        </p:nvSpPr>
+        <p:spPr/>
+        <p:txBody>
+          <a:bodyPr/>
+          <a:lstStyle/>
+          <a:p>
+            <a:fld id="{F7021451-1387-4CA6-816F-3879F97B5CBC}" type="slidenum">
+              <a:rPr lang="en-US"/>
+              <a:t>20</a:t>
+            </a:fld>
+            <a:endParaRPr lang="en-US"/>
+          </a:p>
+        </p:txBody>
+      </p:sp>
+    </p:spTree>
+    <p:extLst>
+      <p:ext uri="{BB962C8B-B14F-4D97-AF65-F5344CB8AC3E}">
+        <p14:creationId xmlns:p14="http://schemas.microsoft.com/office/powerpoint/2010/main" val="4281823636"/>
+      </p:ext>
+    </p:extLst>
+  </p:cSld>
+  <p:clrMapOvr>
+    <a:masterClrMapping/>
+  </p:clrMapOvr>
+</p:notes>
+</file>
+
+<file path=ppt/notesSlides/notesSlide21.xml><?xml version="1.0" encoding="utf-8"?>
+<p:notes xmlns:a="http://schemas.openxmlformats.org/drawingml/2006/main" xmlns:r="http://schemas.openxmlformats.org/officeDocument/2006/relationships" xmlns:p="http://schemas.openxmlformats.org/presentationml/2006/main">
+  <p:cSld>
+    <p:spTree>
+      <p:nvGrpSpPr>
+        <p:cNvPr id="1" name="">
+          <a:extLst>
+            <a:ext uri="{FF2B5EF4-FFF2-40B4-BE49-F238E27FC236}">
+              <a16:creationId xmlns:a16="http://schemas.microsoft.com/office/drawing/2014/main" id="{638C6F1C-0ECB-1E84-C950-6E93F2EE995D}"/>
+            </a:ext>
+          </a:extLst>
+        </p:cNvPr>
+        <p:cNvGrpSpPr/>
+        <p:nvPr/>
+      </p:nvGrpSpPr>
+      <p:grpSpPr>
+        <a:xfrm>
+          <a:off x="0" y="0"/>
+          <a:ext cx="0" cy="0"/>
+          <a:chOff x="0" y="0"/>
+          <a:chExt cx="0" cy="0"/>
+        </a:xfrm>
+      </p:grpSpPr>
+      <p:sp>
+        <p:nvSpPr>
+          <p:cNvPr id="2" name="Slide Image Placeholder 1">
+            <a:extLst>
+              <a:ext uri="{FF2B5EF4-FFF2-40B4-BE49-F238E27FC236}">
+                <a16:creationId xmlns:a16="http://schemas.microsoft.com/office/drawing/2014/main" id="{76CD25CB-080B-FAF6-1528-89DC315ECBEF}"/>
+              </a:ext>
+            </a:extLst>
+          </p:cNvPr>
+          <p:cNvSpPr>
+            <a:spLocks noGrp="1" noRot="1" noChangeAspect="1"/>
+          </p:cNvSpPr>
+          <p:nvPr>
+            <p:ph type="sldImg"/>
+          </p:nvPr>
+        </p:nvSpPr>
+        <p:spPr/>
+      </p:sp>
+      <p:sp>
+        <p:nvSpPr>
+          <p:cNvPr id="3" name="Notes Placeholder 2">
+            <a:extLst>
+              <a:ext uri="{FF2B5EF4-FFF2-40B4-BE49-F238E27FC236}">
+                <a16:creationId xmlns:a16="http://schemas.microsoft.com/office/drawing/2014/main" id="{59BB767E-14BD-D352-88A5-3A9637850C68}"/>
+              </a:ext>
+            </a:extLst>
+          </p:cNvPr>
+          <p:cNvSpPr>
+            <a:spLocks noGrp="1"/>
+          </p:cNvSpPr>
+          <p:nvPr>
+            <p:ph type="body" idx="1"/>
+          </p:nvPr>
+        </p:nvSpPr>
+        <p:spPr/>
+        <p:txBody>
+          <a:bodyPr/>
+          <a:lstStyle/>
+          <a:p>
+            <a:endParaRPr lang="en-US" dirty="0"/>
+          </a:p>
+        </p:txBody>
+      </p:sp>
+      <p:sp>
+        <p:nvSpPr>
+          <p:cNvPr id="4" name="Slide Number Placeholder 3">
+            <a:extLst>
+              <a:ext uri="{FF2B5EF4-FFF2-40B4-BE49-F238E27FC236}">
+                <a16:creationId xmlns:a16="http://schemas.microsoft.com/office/drawing/2014/main" id="{26605F08-BB67-FCD5-9B8A-C210C8ABE859}"/>
+              </a:ext>
+            </a:extLst>
+          </p:cNvPr>
+          <p:cNvSpPr>
+            <a:spLocks noGrp="1"/>
+          </p:cNvSpPr>
+          <p:nvPr>
+            <p:ph type="sldNum" sz="quarter" idx="10"/>
+          </p:nvPr>
+        </p:nvSpPr>
+        <p:spPr/>
+        <p:txBody>
+          <a:bodyPr/>
+          <a:lstStyle/>
+          <a:p>
+            <a:fld id="{F7021451-1387-4CA6-816F-3879F97B5CBC}" type="slidenum">
+              <a:rPr lang="en-US"/>
+              <a:t>21</a:t>
+            </a:fld>
+            <a:endParaRPr lang="en-US"/>
+          </a:p>
+        </p:txBody>
+      </p:sp>
+    </p:spTree>
+    <p:extLst>
+      <p:ext uri="{BB962C8B-B14F-4D97-AF65-F5344CB8AC3E}">
+        <p14:creationId xmlns:p14="http://schemas.microsoft.com/office/powerpoint/2010/main" val="658462682"/>
+      </p:ext>
+    </p:extLst>
+  </p:cSld>
+  <p:clrMapOvr>
+    <a:masterClrMapping/>
+  </p:clrMapOvr>
+</p:notes>
+</file>
+
+<file path=ppt/notesSlides/notesSlide22.xml><?xml version="1.0" encoding="utf-8"?>
+<p:notes xmlns:a="http://schemas.openxmlformats.org/drawingml/2006/main" xmlns:r="http://schemas.openxmlformats.org/officeDocument/2006/relationships" xmlns:p="http://schemas.openxmlformats.org/presentationml/2006/main">
+  <p:cSld>
+    <p:spTree>
+      <p:nvGrpSpPr>
+        <p:cNvPr id="1" name="">
+          <a:extLst>
+            <a:ext uri="{FF2B5EF4-FFF2-40B4-BE49-F238E27FC236}">
+              <a16:creationId xmlns:a16="http://schemas.microsoft.com/office/drawing/2014/main" id="{9A47D87A-B61F-8C06-85C9-9F6858D20C10}"/>
+            </a:ext>
+          </a:extLst>
+        </p:cNvPr>
+        <p:cNvGrpSpPr/>
+        <p:nvPr/>
+      </p:nvGrpSpPr>
+      <p:grpSpPr>
+        <a:xfrm>
+          <a:off x="0" y="0"/>
+          <a:ext cx="0" cy="0"/>
+          <a:chOff x="0" y="0"/>
+          <a:chExt cx="0" cy="0"/>
+        </a:xfrm>
+      </p:grpSpPr>
+      <p:sp>
+        <p:nvSpPr>
+          <p:cNvPr id="2" name="Slide Image Placeholder 1">
+            <a:extLst>
+              <a:ext uri="{FF2B5EF4-FFF2-40B4-BE49-F238E27FC236}">
+                <a16:creationId xmlns:a16="http://schemas.microsoft.com/office/drawing/2014/main" id="{375258C9-AD5A-85D0-BFBE-9FCA08B9B774}"/>
+              </a:ext>
+            </a:extLst>
+          </p:cNvPr>
+          <p:cNvSpPr>
+            <a:spLocks noGrp="1" noRot="1" noChangeAspect="1"/>
+          </p:cNvSpPr>
+          <p:nvPr>
+            <p:ph type="sldImg"/>
+          </p:nvPr>
+        </p:nvSpPr>
+        <p:spPr/>
+      </p:sp>
+      <p:sp>
+        <p:nvSpPr>
+          <p:cNvPr id="3" name="Notes Placeholder 2">
+            <a:extLst>
+              <a:ext uri="{FF2B5EF4-FFF2-40B4-BE49-F238E27FC236}">
+                <a16:creationId xmlns:a16="http://schemas.microsoft.com/office/drawing/2014/main" id="{DA2FB61E-0D9F-6388-FB1A-D8F7145CEE38}"/>
+              </a:ext>
+            </a:extLst>
+          </p:cNvPr>
+          <p:cNvSpPr>
+            <a:spLocks noGrp="1"/>
+          </p:cNvSpPr>
+          <p:nvPr>
+            <p:ph type="body" idx="1"/>
+          </p:nvPr>
+        </p:nvSpPr>
+        <p:spPr/>
+        <p:txBody>
+          <a:bodyPr/>
+          <a:lstStyle/>
+          <a:p>
+            <a:endParaRPr lang="en-US" dirty="0"/>
+          </a:p>
+        </p:txBody>
+      </p:sp>
+      <p:sp>
+        <p:nvSpPr>
+          <p:cNvPr id="4" name="Slide Number Placeholder 3">
+            <a:extLst>
+              <a:ext uri="{FF2B5EF4-FFF2-40B4-BE49-F238E27FC236}">
+                <a16:creationId xmlns:a16="http://schemas.microsoft.com/office/drawing/2014/main" id="{4B20F83A-BF13-7EB7-6F62-4DACE1169CEF}"/>
+              </a:ext>
+            </a:extLst>
+          </p:cNvPr>
+          <p:cNvSpPr>
+            <a:spLocks noGrp="1"/>
+          </p:cNvSpPr>
+          <p:nvPr>
+            <p:ph type="sldNum" sz="quarter" idx="10"/>
+          </p:nvPr>
+        </p:nvSpPr>
+        <p:spPr/>
+        <p:txBody>
+          <a:bodyPr/>
+          <a:lstStyle/>
+          <a:p>
+            <a:fld id="{F7021451-1387-4CA6-816F-3879F97B5CBC}" type="slidenum">
+              <a:rPr lang="en-US"/>
+              <a:t>22</a:t>
+            </a:fld>
+            <a:endParaRPr lang="en-US"/>
+          </a:p>
+        </p:txBody>
+      </p:sp>
+    </p:spTree>
+    <p:extLst>
+      <p:ext uri="{BB962C8B-B14F-4D97-AF65-F5344CB8AC3E}">
+        <p14:creationId xmlns:p14="http://schemas.microsoft.com/office/powerpoint/2010/main" val="4023578569"/>
+      </p:ext>
+    </p:extLst>
+  </p:cSld>
+  <p:clrMapOvr>
+    <a:masterClrMapping/>
+  </p:clrMapOvr>
+</p:notes>
+</file>
+
+<file path=ppt/notesSlides/notesSlide23.xml><?xml version="1.0" encoding="utf-8"?>
+<p:notes xmlns:a="http://schemas.openxmlformats.org/drawingml/2006/main" xmlns:r="http://schemas.openxmlformats.org/officeDocument/2006/relationships" xmlns:p="http://schemas.openxmlformats.org/presentationml/2006/main">
+  <p:cSld>
+    <p:spTree>
+      <p:nvGrpSpPr>
+        <p:cNvPr id="1" name="">
+          <a:extLst>
+            <a:ext uri="{FF2B5EF4-FFF2-40B4-BE49-F238E27FC236}">
+              <a16:creationId xmlns:a16="http://schemas.microsoft.com/office/drawing/2014/main" id="{4C745C6F-584C-6ADC-8170-2EBE83ABA64E}"/>
+            </a:ext>
+          </a:extLst>
+        </p:cNvPr>
+        <p:cNvGrpSpPr/>
+        <p:nvPr/>
+      </p:nvGrpSpPr>
+      <p:grpSpPr>
+        <a:xfrm>
+          <a:off x="0" y="0"/>
+          <a:ext cx="0" cy="0"/>
+          <a:chOff x="0" y="0"/>
+          <a:chExt cx="0" cy="0"/>
+        </a:xfrm>
+      </p:grpSpPr>
+      <p:sp>
+        <p:nvSpPr>
+          <p:cNvPr id="2" name="Slide Image Placeholder 1">
+            <a:extLst>
+              <a:ext uri="{FF2B5EF4-FFF2-40B4-BE49-F238E27FC236}">
+                <a16:creationId xmlns:a16="http://schemas.microsoft.com/office/drawing/2014/main" id="{1A6B5784-E0D8-9AD3-2D60-10FACEB055FD}"/>
+              </a:ext>
+            </a:extLst>
+          </p:cNvPr>
+          <p:cNvSpPr>
+            <a:spLocks noGrp="1" noRot="1" noChangeAspect="1"/>
+          </p:cNvSpPr>
+          <p:nvPr>
+            <p:ph type="sldImg"/>
+          </p:nvPr>
+        </p:nvSpPr>
+        <p:spPr/>
+      </p:sp>
+      <p:sp>
+        <p:nvSpPr>
+          <p:cNvPr id="3" name="Notes Placeholder 2">
+            <a:extLst>
+              <a:ext uri="{FF2B5EF4-FFF2-40B4-BE49-F238E27FC236}">
+                <a16:creationId xmlns:a16="http://schemas.microsoft.com/office/drawing/2014/main" id="{556154AB-6646-0BFE-D757-1C02326FE6FC}"/>
+              </a:ext>
+            </a:extLst>
+          </p:cNvPr>
+          <p:cNvSpPr>
+            <a:spLocks noGrp="1"/>
+          </p:cNvSpPr>
+          <p:nvPr>
+            <p:ph type="body" idx="1"/>
+          </p:nvPr>
+        </p:nvSpPr>
+        <p:spPr/>
+        <p:txBody>
+          <a:bodyPr/>
+          <a:lstStyle/>
+          <a:p>
+            <a:endParaRPr lang="en-US" dirty="0"/>
+          </a:p>
+        </p:txBody>
+      </p:sp>
+      <p:sp>
+        <p:nvSpPr>
+          <p:cNvPr id="4" name="Slide Number Placeholder 3">
+            <a:extLst>
+              <a:ext uri="{FF2B5EF4-FFF2-40B4-BE49-F238E27FC236}">
+                <a16:creationId xmlns:a16="http://schemas.microsoft.com/office/drawing/2014/main" id="{0DE92578-A7E1-A362-1B51-C19E0096682D}"/>
+              </a:ext>
+            </a:extLst>
+          </p:cNvPr>
+          <p:cNvSpPr>
+            <a:spLocks noGrp="1"/>
+          </p:cNvSpPr>
+          <p:nvPr>
+            <p:ph type="sldNum" sz="quarter" idx="10"/>
+          </p:nvPr>
+        </p:nvSpPr>
+        <p:spPr/>
+        <p:txBody>
+          <a:bodyPr/>
+          <a:lstStyle/>
+          <a:p>
+            <a:fld id="{F7021451-1387-4CA6-816F-3879F97B5CBC}" type="slidenum">
+              <a:rPr lang="en-US"/>
+              <a:t>23</a:t>
+            </a:fld>
+            <a:endParaRPr lang="en-US"/>
+          </a:p>
+        </p:txBody>
+      </p:sp>
+    </p:spTree>
+    <p:extLst>
+      <p:ext uri="{BB962C8B-B14F-4D97-AF65-F5344CB8AC3E}">
+        <p14:creationId xmlns:p14="http://schemas.microsoft.com/office/powerpoint/2010/main" val="261957040"/>
       </p:ext>
     </p:extLst>
   </p:cSld>
@@ -773,10 +1962,6 @@
           <a:bodyPr/>
           <a:lstStyle/>
           <a:p>
-            <a:r>
-              <a:rPr lang="en-US" dirty="0"/>
-              <a:t/>
-            </a:r>
             <a:endParaRPr lang="en-US" dirty="0"/>
           </a:p>
         </p:txBody>
@@ -861,10 +2046,6 @@
           <a:bodyPr/>
           <a:lstStyle/>
           <a:p>
-            <a:r>
-              <a:rPr lang="en-US" dirty="0"/>
-              <a:t/>
-            </a:r>
             <a:endParaRPr lang="en-US" dirty="0"/>
           </a:p>
         </p:txBody>
@@ -949,10 +2130,6 @@
           <a:bodyPr/>
           <a:lstStyle/>
           <a:p>
-            <a:r>
-              <a:rPr lang="en-US" dirty="0"/>
-              <a:t/>
-            </a:r>
             <a:endParaRPr lang="en-US" dirty="0"/>
           </a:p>
         </p:txBody>
@@ -1037,10 +2214,6 @@
           <a:bodyPr/>
           <a:lstStyle/>
           <a:p>
-            <a:r>
-              <a:rPr lang="en-US" dirty="0"/>
-              <a:t/>
-            </a:r>
             <a:endParaRPr lang="en-US" dirty="0"/>
           </a:p>
         </p:txBody>
@@ -1125,10 +2298,6 @@
           <a:bodyPr/>
           <a:lstStyle/>
           <a:p>
-            <a:r>
-              <a:rPr lang="en-US" dirty="0"/>
-              <a:t/>
-            </a:r>
             <a:endParaRPr lang="en-US" dirty="0"/>
           </a:p>
         </p:txBody>
@@ -1213,10 +2382,6 @@
           <a:bodyPr/>
           <a:lstStyle/>
           <a:p>
-            <a:r>
-              <a:rPr lang="en-US" dirty="0"/>
-              <a:t/>
-            </a:r>
             <a:endParaRPr lang="en-US" dirty="0"/>
           </a:p>
         </p:txBody>
@@ -1301,10 +2466,6 @@
           <a:bodyPr/>
           <a:lstStyle/>
           <a:p>
-            <a:r>
-              <a:rPr lang="en-US" dirty="0"/>
-              <a:t/>
-            </a:r>
             <a:endParaRPr lang="en-US" dirty="0"/>
           </a:p>
         </p:txBody>
@@ -1378,6 +2539,11 @@
 <file path=ppt/slideMasters/slideMaster1.xml><?xml version="1.0" encoding="utf-8"?>
 <p:sldMaster xmlns:a="http://schemas.openxmlformats.org/drawingml/2006/main" xmlns:r="http://schemas.openxmlformats.org/officeDocument/2006/relationships" xmlns:p="http://schemas.openxmlformats.org/presentationml/2006/main">
   <p:cSld>
+    <p:bg>
+      <p:bgRef idx="1001">
+        <a:schemeClr val="bg1"/>
+      </p:bgRef>
+    </p:bg>
     <p:spTree>
       <p:nvGrpSpPr>
         <p:cNvPr id="1" name=""/>
@@ -1660,6 +2826,7 @@
         <a:solidFill>
           <a:srgbClr val="0E1524"/>
         </a:solidFill>
+        <a:effectLst/>
       </p:bgPr>
     </p:bg>
     <p:spTree>
@@ -1695,6 +2862,13 @@
           </a:solidFill>
           <a:ln/>
         </p:spPr>
+        <p:txBody>
+          <a:bodyPr/>
+          <a:lstStyle/>
+          <a:p>
+            <a:endParaRPr lang="ja-JP" altLang="en-US"/>
+          </a:p>
+        </p:txBody>
       </p:sp>
       <p:sp>
         <p:nvSpPr>
@@ -1720,6 +2894,13 @@
             <a:prstDash val="solid"/>
           </a:ln>
         </p:spPr>
+        <p:txBody>
+          <a:bodyPr/>
+          <a:lstStyle/>
+          <a:p>
+            <a:endParaRPr lang="ja-JP" altLang="en-US"/>
+          </a:p>
+        </p:txBody>
       </p:sp>
       <p:sp>
         <p:nvSpPr>
@@ -1740,6 +2921,13 @@
           </a:solidFill>
           <a:ln/>
         </p:spPr>
+        <p:txBody>
+          <a:bodyPr/>
+          <a:lstStyle/>
+          <a:p>
+            <a:endParaRPr lang="ja-JP" altLang="en-US"/>
+          </a:p>
+        </p:txBody>
       </p:sp>
       <p:sp>
         <p:nvSpPr>
@@ -1762,7 +2950,7 @@
           <a:bodyPr wrap="square" lIns="0" tIns="0" rIns="0" bIns="0" rtlCol="0" anchor="ctr"/>
           <a:lstStyle/>
           <a:p>
-            <a:pPr algn="ctr" indent="0" marL="0">
+            <a:pPr marL="0" indent="0" algn="ctr">
               <a:buNone/>
             </a:pPr>
             <a:r>
@@ -1801,11 +2989,11 @@
           <a:bodyPr wrap="square" lIns="0" tIns="0" rIns="0" bIns="0" rtlCol="0" anchor="ctr"/>
           <a:lstStyle/>
           <a:p>
-            <a:pPr indent="0" marL="0">
-              <a:buNone/>
-            </a:pPr>
-            <a:r>
-              <a:rPr lang="en-US" sz="1200" b="1" spc="300" kern="0" dirty="0">
+            <a:pPr marL="0" indent="0">
+              <a:buNone/>
+            </a:pPr>
+            <a:r>
+              <a:rPr lang="en-US" sz="1200" b="1" kern="0" spc="300" dirty="0">
                 <a:solidFill>
                   <a:srgbClr val="2DD4BF"/>
                 </a:solidFill>
@@ -1840,7 +3028,7 @@
           <a:bodyPr wrap="square" lIns="0" tIns="0" rIns="0" bIns="0" rtlCol="0" anchor="ctr"/>
           <a:lstStyle/>
           <a:p>
-            <a:pPr indent="0" marL="0">
+            <a:pPr marL="0" indent="0">
               <a:buNone/>
             </a:pPr>
             <a:r>
@@ -1879,7 +3067,7 @@
           <a:bodyPr wrap="square" lIns="0" tIns="0" rIns="0" bIns="0" rtlCol="0" anchor="ctr"/>
           <a:lstStyle/>
           <a:p>
-            <a:pPr indent="0" marL="0">
+            <a:pPr marL="0" indent="0">
               <a:lnSpc>
                 <a:spcPct val="110000"/>
               </a:lnSpc>
@@ -1899,7 +3087,7 @@
             <a:endParaRPr lang="en-US" sz="1900" dirty="0"/>
           </a:p>
           <a:p>
-            <a:pPr indent="0" marL="0">
+            <a:pPr marL="0" indent="0">
               <a:lnSpc>
                 <a:spcPct val="110000"/>
               </a:lnSpc>
@@ -1946,6 +3134,13 @@
             <a:prstDash val="solid"/>
           </a:ln>
         </p:spPr>
+        <p:txBody>
+          <a:bodyPr/>
+          <a:lstStyle/>
+          <a:p>
+            <a:endParaRPr lang="ja-JP" altLang="en-US"/>
+          </a:p>
+        </p:txBody>
       </p:sp>
       <p:sp>
         <p:nvSpPr>
@@ -1968,7 +3163,7 @@
           <a:bodyPr wrap="square" lIns="0" tIns="0" rIns="0" bIns="0" rtlCol="0" anchor="ctr"/>
           <a:lstStyle/>
           <a:p>
-            <a:pPr algn="ctr" indent="0" marL="0">
+            <a:pPr marL="0" indent="0" algn="ctr">
               <a:buNone/>
             </a:pPr>
             <a:r>
@@ -2012,6 +3207,13 @@
             <a:prstDash val="solid"/>
           </a:ln>
         </p:spPr>
+        <p:txBody>
+          <a:bodyPr/>
+          <a:lstStyle/>
+          <a:p>
+            <a:endParaRPr lang="ja-JP" altLang="en-US"/>
+          </a:p>
+        </p:txBody>
       </p:sp>
       <p:sp>
         <p:nvSpPr>
@@ -2034,7 +3236,7 @@
           <a:bodyPr wrap="square" lIns="0" tIns="0" rIns="0" bIns="0" rtlCol="0" anchor="ctr"/>
           <a:lstStyle/>
           <a:p>
-            <a:pPr algn="ctr" indent="0" marL="0">
+            <a:pPr marL="0" indent="0" algn="ctr">
               <a:buNone/>
             </a:pPr>
             <a:r>
@@ -2078,6 +3280,13 @@
             <a:prstDash val="solid"/>
           </a:ln>
         </p:spPr>
+        <p:txBody>
+          <a:bodyPr/>
+          <a:lstStyle/>
+          <a:p>
+            <a:endParaRPr lang="ja-JP" altLang="en-US"/>
+          </a:p>
+        </p:txBody>
       </p:sp>
       <p:sp>
         <p:nvSpPr>
@@ -2100,7 +3309,7 @@
           <a:bodyPr wrap="square" lIns="0" tIns="0" rIns="0" bIns="0" rtlCol="0" anchor="ctr"/>
           <a:lstStyle/>
           <a:p>
-            <a:pPr algn="ctr" indent="0" marL="0">
+            <a:pPr marL="0" indent="0" algn="ctr">
               <a:buNone/>
             </a:pPr>
             <a:r>
@@ -2144,6 +3353,13 @@
             <a:prstDash val="solid"/>
           </a:ln>
         </p:spPr>
+        <p:txBody>
+          <a:bodyPr/>
+          <a:lstStyle/>
+          <a:p>
+            <a:endParaRPr lang="ja-JP" altLang="en-US"/>
+          </a:p>
+        </p:txBody>
       </p:sp>
       <p:sp>
         <p:nvSpPr>
@@ -2166,7 +3382,7 @@
           <a:bodyPr wrap="square" lIns="0" tIns="0" rIns="0" bIns="0" rtlCol="0" anchor="ctr"/>
           <a:lstStyle/>
           <a:p>
-            <a:pPr algn="ctr" indent="0" marL="0">
+            <a:pPr marL="0" indent="0" algn="ctr">
               <a:buNone/>
             </a:pPr>
             <a:r>
@@ -2205,7 +3421,7 @@
           <a:bodyPr wrap="square" lIns="0" tIns="0" rIns="0" bIns="0" rtlCol="0" anchor="ctr"/>
           <a:lstStyle/>
           <a:p>
-            <a:pPr indent="0" marL="0">
+            <a:pPr marL="0" indent="0">
               <a:buNone/>
             </a:pPr>
             <a:r>
@@ -2239,6 +3455,7 @@
         <a:solidFill>
           <a:srgbClr val="0E1524"/>
         </a:solidFill>
+        <a:effectLst/>
       </p:bgPr>
     </p:bg>
     <p:spTree>
@@ -2274,6 +3491,13 @@
           </a:solidFill>
           <a:ln/>
         </p:spPr>
+        <p:txBody>
+          <a:bodyPr/>
+          <a:lstStyle/>
+          <a:p>
+            <a:endParaRPr lang="ja-JP" altLang="en-US"/>
+          </a:p>
+        </p:txBody>
       </p:sp>
       <p:sp>
         <p:nvSpPr>
@@ -2294,6 +3518,13 @@
           </a:solidFill>
           <a:ln/>
         </p:spPr>
+        <p:txBody>
+          <a:bodyPr/>
+          <a:lstStyle/>
+          <a:p>
+            <a:endParaRPr lang="ja-JP" altLang="en-US"/>
+          </a:p>
+        </p:txBody>
       </p:sp>
       <p:sp>
         <p:nvSpPr>
@@ -2316,7 +3547,7 @@
           <a:bodyPr wrap="square" lIns="0" tIns="0" rIns="0" bIns="0" rtlCol="0" anchor="ctr"/>
           <a:lstStyle/>
           <a:p>
-            <a:pPr algn="ctr" indent="0" marL="0">
+            <a:pPr marL="0" indent="0" algn="ctr">
               <a:buNone/>
             </a:pPr>
             <a:r>
@@ -2355,11 +3586,11 @@
           <a:bodyPr wrap="square" lIns="0" tIns="0" rIns="0" bIns="0" rtlCol="0" anchor="ctr"/>
           <a:lstStyle/>
           <a:p>
-            <a:pPr indent="0" marL="0">
-              <a:buNone/>
-            </a:pPr>
-            <a:r>
-              <a:rPr lang="en-US" sz="1200" b="1" spc="300" kern="0" dirty="0">
+            <a:pPr marL="0" indent="0">
+              <a:buNone/>
+            </a:pPr>
+            <a:r>
+              <a:rPr lang="en-US" sz="1200" b="1" kern="0" spc="300" dirty="0">
                 <a:solidFill>
                   <a:srgbClr val="2DD4BF"/>
                 </a:solidFill>
@@ -2394,7 +3625,7 @@
           <a:bodyPr wrap="square" lIns="0" tIns="0" rIns="0" bIns="0" rtlCol="0" anchor="ctr"/>
           <a:lstStyle/>
           <a:p>
-            <a:pPr indent="0" marL="0">
+            <a:pPr marL="0" indent="0">
               <a:lnSpc>
                 <a:spcPct val="102000"/>
               </a:lnSpc>
@@ -2414,7 +3645,7 @@
             <a:endParaRPr lang="en-US" sz="4600" dirty="0"/>
           </a:p>
           <a:p>
-            <a:pPr indent="0" marL="0">
+            <a:pPr marL="0" indent="0">
               <a:lnSpc>
                 <a:spcPct val="102000"/>
               </a:lnSpc>
@@ -2454,6 +3685,13 @@
           </a:solidFill>
           <a:ln/>
         </p:spPr>
+        <p:txBody>
+          <a:bodyPr/>
+          <a:lstStyle/>
+          <a:p>
+            <a:endParaRPr lang="ja-JP" altLang="en-US"/>
+          </a:p>
+        </p:txBody>
       </p:sp>
       <p:sp>
         <p:nvSpPr>
@@ -2476,7 +3714,7 @@
           <a:bodyPr wrap="square" lIns="0" tIns="0" rIns="0" bIns="0" rtlCol="0" anchor="ctr"/>
           <a:lstStyle/>
           <a:p>
-            <a:pPr algn="ctr" indent="0" marL="0">
+            <a:pPr marL="0" indent="0" algn="ctr">
               <a:buNone/>
             </a:pPr>
             <a:r>
@@ -2515,7 +3753,7 @@
           <a:bodyPr wrap="square" lIns="0" tIns="0" rIns="0" bIns="0" rtlCol="0" anchor="ctr"/>
           <a:lstStyle/>
           <a:p>
-            <a:pPr indent="0" marL="0">
+            <a:pPr marL="0" indent="0">
               <a:buNone/>
             </a:pPr>
             <a:r>
@@ -2552,6 +3790,13 @@
           </a:solidFill>
           <a:ln/>
         </p:spPr>
+        <p:txBody>
+          <a:bodyPr/>
+          <a:lstStyle/>
+          <a:p>
+            <a:endParaRPr lang="ja-JP" altLang="en-US"/>
+          </a:p>
+        </p:txBody>
       </p:sp>
       <p:sp>
         <p:nvSpPr>
@@ -2574,7 +3819,7 @@
           <a:bodyPr wrap="square" lIns="0" tIns="0" rIns="0" bIns="0" rtlCol="0" anchor="ctr"/>
           <a:lstStyle/>
           <a:p>
-            <a:pPr algn="ctr" indent="0" marL="0">
+            <a:pPr marL="0" indent="0" algn="ctr">
               <a:buNone/>
             </a:pPr>
             <a:r>
@@ -2613,7 +3858,7 @@
           <a:bodyPr wrap="square" lIns="0" tIns="0" rIns="0" bIns="0" rtlCol="0" anchor="ctr"/>
           <a:lstStyle/>
           <a:p>
-            <a:pPr indent="0" marL="0">
+            <a:pPr marL="0" indent="0">
               <a:buNone/>
             </a:pPr>
             <a:r>
@@ -2650,6 +3895,13 @@
           </a:solidFill>
           <a:ln/>
         </p:spPr>
+        <p:txBody>
+          <a:bodyPr/>
+          <a:lstStyle/>
+          <a:p>
+            <a:endParaRPr lang="ja-JP" altLang="en-US"/>
+          </a:p>
+        </p:txBody>
       </p:sp>
       <p:sp>
         <p:nvSpPr>
@@ -2672,7 +3924,7 @@
           <a:bodyPr wrap="square" lIns="0" tIns="0" rIns="0" bIns="0" rtlCol="0" anchor="ctr"/>
           <a:lstStyle/>
           <a:p>
-            <a:pPr algn="ctr" indent="0" marL="0">
+            <a:pPr marL="0" indent="0" algn="ctr">
               <a:buNone/>
             </a:pPr>
             <a:r>
@@ -2711,7 +3963,7 @@
           <a:bodyPr wrap="square" lIns="0" tIns="0" rIns="0" bIns="0" rtlCol="0" anchor="ctr"/>
           <a:lstStyle/>
           <a:p>
-            <a:pPr indent="0" marL="0">
+            <a:pPr marL="0" indent="0">
               <a:buNone/>
             </a:pPr>
             <a:r>
@@ -2750,7 +4002,7 @@
           <a:bodyPr wrap="square" lIns="0" tIns="0" rIns="0" bIns="0" rtlCol="0" anchor="ctr"/>
           <a:lstStyle/>
           <a:p>
-            <a:pPr indent="0" marL="0">
+            <a:pPr marL="0" indent="0">
               <a:buNone/>
             </a:pPr>
             <a:r>
@@ -2789,7 +4041,7 @@
           <a:bodyPr wrap="square" lIns="0" tIns="0" rIns="0" bIns="0" rtlCol="0" anchor="ctr"/>
           <a:lstStyle/>
           <a:p>
-            <a:pPr indent="0" marL="0">
+            <a:pPr marL="0" indent="0">
               <a:buNone/>
             </a:pPr>
             <a:r>
@@ -2808,6 +4060,2040 @@
         </p:txBody>
       </p:sp>
     </p:spTree>
+  </p:cSld>
+  <p:clrMapOvr>
+    <a:masterClrMapping/>
+  </p:clrMapOvr>
+</p:sld>
+</file>
+
+<file path=ppt/slides/slide11.xml><?xml version="1.0" encoding="utf-8"?>
+<p:sld xmlns:a="http://schemas.openxmlformats.org/drawingml/2006/main" xmlns:r="http://schemas.openxmlformats.org/officeDocument/2006/relationships" xmlns:p="http://schemas.openxmlformats.org/presentationml/2006/main">
+  <p:cSld>
+    <p:bg>
+      <p:bgPr>
+        <a:solidFill>
+          <a:srgbClr val="F4F6F9"/>
+        </a:solidFill>
+        <a:effectLst/>
+      </p:bgPr>
+    </p:bg>
+    <p:spTree>
+      <p:nvGrpSpPr>
+        <p:cNvPr id="1" name="">
+          <a:extLst>
+            <a:ext uri="{FF2B5EF4-FFF2-40B4-BE49-F238E27FC236}">
+              <a16:creationId xmlns:a16="http://schemas.microsoft.com/office/drawing/2014/main" id="{DE7E9AD5-AA90-4EF7-5035-668965B731A3}"/>
+            </a:ext>
+          </a:extLst>
+        </p:cNvPr>
+        <p:cNvGrpSpPr/>
+        <p:nvPr/>
+      </p:nvGrpSpPr>
+      <p:grpSpPr>
+        <a:xfrm>
+          <a:off x="0" y="0"/>
+          <a:ext cx="0" cy="0"/>
+          <a:chOff x="0" y="0"/>
+          <a:chExt cx="0" cy="0"/>
+        </a:xfrm>
+      </p:grpSpPr>
+      <p:sp>
+        <p:nvSpPr>
+          <p:cNvPr id="2" name="Text 0">
+            <a:extLst>
+              <a:ext uri="{FF2B5EF4-FFF2-40B4-BE49-F238E27FC236}">
+                <a16:creationId xmlns:a16="http://schemas.microsoft.com/office/drawing/2014/main" id="{D8BEFB4B-FA47-FCA5-0704-807F330BAE94}"/>
+              </a:ext>
+            </a:extLst>
+          </p:cNvPr>
+          <p:cNvSpPr/>
+          <p:nvPr/>
+        </p:nvSpPr>
+        <p:spPr>
+          <a:xfrm>
+            <a:off x="548640" y="502920"/>
+            <a:ext cx="8229600" cy="274320"/>
+          </a:xfrm>
+          <a:prstGeom prst="rect">
+            <a:avLst/>
+          </a:prstGeom>
+          <a:noFill/>
+          <a:ln/>
+        </p:spPr>
+        <p:txBody>
+          <a:bodyPr wrap="square" lIns="0" tIns="0" rIns="0" bIns="0" rtlCol="0" anchor="ctr"/>
+          <a:lstStyle/>
+          <a:p>
+            <a:pPr marL="0" indent="0">
+              <a:buNone/>
+            </a:pPr>
+            <a:r>
+              <a:rPr lang="en-US" dirty="0" err="1"/>
+              <a:t>Apendix</a:t>
+            </a:r>
+            <a:r>
+              <a:rPr lang="en-US" dirty="0"/>
+              <a:t> </a:t>
+            </a:r>
+          </a:p>
+        </p:txBody>
+      </p:sp>
+      <p:sp>
+        <p:nvSpPr>
+          <p:cNvPr id="3" name="Text 1">
+            <a:extLst>
+              <a:ext uri="{FF2B5EF4-FFF2-40B4-BE49-F238E27FC236}">
+                <a16:creationId xmlns:a16="http://schemas.microsoft.com/office/drawing/2014/main" id="{B9525260-19AB-80DD-11D5-D056FBB0ADC8}"/>
+              </a:ext>
+            </a:extLst>
+          </p:cNvPr>
+          <p:cNvSpPr/>
+          <p:nvPr/>
+        </p:nvSpPr>
+        <p:spPr>
+          <a:xfrm>
+            <a:off x="548640" y="777240"/>
+            <a:ext cx="10972800" cy="640080"/>
+          </a:xfrm>
+          <a:prstGeom prst="rect">
+            <a:avLst/>
+          </a:prstGeom>
+          <a:noFill/>
+          <a:ln/>
+        </p:spPr>
+        <p:txBody>
+          <a:bodyPr wrap="square" lIns="0" tIns="0" rIns="0" bIns="0" rtlCol="0" anchor="ctr"/>
+          <a:lstStyle/>
+          <a:p>
+            <a:pPr marL="0" indent="0">
+              <a:buNone/>
+            </a:pPr>
+            <a:r>
+              <a:rPr lang="en-US" sz="2800" b="1" dirty="0">
+                <a:solidFill>
+                  <a:srgbClr val="14203A"/>
+                </a:solidFill>
+                <a:latin typeface="Calibri" pitchFamily="34" charset="0"/>
+                <a:ea typeface="Calibri" pitchFamily="34" charset="-122"/>
+                <a:cs typeface="Calibri" pitchFamily="34" charset="-120"/>
+              </a:rPr>
+              <a:t>1. Public Harness-</a:t>
+            </a:r>
+            <a:r>
+              <a:rPr lang="en-US" sz="2800" b="1" dirty="0" err="1">
+                <a:solidFill>
+                  <a:srgbClr val="14203A"/>
+                </a:solidFill>
+                <a:latin typeface="Calibri" pitchFamily="34" charset="0"/>
+                <a:ea typeface="Calibri" pitchFamily="34" charset="-122"/>
+                <a:cs typeface="Calibri" pitchFamily="34" charset="-120"/>
+              </a:rPr>
+              <a:t>ToolKIT</a:t>
+            </a:r>
+            <a:r>
+              <a:rPr lang="en-US" sz="2800" b="1" dirty="0">
+                <a:solidFill>
+                  <a:srgbClr val="14203A"/>
+                </a:solidFill>
+                <a:latin typeface="Calibri" pitchFamily="34" charset="0"/>
+                <a:ea typeface="Calibri" pitchFamily="34" charset="-122"/>
+                <a:cs typeface="Calibri" pitchFamily="34" charset="-120"/>
+              </a:rPr>
+              <a:t> for install</a:t>
+            </a:r>
+            <a:endParaRPr lang="en-US" sz="2800" dirty="0"/>
+          </a:p>
+        </p:txBody>
+      </p:sp>
+      <p:sp>
+        <p:nvSpPr>
+          <p:cNvPr id="25" name="Text 0">
+            <a:extLst>
+              <a:ext uri="{FF2B5EF4-FFF2-40B4-BE49-F238E27FC236}">
+                <a16:creationId xmlns:a16="http://schemas.microsoft.com/office/drawing/2014/main" id="{F3BDBD21-50B3-188D-1652-7C06F5FA4223}"/>
+              </a:ext>
+            </a:extLst>
+          </p:cNvPr>
+          <p:cNvSpPr/>
+          <p:nvPr/>
+        </p:nvSpPr>
+        <p:spPr>
+          <a:xfrm>
+            <a:off x="548640" y="1311178"/>
+            <a:ext cx="8229600" cy="274320"/>
+          </a:xfrm>
+          <a:prstGeom prst="rect">
+            <a:avLst/>
+          </a:prstGeom>
+          <a:noFill/>
+          <a:ln/>
+        </p:spPr>
+        <p:txBody>
+          <a:bodyPr wrap="square" lIns="0" tIns="0" rIns="0" bIns="0" rtlCol="0" anchor="ctr"/>
+          <a:lstStyle/>
+          <a:p>
+            <a:r>
+              <a:rPr lang="en-US" sz="1200" dirty="0"/>
+              <a:t>https://github.com/manhds82/Harness-ToolKIT</a:t>
+            </a:r>
+          </a:p>
+        </p:txBody>
+      </p:sp>
+      <p:pic>
+        <p:nvPicPr>
+          <p:cNvPr id="27" name="図 26">
+            <a:extLst>
+              <a:ext uri="{FF2B5EF4-FFF2-40B4-BE49-F238E27FC236}">
+                <a16:creationId xmlns:a16="http://schemas.microsoft.com/office/drawing/2014/main" id="{AA65791D-D590-659B-6127-5D2072C74591}"/>
+              </a:ext>
+            </a:extLst>
+          </p:cNvPr>
+          <p:cNvPicPr>
+            <a:picLocks noChangeAspect="1"/>
+          </p:cNvPicPr>
+          <p:nvPr/>
+        </p:nvPicPr>
+        <p:blipFill>
+          <a:blip r:embed="rId3"/>
+          <a:stretch>
+            <a:fillRect/>
+          </a:stretch>
+        </p:blipFill>
+        <p:spPr>
+          <a:xfrm>
+            <a:off x="4445469" y="1687226"/>
+            <a:ext cx="3564117" cy="4932385"/>
+          </a:xfrm>
+          <a:prstGeom prst="rect">
+            <a:avLst/>
+          </a:prstGeom>
+          <a:ln>
+            <a:solidFill>
+              <a:schemeClr val="accent1"/>
+            </a:solidFill>
+          </a:ln>
+        </p:spPr>
+      </p:pic>
+      <p:pic>
+        <p:nvPicPr>
+          <p:cNvPr id="29" name="図 28">
+            <a:extLst>
+              <a:ext uri="{FF2B5EF4-FFF2-40B4-BE49-F238E27FC236}">
+                <a16:creationId xmlns:a16="http://schemas.microsoft.com/office/drawing/2014/main" id="{28969EA4-FCD7-8B8D-4ACF-DDDE0EEAD103}"/>
+              </a:ext>
+            </a:extLst>
+          </p:cNvPr>
+          <p:cNvPicPr>
+            <a:picLocks noChangeAspect="1"/>
+          </p:cNvPicPr>
+          <p:nvPr/>
+        </p:nvPicPr>
+        <p:blipFill>
+          <a:blip r:embed="rId4"/>
+          <a:stretch>
+            <a:fillRect/>
+          </a:stretch>
+        </p:blipFill>
+        <p:spPr>
+          <a:xfrm>
+            <a:off x="8123469" y="1687226"/>
+            <a:ext cx="3564117" cy="4921351"/>
+          </a:xfrm>
+          <a:prstGeom prst="rect">
+            <a:avLst/>
+          </a:prstGeom>
+          <a:ln>
+            <a:solidFill>
+              <a:schemeClr val="accent1"/>
+            </a:solidFill>
+          </a:ln>
+        </p:spPr>
+      </p:pic>
+      <p:pic>
+        <p:nvPicPr>
+          <p:cNvPr id="31" name="図 30">
+            <a:extLst>
+              <a:ext uri="{FF2B5EF4-FFF2-40B4-BE49-F238E27FC236}">
+                <a16:creationId xmlns:a16="http://schemas.microsoft.com/office/drawing/2014/main" id="{24CE5909-98BF-B1DA-BD28-CB4367D357AD}"/>
+              </a:ext>
+            </a:extLst>
+          </p:cNvPr>
+          <p:cNvPicPr>
+            <a:picLocks noChangeAspect="1"/>
+          </p:cNvPicPr>
+          <p:nvPr/>
+        </p:nvPicPr>
+        <p:blipFill>
+          <a:blip r:embed="rId5"/>
+          <a:stretch>
+            <a:fillRect/>
+          </a:stretch>
+        </p:blipFill>
+        <p:spPr>
+          <a:xfrm>
+            <a:off x="548640" y="1694375"/>
+            <a:ext cx="3782946" cy="4921351"/>
+          </a:xfrm>
+          <a:prstGeom prst="rect">
+            <a:avLst/>
+          </a:prstGeom>
+          <a:ln>
+            <a:solidFill>
+              <a:schemeClr val="accent1"/>
+            </a:solidFill>
+          </a:ln>
+        </p:spPr>
+      </p:pic>
+    </p:spTree>
+    <p:extLst>
+      <p:ext uri="{BB962C8B-B14F-4D97-AF65-F5344CB8AC3E}">
+        <p14:creationId xmlns:p14="http://schemas.microsoft.com/office/powerpoint/2010/main" val="2448604584"/>
+      </p:ext>
+    </p:extLst>
+  </p:cSld>
+  <p:clrMapOvr>
+    <a:masterClrMapping/>
+  </p:clrMapOvr>
+</p:sld>
+</file>
+
+<file path=ppt/slides/slide12.xml><?xml version="1.0" encoding="utf-8"?>
+<p:sld xmlns:a="http://schemas.openxmlformats.org/drawingml/2006/main" xmlns:r="http://schemas.openxmlformats.org/officeDocument/2006/relationships" xmlns:p="http://schemas.openxmlformats.org/presentationml/2006/main">
+  <p:cSld>
+    <p:bg>
+      <p:bgPr>
+        <a:solidFill>
+          <a:srgbClr val="F4F6F9"/>
+        </a:solidFill>
+        <a:effectLst/>
+      </p:bgPr>
+    </p:bg>
+    <p:spTree>
+      <p:nvGrpSpPr>
+        <p:cNvPr id="1" name="">
+          <a:extLst>
+            <a:ext uri="{FF2B5EF4-FFF2-40B4-BE49-F238E27FC236}">
+              <a16:creationId xmlns:a16="http://schemas.microsoft.com/office/drawing/2014/main" id="{6908E4D0-EFBA-BBD9-D109-0BD8B5B92BA1}"/>
+            </a:ext>
+          </a:extLst>
+        </p:cNvPr>
+        <p:cNvGrpSpPr/>
+        <p:nvPr/>
+      </p:nvGrpSpPr>
+      <p:grpSpPr>
+        <a:xfrm>
+          <a:off x="0" y="0"/>
+          <a:ext cx="0" cy="0"/>
+          <a:chOff x="0" y="0"/>
+          <a:chExt cx="0" cy="0"/>
+        </a:xfrm>
+      </p:grpSpPr>
+      <p:sp>
+        <p:nvSpPr>
+          <p:cNvPr id="2" name="Text 0">
+            <a:extLst>
+              <a:ext uri="{FF2B5EF4-FFF2-40B4-BE49-F238E27FC236}">
+                <a16:creationId xmlns:a16="http://schemas.microsoft.com/office/drawing/2014/main" id="{7FCFEBA0-48B5-0552-20FF-C63FAB266FF1}"/>
+              </a:ext>
+            </a:extLst>
+          </p:cNvPr>
+          <p:cNvSpPr/>
+          <p:nvPr/>
+        </p:nvSpPr>
+        <p:spPr>
+          <a:xfrm>
+            <a:off x="548640" y="502920"/>
+            <a:ext cx="8229600" cy="274320"/>
+          </a:xfrm>
+          <a:prstGeom prst="rect">
+            <a:avLst/>
+          </a:prstGeom>
+          <a:noFill/>
+          <a:ln/>
+        </p:spPr>
+        <p:txBody>
+          <a:bodyPr wrap="square" lIns="0" tIns="0" rIns="0" bIns="0" rtlCol="0" anchor="ctr"/>
+          <a:lstStyle/>
+          <a:p>
+            <a:pPr marL="0" indent="0">
+              <a:buNone/>
+            </a:pPr>
+            <a:r>
+              <a:rPr lang="en-US" dirty="0" err="1"/>
+              <a:t>Apendix</a:t>
+            </a:r>
+            <a:r>
+              <a:rPr lang="en-US" dirty="0"/>
+              <a:t> </a:t>
+            </a:r>
+          </a:p>
+        </p:txBody>
+      </p:sp>
+      <p:sp>
+        <p:nvSpPr>
+          <p:cNvPr id="3" name="Text 1">
+            <a:extLst>
+              <a:ext uri="{FF2B5EF4-FFF2-40B4-BE49-F238E27FC236}">
+                <a16:creationId xmlns:a16="http://schemas.microsoft.com/office/drawing/2014/main" id="{A5297FDC-C405-EA3A-AAC6-947AB0516FE4}"/>
+              </a:ext>
+            </a:extLst>
+          </p:cNvPr>
+          <p:cNvSpPr/>
+          <p:nvPr/>
+        </p:nvSpPr>
+        <p:spPr>
+          <a:xfrm>
+            <a:off x="548640" y="777240"/>
+            <a:ext cx="10972800" cy="640080"/>
+          </a:xfrm>
+          <a:prstGeom prst="rect">
+            <a:avLst/>
+          </a:prstGeom>
+          <a:noFill/>
+          <a:ln/>
+        </p:spPr>
+        <p:txBody>
+          <a:bodyPr wrap="square" lIns="0" tIns="0" rIns="0" bIns="0" rtlCol="0" anchor="ctr"/>
+          <a:lstStyle/>
+          <a:p>
+            <a:pPr marL="0" indent="0">
+              <a:buNone/>
+            </a:pPr>
+            <a:r>
+              <a:rPr lang="en-US" sz="2800" b="1" dirty="0">
+                <a:solidFill>
+                  <a:srgbClr val="14203A"/>
+                </a:solidFill>
+                <a:latin typeface="Calibri" pitchFamily="34" charset="0"/>
+                <a:ea typeface="Calibri" pitchFamily="34" charset="-122"/>
+                <a:cs typeface="Calibri" pitchFamily="34" charset="-120"/>
+              </a:rPr>
+              <a:t>2. Auto install and copy rule/harness into old/new project</a:t>
+            </a:r>
+            <a:endParaRPr lang="en-US" sz="2800" dirty="0"/>
+          </a:p>
+        </p:txBody>
+      </p:sp>
+      <p:sp>
+        <p:nvSpPr>
+          <p:cNvPr id="25" name="Text 0">
+            <a:extLst>
+              <a:ext uri="{FF2B5EF4-FFF2-40B4-BE49-F238E27FC236}">
+                <a16:creationId xmlns:a16="http://schemas.microsoft.com/office/drawing/2014/main" id="{F9CE5224-AA47-83D8-9971-94427E9A79F3}"/>
+              </a:ext>
+            </a:extLst>
+          </p:cNvPr>
+          <p:cNvSpPr/>
+          <p:nvPr/>
+        </p:nvSpPr>
+        <p:spPr>
+          <a:xfrm>
+            <a:off x="548640" y="1311178"/>
+            <a:ext cx="8229600" cy="274320"/>
+          </a:xfrm>
+          <a:prstGeom prst="rect">
+            <a:avLst/>
+          </a:prstGeom>
+          <a:noFill/>
+          <a:ln/>
+        </p:spPr>
+        <p:txBody>
+          <a:bodyPr wrap="square" lIns="0" tIns="0" rIns="0" bIns="0" rtlCol="0" anchor="ctr"/>
+          <a:lstStyle/>
+          <a:p>
+            <a:endParaRPr lang="en-US" sz="1200" dirty="0"/>
+          </a:p>
+        </p:txBody>
+      </p:sp>
+      <p:pic>
+        <p:nvPicPr>
+          <p:cNvPr id="7" name="図 6">
+            <a:extLst>
+              <a:ext uri="{FF2B5EF4-FFF2-40B4-BE49-F238E27FC236}">
+                <a16:creationId xmlns:a16="http://schemas.microsoft.com/office/drawing/2014/main" id="{A7E5F8C6-7D6F-1BB9-C838-387FD00140ED}"/>
+              </a:ext>
+            </a:extLst>
+          </p:cNvPr>
+          <p:cNvPicPr>
+            <a:picLocks noChangeAspect="1"/>
+          </p:cNvPicPr>
+          <p:nvPr/>
+        </p:nvPicPr>
+        <p:blipFill>
+          <a:blip r:embed="rId3"/>
+          <a:stretch>
+            <a:fillRect/>
+          </a:stretch>
+        </p:blipFill>
+        <p:spPr>
+          <a:xfrm>
+            <a:off x="6219724" y="1417321"/>
+            <a:ext cx="5168712" cy="2961104"/>
+          </a:xfrm>
+          <a:prstGeom prst="rect">
+            <a:avLst/>
+          </a:prstGeom>
+          <a:ln>
+            <a:solidFill>
+              <a:schemeClr val="accent1"/>
+            </a:solidFill>
+          </a:ln>
+        </p:spPr>
+      </p:pic>
+      <p:pic>
+        <p:nvPicPr>
+          <p:cNvPr id="9" name="図 8">
+            <a:extLst>
+              <a:ext uri="{FF2B5EF4-FFF2-40B4-BE49-F238E27FC236}">
+                <a16:creationId xmlns:a16="http://schemas.microsoft.com/office/drawing/2014/main" id="{9B7608AD-A75F-F50C-364B-4917BA0CF648}"/>
+              </a:ext>
+            </a:extLst>
+          </p:cNvPr>
+          <p:cNvPicPr>
+            <a:picLocks noChangeAspect="1"/>
+          </p:cNvPicPr>
+          <p:nvPr/>
+        </p:nvPicPr>
+        <p:blipFill>
+          <a:blip r:embed="rId4"/>
+          <a:stretch>
+            <a:fillRect/>
+          </a:stretch>
+        </p:blipFill>
+        <p:spPr>
+          <a:xfrm>
+            <a:off x="6219724" y="4541695"/>
+            <a:ext cx="5168712" cy="2024412"/>
+          </a:xfrm>
+          <a:prstGeom prst="rect">
+            <a:avLst/>
+          </a:prstGeom>
+          <a:ln>
+            <a:solidFill>
+              <a:schemeClr val="accent1"/>
+            </a:solidFill>
+          </a:ln>
+        </p:spPr>
+      </p:pic>
+      <p:pic>
+        <p:nvPicPr>
+          <p:cNvPr id="11" name="図 10">
+            <a:extLst>
+              <a:ext uri="{FF2B5EF4-FFF2-40B4-BE49-F238E27FC236}">
+                <a16:creationId xmlns:a16="http://schemas.microsoft.com/office/drawing/2014/main" id="{064F2BE2-708D-6102-A108-A99AD694E34A}"/>
+              </a:ext>
+            </a:extLst>
+          </p:cNvPr>
+          <p:cNvPicPr>
+            <a:picLocks noChangeAspect="1"/>
+          </p:cNvPicPr>
+          <p:nvPr/>
+        </p:nvPicPr>
+        <p:blipFill>
+          <a:blip r:embed="rId5"/>
+          <a:stretch>
+            <a:fillRect/>
+          </a:stretch>
+        </p:blipFill>
+        <p:spPr>
+          <a:xfrm>
+            <a:off x="563892" y="1417320"/>
+            <a:ext cx="5293619" cy="5148787"/>
+          </a:xfrm>
+          <a:prstGeom prst="rect">
+            <a:avLst/>
+          </a:prstGeom>
+          <a:ln>
+            <a:solidFill>
+              <a:schemeClr val="accent1"/>
+            </a:solidFill>
+          </a:ln>
+        </p:spPr>
+      </p:pic>
+    </p:spTree>
+    <p:extLst>
+      <p:ext uri="{BB962C8B-B14F-4D97-AF65-F5344CB8AC3E}">
+        <p14:creationId xmlns:p14="http://schemas.microsoft.com/office/powerpoint/2010/main" val="2039399810"/>
+      </p:ext>
+    </p:extLst>
+  </p:cSld>
+  <p:clrMapOvr>
+    <a:masterClrMapping/>
+  </p:clrMapOvr>
+</p:sld>
+</file>
+
+<file path=ppt/slides/slide13.xml><?xml version="1.0" encoding="utf-8"?>
+<p:sld xmlns:a="http://schemas.openxmlformats.org/drawingml/2006/main" xmlns:r="http://schemas.openxmlformats.org/officeDocument/2006/relationships" xmlns:p="http://schemas.openxmlformats.org/presentationml/2006/main">
+  <p:cSld>
+    <p:bg>
+      <p:bgPr>
+        <a:solidFill>
+          <a:srgbClr val="F4F6F9"/>
+        </a:solidFill>
+        <a:effectLst/>
+      </p:bgPr>
+    </p:bg>
+    <p:spTree>
+      <p:nvGrpSpPr>
+        <p:cNvPr id="1" name="">
+          <a:extLst>
+            <a:ext uri="{FF2B5EF4-FFF2-40B4-BE49-F238E27FC236}">
+              <a16:creationId xmlns:a16="http://schemas.microsoft.com/office/drawing/2014/main" id="{D36B6AD7-281C-0224-F0A9-5D0EE9E7955D}"/>
+            </a:ext>
+          </a:extLst>
+        </p:cNvPr>
+        <p:cNvGrpSpPr/>
+        <p:nvPr/>
+      </p:nvGrpSpPr>
+      <p:grpSpPr>
+        <a:xfrm>
+          <a:off x="0" y="0"/>
+          <a:ext cx="0" cy="0"/>
+          <a:chOff x="0" y="0"/>
+          <a:chExt cx="0" cy="0"/>
+        </a:xfrm>
+      </p:grpSpPr>
+      <p:sp>
+        <p:nvSpPr>
+          <p:cNvPr id="2" name="Text 0">
+            <a:extLst>
+              <a:ext uri="{FF2B5EF4-FFF2-40B4-BE49-F238E27FC236}">
+                <a16:creationId xmlns:a16="http://schemas.microsoft.com/office/drawing/2014/main" id="{F24507CD-1AE9-4F3F-2D52-F77B93C3A601}"/>
+              </a:ext>
+            </a:extLst>
+          </p:cNvPr>
+          <p:cNvSpPr/>
+          <p:nvPr/>
+        </p:nvSpPr>
+        <p:spPr>
+          <a:xfrm>
+            <a:off x="548640" y="502920"/>
+            <a:ext cx="8229600" cy="274320"/>
+          </a:xfrm>
+          <a:prstGeom prst="rect">
+            <a:avLst/>
+          </a:prstGeom>
+          <a:noFill/>
+          <a:ln/>
+        </p:spPr>
+        <p:txBody>
+          <a:bodyPr wrap="square" lIns="0" tIns="0" rIns="0" bIns="0" rtlCol="0" anchor="ctr"/>
+          <a:lstStyle/>
+          <a:p>
+            <a:pPr marL="0" indent="0">
+              <a:buNone/>
+            </a:pPr>
+            <a:r>
+              <a:rPr lang="en-US" dirty="0" err="1"/>
+              <a:t>Apendix</a:t>
+            </a:r>
+            <a:r>
+              <a:rPr lang="en-US" dirty="0"/>
+              <a:t> </a:t>
+            </a:r>
+          </a:p>
+        </p:txBody>
+      </p:sp>
+      <p:sp>
+        <p:nvSpPr>
+          <p:cNvPr id="3" name="Text 1">
+            <a:extLst>
+              <a:ext uri="{FF2B5EF4-FFF2-40B4-BE49-F238E27FC236}">
+                <a16:creationId xmlns:a16="http://schemas.microsoft.com/office/drawing/2014/main" id="{BF766406-53E9-BB95-96A5-FD47058B1377}"/>
+              </a:ext>
+            </a:extLst>
+          </p:cNvPr>
+          <p:cNvSpPr/>
+          <p:nvPr/>
+        </p:nvSpPr>
+        <p:spPr>
+          <a:xfrm>
+            <a:off x="548640" y="777240"/>
+            <a:ext cx="10972800" cy="640080"/>
+          </a:xfrm>
+          <a:prstGeom prst="rect">
+            <a:avLst/>
+          </a:prstGeom>
+          <a:noFill/>
+          <a:ln/>
+        </p:spPr>
+        <p:txBody>
+          <a:bodyPr wrap="square" lIns="0" tIns="0" rIns="0" bIns="0" rtlCol="0" anchor="ctr"/>
+          <a:lstStyle/>
+          <a:p>
+            <a:pPr marL="0" indent="0">
+              <a:buNone/>
+            </a:pPr>
+            <a:r>
+              <a:rPr lang="en-US" sz="2800" b="1" dirty="0">
+                <a:solidFill>
+                  <a:srgbClr val="14203A"/>
+                </a:solidFill>
+                <a:latin typeface="Calibri" pitchFamily="34" charset="0"/>
+                <a:ea typeface="Calibri" pitchFamily="34" charset="-122"/>
+                <a:cs typeface="Calibri" pitchFamily="34" charset="-120"/>
+              </a:rPr>
+              <a:t>3. Portal for control project data (1/7)</a:t>
+            </a:r>
+            <a:endParaRPr lang="en-US" sz="2800" dirty="0"/>
+          </a:p>
+        </p:txBody>
+      </p:sp>
+      <p:sp>
+        <p:nvSpPr>
+          <p:cNvPr id="25" name="Text 0">
+            <a:extLst>
+              <a:ext uri="{FF2B5EF4-FFF2-40B4-BE49-F238E27FC236}">
+                <a16:creationId xmlns:a16="http://schemas.microsoft.com/office/drawing/2014/main" id="{217E25DD-E5C8-71A1-ECCE-EEFE06539484}"/>
+              </a:ext>
+            </a:extLst>
+          </p:cNvPr>
+          <p:cNvSpPr/>
+          <p:nvPr/>
+        </p:nvSpPr>
+        <p:spPr>
+          <a:xfrm>
+            <a:off x="548640" y="1311178"/>
+            <a:ext cx="8229600" cy="274320"/>
+          </a:xfrm>
+          <a:prstGeom prst="rect">
+            <a:avLst/>
+          </a:prstGeom>
+          <a:noFill/>
+          <a:ln/>
+        </p:spPr>
+        <p:txBody>
+          <a:bodyPr wrap="square" lIns="0" tIns="0" rIns="0" bIns="0" rtlCol="0" anchor="ctr"/>
+          <a:lstStyle/>
+          <a:p>
+            <a:endParaRPr lang="en-US" sz="1200" dirty="0"/>
+          </a:p>
+        </p:txBody>
+      </p:sp>
+      <p:pic>
+        <p:nvPicPr>
+          <p:cNvPr id="5" name="図 4">
+            <a:extLst>
+              <a:ext uri="{FF2B5EF4-FFF2-40B4-BE49-F238E27FC236}">
+                <a16:creationId xmlns:a16="http://schemas.microsoft.com/office/drawing/2014/main" id="{58D13DF3-B83A-5AAF-43A2-1E7A8501AFC5}"/>
+              </a:ext>
+            </a:extLst>
+          </p:cNvPr>
+          <p:cNvPicPr>
+            <a:picLocks noChangeAspect="1"/>
+          </p:cNvPicPr>
+          <p:nvPr/>
+        </p:nvPicPr>
+        <p:blipFill>
+          <a:blip r:embed="rId3"/>
+          <a:stretch>
+            <a:fillRect/>
+          </a:stretch>
+        </p:blipFill>
+        <p:spPr>
+          <a:xfrm>
+            <a:off x="1407943" y="1311178"/>
+            <a:ext cx="9376114" cy="5420834"/>
+          </a:xfrm>
+          <a:prstGeom prst="rect">
+            <a:avLst/>
+          </a:prstGeom>
+          <a:ln>
+            <a:solidFill>
+              <a:schemeClr val="accent1"/>
+            </a:solidFill>
+          </a:ln>
+        </p:spPr>
+      </p:pic>
+    </p:spTree>
+    <p:extLst>
+      <p:ext uri="{BB962C8B-B14F-4D97-AF65-F5344CB8AC3E}">
+        <p14:creationId xmlns:p14="http://schemas.microsoft.com/office/powerpoint/2010/main" val="815056007"/>
+      </p:ext>
+    </p:extLst>
+  </p:cSld>
+  <p:clrMapOvr>
+    <a:masterClrMapping/>
+  </p:clrMapOvr>
+</p:sld>
+</file>
+
+<file path=ppt/slides/slide14.xml><?xml version="1.0" encoding="utf-8"?>
+<p:sld xmlns:a="http://schemas.openxmlformats.org/drawingml/2006/main" xmlns:r="http://schemas.openxmlformats.org/officeDocument/2006/relationships" xmlns:p="http://schemas.openxmlformats.org/presentationml/2006/main">
+  <p:cSld>
+    <p:bg>
+      <p:bgPr>
+        <a:solidFill>
+          <a:srgbClr val="F4F6F9"/>
+        </a:solidFill>
+        <a:effectLst/>
+      </p:bgPr>
+    </p:bg>
+    <p:spTree>
+      <p:nvGrpSpPr>
+        <p:cNvPr id="1" name="">
+          <a:extLst>
+            <a:ext uri="{FF2B5EF4-FFF2-40B4-BE49-F238E27FC236}">
+              <a16:creationId xmlns:a16="http://schemas.microsoft.com/office/drawing/2014/main" id="{F54AA49E-A0D3-D254-5758-E0F58C4B1453}"/>
+            </a:ext>
+          </a:extLst>
+        </p:cNvPr>
+        <p:cNvGrpSpPr/>
+        <p:nvPr/>
+      </p:nvGrpSpPr>
+      <p:grpSpPr>
+        <a:xfrm>
+          <a:off x="0" y="0"/>
+          <a:ext cx="0" cy="0"/>
+          <a:chOff x="0" y="0"/>
+          <a:chExt cx="0" cy="0"/>
+        </a:xfrm>
+      </p:grpSpPr>
+      <p:sp>
+        <p:nvSpPr>
+          <p:cNvPr id="2" name="Text 0">
+            <a:extLst>
+              <a:ext uri="{FF2B5EF4-FFF2-40B4-BE49-F238E27FC236}">
+                <a16:creationId xmlns:a16="http://schemas.microsoft.com/office/drawing/2014/main" id="{473F33D2-55E0-591F-FC8D-CB271C9C4A92}"/>
+              </a:ext>
+            </a:extLst>
+          </p:cNvPr>
+          <p:cNvSpPr/>
+          <p:nvPr/>
+        </p:nvSpPr>
+        <p:spPr>
+          <a:xfrm>
+            <a:off x="548640" y="161175"/>
+            <a:ext cx="8229600" cy="274320"/>
+          </a:xfrm>
+          <a:prstGeom prst="rect">
+            <a:avLst/>
+          </a:prstGeom>
+          <a:noFill/>
+          <a:ln/>
+        </p:spPr>
+        <p:txBody>
+          <a:bodyPr wrap="square" lIns="0" tIns="0" rIns="0" bIns="0" rtlCol="0" anchor="ctr"/>
+          <a:lstStyle/>
+          <a:p>
+            <a:pPr marL="0" indent="0">
+              <a:buNone/>
+            </a:pPr>
+            <a:r>
+              <a:rPr lang="en-US" dirty="0" err="1"/>
+              <a:t>Apendix</a:t>
+            </a:r>
+            <a:r>
+              <a:rPr lang="en-US" dirty="0"/>
+              <a:t> </a:t>
+            </a:r>
+          </a:p>
+        </p:txBody>
+      </p:sp>
+      <p:sp>
+        <p:nvSpPr>
+          <p:cNvPr id="3" name="Text 1">
+            <a:extLst>
+              <a:ext uri="{FF2B5EF4-FFF2-40B4-BE49-F238E27FC236}">
+                <a16:creationId xmlns:a16="http://schemas.microsoft.com/office/drawing/2014/main" id="{1AE4DA84-46BC-5597-4BEA-5B279BCB6D95}"/>
+              </a:ext>
+            </a:extLst>
+          </p:cNvPr>
+          <p:cNvSpPr/>
+          <p:nvPr/>
+        </p:nvSpPr>
+        <p:spPr>
+          <a:xfrm>
+            <a:off x="548640" y="435495"/>
+            <a:ext cx="10972800" cy="640080"/>
+          </a:xfrm>
+          <a:prstGeom prst="rect">
+            <a:avLst/>
+          </a:prstGeom>
+          <a:noFill/>
+          <a:ln/>
+        </p:spPr>
+        <p:txBody>
+          <a:bodyPr wrap="square" lIns="0" tIns="0" rIns="0" bIns="0" rtlCol="0" anchor="ctr"/>
+          <a:lstStyle/>
+          <a:p>
+            <a:pPr marL="0" indent="0">
+              <a:buNone/>
+            </a:pPr>
+            <a:r>
+              <a:rPr lang="en-US" sz="2800" b="1" dirty="0">
+                <a:solidFill>
+                  <a:srgbClr val="14203A"/>
+                </a:solidFill>
+                <a:latin typeface="Calibri" pitchFamily="34" charset="0"/>
+                <a:ea typeface="Calibri" pitchFamily="34" charset="-122"/>
+                <a:cs typeface="Calibri" pitchFamily="34" charset="-120"/>
+              </a:rPr>
+              <a:t>3. Portal for control project data (2/7)</a:t>
+            </a:r>
+            <a:endParaRPr lang="en-US" sz="2800" dirty="0"/>
+          </a:p>
+        </p:txBody>
+      </p:sp>
+      <p:sp>
+        <p:nvSpPr>
+          <p:cNvPr id="25" name="Text 0">
+            <a:extLst>
+              <a:ext uri="{FF2B5EF4-FFF2-40B4-BE49-F238E27FC236}">
+                <a16:creationId xmlns:a16="http://schemas.microsoft.com/office/drawing/2014/main" id="{F12DAB2B-B090-B62A-021D-5BB5F62D76B4}"/>
+              </a:ext>
+            </a:extLst>
+          </p:cNvPr>
+          <p:cNvSpPr/>
+          <p:nvPr/>
+        </p:nvSpPr>
+        <p:spPr>
+          <a:xfrm>
+            <a:off x="548640" y="1311178"/>
+            <a:ext cx="8229600" cy="274320"/>
+          </a:xfrm>
+          <a:prstGeom prst="rect">
+            <a:avLst/>
+          </a:prstGeom>
+          <a:noFill/>
+          <a:ln/>
+        </p:spPr>
+        <p:txBody>
+          <a:bodyPr wrap="square" lIns="0" tIns="0" rIns="0" bIns="0" rtlCol="0" anchor="ctr"/>
+          <a:lstStyle/>
+          <a:p>
+            <a:endParaRPr lang="en-US" sz="1200" dirty="0"/>
+          </a:p>
+        </p:txBody>
+      </p:sp>
+      <p:pic>
+        <p:nvPicPr>
+          <p:cNvPr id="8" name="図 7">
+            <a:extLst>
+              <a:ext uri="{FF2B5EF4-FFF2-40B4-BE49-F238E27FC236}">
+                <a16:creationId xmlns:a16="http://schemas.microsoft.com/office/drawing/2014/main" id="{7A90A4BA-D9A7-F2DB-5672-FC2181B187BA}"/>
+              </a:ext>
+            </a:extLst>
+          </p:cNvPr>
+          <p:cNvPicPr>
+            <a:picLocks noChangeAspect="1"/>
+          </p:cNvPicPr>
+          <p:nvPr/>
+        </p:nvPicPr>
+        <p:blipFill>
+          <a:blip r:embed="rId3"/>
+          <a:stretch>
+            <a:fillRect/>
+          </a:stretch>
+        </p:blipFill>
+        <p:spPr>
+          <a:xfrm>
+            <a:off x="1361321" y="1030168"/>
+            <a:ext cx="9469358" cy="5509178"/>
+          </a:xfrm>
+          <a:prstGeom prst="rect">
+            <a:avLst/>
+          </a:prstGeom>
+          <a:ln>
+            <a:solidFill>
+              <a:schemeClr val="accent1"/>
+            </a:solidFill>
+          </a:ln>
+        </p:spPr>
+      </p:pic>
+    </p:spTree>
+    <p:extLst>
+      <p:ext uri="{BB962C8B-B14F-4D97-AF65-F5344CB8AC3E}">
+        <p14:creationId xmlns:p14="http://schemas.microsoft.com/office/powerpoint/2010/main" val="3082841248"/>
+      </p:ext>
+    </p:extLst>
+  </p:cSld>
+  <p:clrMapOvr>
+    <a:masterClrMapping/>
+  </p:clrMapOvr>
+</p:sld>
+</file>
+
+<file path=ppt/slides/slide15.xml><?xml version="1.0" encoding="utf-8"?>
+<p:sld xmlns:a="http://schemas.openxmlformats.org/drawingml/2006/main" xmlns:r="http://schemas.openxmlformats.org/officeDocument/2006/relationships" xmlns:p="http://schemas.openxmlformats.org/presentationml/2006/main">
+  <p:cSld>
+    <p:bg>
+      <p:bgPr>
+        <a:solidFill>
+          <a:srgbClr val="F4F6F9"/>
+        </a:solidFill>
+        <a:effectLst/>
+      </p:bgPr>
+    </p:bg>
+    <p:spTree>
+      <p:nvGrpSpPr>
+        <p:cNvPr id="1" name="">
+          <a:extLst>
+            <a:ext uri="{FF2B5EF4-FFF2-40B4-BE49-F238E27FC236}">
+              <a16:creationId xmlns:a16="http://schemas.microsoft.com/office/drawing/2014/main" id="{B77F429D-1028-279B-F3E8-FBDE7EA51139}"/>
+            </a:ext>
+          </a:extLst>
+        </p:cNvPr>
+        <p:cNvGrpSpPr/>
+        <p:nvPr/>
+      </p:nvGrpSpPr>
+      <p:grpSpPr>
+        <a:xfrm>
+          <a:off x="0" y="0"/>
+          <a:ext cx="0" cy="0"/>
+          <a:chOff x="0" y="0"/>
+          <a:chExt cx="0" cy="0"/>
+        </a:xfrm>
+      </p:grpSpPr>
+      <p:sp>
+        <p:nvSpPr>
+          <p:cNvPr id="2" name="Text 0">
+            <a:extLst>
+              <a:ext uri="{FF2B5EF4-FFF2-40B4-BE49-F238E27FC236}">
+                <a16:creationId xmlns:a16="http://schemas.microsoft.com/office/drawing/2014/main" id="{A091DEDD-C4C4-A311-9505-8DD0B01474EF}"/>
+              </a:ext>
+            </a:extLst>
+          </p:cNvPr>
+          <p:cNvSpPr/>
+          <p:nvPr/>
+        </p:nvSpPr>
+        <p:spPr>
+          <a:xfrm>
+            <a:off x="548640" y="161175"/>
+            <a:ext cx="8229600" cy="274320"/>
+          </a:xfrm>
+          <a:prstGeom prst="rect">
+            <a:avLst/>
+          </a:prstGeom>
+          <a:noFill/>
+          <a:ln/>
+        </p:spPr>
+        <p:txBody>
+          <a:bodyPr wrap="square" lIns="0" tIns="0" rIns="0" bIns="0" rtlCol="0" anchor="ctr"/>
+          <a:lstStyle/>
+          <a:p>
+            <a:pPr marL="0" indent="0">
+              <a:buNone/>
+            </a:pPr>
+            <a:r>
+              <a:rPr lang="en-US" dirty="0" err="1"/>
+              <a:t>Apendix</a:t>
+            </a:r>
+            <a:r>
+              <a:rPr lang="en-US" dirty="0"/>
+              <a:t> </a:t>
+            </a:r>
+          </a:p>
+        </p:txBody>
+      </p:sp>
+      <p:sp>
+        <p:nvSpPr>
+          <p:cNvPr id="3" name="Text 1">
+            <a:extLst>
+              <a:ext uri="{FF2B5EF4-FFF2-40B4-BE49-F238E27FC236}">
+                <a16:creationId xmlns:a16="http://schemas.microsoft.com/office/drawing/2014/main" id="{2F1BB7D2-B970-019F-F224-F541430F2F81}"/>
+              </a:ext>
+            </a:extLst>
+          </p:cNvPr>
+          <p:cNvSpPr/>
+          <p:nvPr/>
+        </p:nvSpPr>
+        <p:spPr>
+          <a:xfrm>
+            <a:off x="548640" y="435495"/>
+            <a:ext cx="10972800" cy="640080"/>
+          </a:xfrm>
+          <a:prstGeom prst="rect">
+            <a:avLst/>
+          </a:prstGeom>
+          <a:noFill/>
+          <a:ln/>
+        </p:spPr>
+        <p:txBody>
+          <a:bodyPr wrap="square" lIns="0" tIns="0" rIns="0" bIns="0" rtlCol="0" anchor="ctr"/>
+          <a:lstStyle/>
+          <a:p>
+            <a:pPr marL="0" indent="0">
+              <a:buNone/>
+            </a:pPr>
+            <a:r>
+              <a:rPr lang="en-US" sz="2800" b="1" dirty="0">
+                <a:solidFill>
+                  <a:srgbClr val="14203A"/>
+                </a:solidFill>
+                <a:latin typeface="Calibri" pitchFamily="34" charset="0"/>
+                <a:ea typeface="Calibri" pitchFamily="34" charset="-122"/>
+                <a:cs typeface="Calibri" pitchFamily="34" charset="-120"/>
+              </a:rPr>
+              <a:t>3. Portal for control project data (3/7)</a:t>
+            </a:r>
+            <a:endParaRPr lang="en-US" sz="2800" dirty="0"/>
+          </a:p>
+        </p:txBody>
+      </p:sp>
+      <p:sp>
+        <p:nvSpPr>
+          <p:cNvPr id="25" name="Text 0">
+            <a:extLst>
+              <a:ext uri="{FF2B5EF4-FFF2-40B4-BE49-F238E27FC236}">
+                <a16:creationId xmlns:a16="http://schemas.microsoft.com/office/drawing/2014/main" id="{17485910-3FA8-3EC1-E7A5-9FA699940FB5}"/>
+              </a:ext>
+            </a:extLst>
+          </p:cNvPr>
+          <p:cNvSpPr/>
+          <p:nvPr/>
+        </p:nvSpPr>
+        <p:spPr>
+          <a:xfrm>
+            <a:off x="548640" y="1311178"/>
+            <a:ext cx="8229600" cy="274320"/>
+          </a:xfrm>
+          <a:prstGeom prst="rect">
+            <a:avLst/>
+          </a:prstGeom>
+          <a:noFill/>
+          <a:ln/>
+        </p:spPr>
+        <p:txBody>
+          <a:bodyPr wrap="square" lIns="0" tIns="0" rIns="0" bIns="0" rtlCol="0" anchor="ctr"/>
+          <a:lstStyle/>
+          <a:p>
+            <a:endParaRPr lang="en-US" sz="1200" dirty="0"/>
+          </a:p>
+        </p:txBody>
+      </p:sp>
+      <p:pic>
+        <p:nvPicPr>
+          <p:cNvPr id="5" name="図 4">
+            <a:extLst>
+              <a:ext uri="{FF2B5EF4-FFF2-40B4-BE49-F238E27FC236}">
+                <a16:creationId xmlns:a16="http://schemas.microsoft.com/office/drawing/2014/main" id="{EECB2231-1E9D-D98F-EC8C-9C3B63C925DC}"/>
+              </a:ext>
+            </a:extLst>
+          </p:cNvPr>
+          <p:cNvPicPr>
+            <a:picLocks noChangeAspect="1"/>
+          </p:cNvPicPr>
+          <p:nvPr/>
+        </p:nvPicPr>
+        <p:blipFill>
+          <a:blip r:embed="rId3"/>
+          <a:stretch>
+            <a:fillRect/>
+          </a:stretch>
+        </p:blipFill>
+        <p:spPr>
+          <a:xfrm>
+            <a:off x="1537854" y="1075575"/>
+            <a:ext cx="9116291" cy="5684035"/>
+          </a:xfrm>
+          <a:prstGeom prst="rect">
+            <a:avLst/>
+          </a:prstGeom>
+          <a:ln>
+            <a:solidFill>
+              <a:schemeClr val="accent1"/>
+            </a:solidFill>
+          </a:ln>
+        </p:spPr>
+      </p:pic>
+    </p:spTree>
+    <p:extLst>
+      <p:ext uri="{BB962C8B-B14F-4D97-AF65-F5344CB8AC3E}">
+        <p14:creationId xmlns:p14="http://schemas.microsoft.com/office/powerpoint/2010/main" val="3638159655"/>
+      </p:ext>
+    </p:extLst>
+  </p:cSld>
+  <p:clrMapOvr>
+    <a:masterClrMapping/>
+  </p:clrMapOvr>
+</p:sld>
+</file>
+
+<file path=ppt/slides/slide16.xml><?xml version="1.0" encoding="utf-8"?>
+<p:sld xmlns:a="http://schemas.openxmlformats.org/drawingml/2006/main" xmlns:r="http://schemas.openxmlformats.org/officeDocument/2006/relationships" xmlns:p="http://schemas.openxmlformats.org/presentationml/2006/main">
+  <p:cSld>
+    <p:bg>
+      <p:bgPr>
+        <a:solidFill>
+          <a:srgbClr val="F4F6F9"/>
+        </a:solidFill>
+        <a:effectLst/>
+      </p:bgPr>
+    </p:bg>
+    <p:spTree>
+      <p:nvGrpSpPr>
+        <p:cNvPr id="1" name="">
+          <a:extLst>
+            <a:ext uri="{FF2B5EF4-FFF2-40B4-BE49-F238E27FC236}">
+              <a16:creationId xmlns:a16="http://schemas.microsoft.com/office/drawing/2014/main" id="{E4706AA6-00A5-038A-933D-69760AC4EC97}"/>
+            </a:ext>
+          </a:extLst>
+        </p:cNvPr>
+        <p:cNvGrpSpPr/>
+        <p:nvPr/>
+      </p:nvGrpSpPr>
+      <p:grpSpPr>
+        <a:xfrm>
+          <a:off x="0" y="0"/>
+          <a:ext cx="0" cy="0"/>
+          <a:chOff x="0" y="0"/>
+          <a:chExt cx="0" cy="0"/>
+        </a:xfrm>
+      </p:grpSpPr>
+      <p:sp>
+        <p:nvSpPr>
+          <p:cNvPr id="2" name="Text 0">
+            <a:extLst>
+              <a:ext uri="{FF2B5EF4-FFF2-40B4-BE49-F238E27FC236}">
+                <a16:creationId xmlns:a16="http://schemas.microsoft.com/office/drawing/2014/main" id="{BC792CE7-E985-793B-9F81-B0EA9C5F6EF9}"/>
+              </a:ext>
+            </a:extLst>
+          </p:cNvPr>
+          <p:cNvSpPr/>
+          <p:nvPr/>
+        </p:nvSpPr>
+        <p:spPr>
+          <a:xfrm>
+            <a:off x="548640" y="161175"/>
+            <a:ext cx="8229600" cy="274320"/>
+          </a:xfrm>
+          <a:prstGeom prst="rect">
+            <a:avLst/>
+          </a:prstGeom>
+          <a:noFill/>
+          <a:ln/>
+        </p:spPr>
+        <p:txBody>
+          <a:bodyPr wrap="square" lIns="0" tIns="0" rIns="0" bIns="0" rtlCol="0" anchor="ctr"/>
+          <a:lstStyle/>
+          <a:p>
+            <a:pPr marL="0" indent="0">
+              <a:buNone/>
+            </a:pPr>
+            <a:r>
+              <a:rPr lang="en-US" dirty="0" err="1"/>
+              <a:t>Apendix</a:t>
+            </a:r>
+            <a:r>
+              <a:rPr lang="en-US" dirty="0"/>
+              <a:t> </a:t>
+            </a:r>
+          </a:p>
+        </p:txBody>
+      </p:sp>
+      <p:sp>
+        <p:nvSpPr>
+          <p:cNvPr id="3" name="Text 1">
+            <a:extLst>
+              <a:ext uri="{FF2B5EF4-FFF2-40B4-BE49-F238E27FC236}">
+                <a16:creationId xmlns:a16="http://schemas.microsoft.com/office/drawing/2014/main" id="{E4675D03-2F6A-4D8E-A4DA-D0C2E4C6905F}"/>
+              </a:ext>
+            </a:extLst>
+          </p:cNvPr>
+          <p:cNvSpPr/>
+          <p:nvPr/>
+        </p:nvSpPr>
+        <p:spPr>
+          <a:xfrm>
+            <a:off x="548640" y="435495"/>
+            <a:ext cx="10972800" cy="640080"/>
+          </a:xfrm>
+          <a:prstGeom prst="rect">
+            <a:avLst/>
+          </a:prstGeom>
+          <a:noFill/>
+          <a:ln/>
+        </p:spPr>
+        <p:txBody>
+          <a:bodyPr wrap="square" lIns="0" tIns="0" rIns="0" bIns="0" rtlCol="0" anchor="ctr"/>
+          <a:lstStyle/>
+          <a:p>
+            <a:pPr marL="0" indent="0">
+              <a:buNone/>
+            </a:pPr>
+            <a:r>
+              <a:rPr lang="en-US" sz="2800" b="1" dirty="0">
+                <a:solidFill>
+                  <a:srgbClr val="14203A"/>
+                </a:solidFill>
+                <a:latin typeface="Calibri" pitchFamily="34" charset="0"/>
+                <a:ea typeface="Calibri" pitchFamily="34" charset="-122"/>
+                <a:cs typeface="Calibri" pitchFamily="34" charset="-120"/>
+              </a:rPr>
+              <a:t>3. Portal for control project data (4/7)</a:t>
+            </a:r>
+            <a:endParaRPr lang="en-US" sz="2800" dirty="0"/>
+          </a:p>
+        </p:txBody>
+      </p:sp>
+      <p:sp>
+        <p:nvSpPr>
+          <p:cNvPr id="25" name="Text 0">
+            <a:extLst>
+              <a:ext uri="{FF2B5EF4-FFF2-40B4-BE49-F238E27FC236}">
+                <a16:creationId xmlns:a16="http://schemas.microsoft.com/office/drawing/2014/main" id="{67618866-D2BA-3A45-63BE-7C54FE72848B}"/>
+              </a:ext>
+            </a:extLst>
+          </p:cNvPr>
+          <p:cNvSpPr/>
+          <p:nvPr/>
+        </p:nvSpPr>
+        <p:spPr>
+          <a:xfrm>
+            <a:off x="548640" y="1311178"/>
+            <a:ext cx="8229600" cy="274320"/>
+          </a:xfrm>
+          <a:prstGeom prst="rect">
+            <a:avLst/>
+          </a:prstGeom>
+          <a:noFill/>
+          <a:ln/>
+        </p:spPr>
+        <p:txBody>
+          <a:bodyPr wrap="square" lIns="0" tIns="0" rIns="0" bIns="0" rtlCol="0" anchor="ctr"/>
+          <a:lstStyle/>
+          <a:p>
+            <a:endParaRPr lang="en-US" sz="1200" dirty="0"/>
+          </a:p>
+        </p:txBody>
+      </p:sp>
+      <p:pic>
+        <p:nvPicPr>
+          <p:cNvPr id="5" name="図 4">
+            <a:extLst>
+              <a:ext uri="{FF2B5EF4-FFF2-40B4-BE49-F238E27FC236}">
+                <a16:creationId xmlns:a16="http://schemas.microsoft.com/office/drawing/2014/main" id="{8578020A-6DE7-D64F-7DCF-BCE00D4F6A12}"/>
+              </a:ext>
+            </a:extLst>
+          </p:cNvPr>
+          <p:cNvPicPr>
+            <a:picLocks noChangeAspect="1"/>
+          </p:cNvPicPr>
+          <p:nvPr/>
+        </p:nvPicPr>
+        <p:blipFill>
+          <a:blip r:embed="rId3"/>
+          <a:stretch>
+            <a:fillRect/>
+          </a:stretch>
+        </p:blipFill>
+        <p:spPr>
+          <a:xfrm>
+            <a:off x="1537854" y="1075575"/>
+            <a:ext cx="9116291" cy="5684035"/>
+          </a:xfrm>
+          <a:prstGeom prst="rect">
+            <a:avLst/>
+          </a:prstGeom>
+          <a:ln>
+            <a:solidFill>
+              <a:schemeClr val="accent1"/>
+            </a:solidFill>
+          </a:ln>
+        </p:spPr>
+      </p:pic>
+    </p:spTree>
+    <p:extLst>
+      <p:ext uri="{BB962C8B-B14F-4D97-AF65-F5344CB8AC3E}">
+        <p14:creationId xmlns:p14="http://schemas.microsoft.com/office/powerpoint/2010/main" val="2253096608"/>
+      </p:ext>
+    </p:extLst>
+  </p:cSld>
+  <p:clrMapOvr>
+    <a:masterClrMapping/>
+  </p:clrMapOvr>
+</p:sld>
+</file>
+
+<file path=ppt/slides/slide17.xml><?xml version="1.0" encoding="utf-8"?>
+<p:sld xmlns:a="http://schemas.openxmlformats.org/drawingml/2006/main" xmlns:r="http://schemas.openxmlformats.org/officeDocument/2006/relationships" xmlns:p="http://schemas.openxmlformats.org/presentationml/2006/main">
+  <p:cSld>
+    <p:bg>
+      <p:bgPr>
+        <a:solidFill>
+          <a:srgbClr val="F4F6F9"/>
+        </a:solidFill>
+        <a:effectLst/>
+      </p:bgPr>
+    </p:bg>
+    <p:spTree>
+      <p:nvGrpSpPr>
+        <p:cNvPr id="1" name="">
+          <a:extLst>
+            <a:ext uri="{FF2B5EF4-FFF2-40B4-BE49-F238E27FC236}">
+              <a16:creationId xmlns:a16="http://schemas.microsoft.com/office/drawing/2014/main" id="{7D92C4BA-3E9C-D9A1-C66D-D359E3B055E5}"/>
+            </a:ext>
+          </a:extLst>
+        </p:cNvPr>
+        <p:cNvGrpSpPr/>
+        <p:nvPr/>
+      </p:nvGrpSpPr>
+      <p:grpSpPr>
+        <a:xfrm>
+          <a:off x="0" y="0"/>
+          <a:ext cx="0" cy="0"/>
+          <a:chOff x="0" y="0"/>
+          <a:chExt cx="0" cy="0"/>
+        </a:xfrm>
+      </p:grpSpPr>
+      <p:sp>
+        <p:nvSpPr>
+          <p:cNvPr id="2" name="Text 0">
+            <a:extLst>
+              <a:ext uri="{FF2B5EF4-FFF2-40B4-BE49-F238E27FC236}">
+                <a16:creationId xmlns:a16="http://schemas.microsoft.com/office/drawing/2014/main" id="{C5FC593D-4A8C-136B-5C57-C4932A87D452}"/>
+              </a:ext>
+            </a:extLst>
+          </p:cNvPr>
+          <p:cNvSpPr/>
+          <p:nvPr/>
+        </p:nvSpPr>
+        <p:spPr>
+          <a:xfrm>
+            <a:off x="548640" y="161175"/>
+            <a:ext cx="8229600" cy="274320"/>
+          </a:xfrm>
+          <a:prstGeom prst="rect">
+            <a:avLst/>
+          </a:prstGeom>
+          <a:noFill/>
+          <a:ln/>
+        </p:spPr>
+        <p:txBody>
+          <a:bodyPr wrap="square" lIns="0" tIns="0" rIns="0" bIns="0" rtlCol="0" anchor="ctr"/>
+          <a:lstStyle/>
+          <a:p>
+            <a:pPr marL="0" indent="0">
+              <a:buNone/>
+            </a:pPr>
+            <a:r>
+              <a:rPr lang="en-US" dirty="0" err="1"/>
+              <a:t>Apendix</a:t>
+            </a:r>
+            <a:r>
+              <a:rPr lang="en-US" dirty="0"/>
+              <a:t> </a:t>
+            </a:r>
+          </a:p>
+        </p:txBody>
+      </p:sp>
+      <p:sp>
+        <p:nvSpPr>
+          <p:cNvPr id="3" name="Text 1">
+            <a:extLst>
+              <a:ext uri="{FF2B5EF4-FFF2-40B4-BE49-F238E27FC236}">
+                <a16:creationId xmlns:a16="http://schemas.microsoft.com/office/drawing/2014/main" id="{28007701-A7ED-D6E6-3E7C-02FD19F44B3A}"/>
+              </a:ext>
+            </a:extLst>
+          </p:cNvPr>
+          <p:cNvSpPr/>
+          <p:nvPr/>
+        </p:nvSpPr>
+        <p:spPr>
+          <a:xfrm>
+            <a:off x="548640" y="435495"/>
+            <a:ext cx="10972800" cy="640080"/>
+          </a:xfrm>
+          <a:prstGeom prst="rect">
+            <a:avLst/>
+          </a:prstGeom>
+          <a:noFill/>
+          <a:ln/>
+        </p:spPr>
+        <p:txBody>
+          <a:bodyPr wrap="square" lIns="0" tIns="0" rIns="0" bIns="0" rtlCol="0" anchor="ctr"/>
+          <a:lstStyle/>
+          <a:p>
+            <a:pPr marL="0" indent="0">
+              <a:buNone/>
+            </a:pPr>
+            <a:r>
+              <a:rPr lang="en-US" sz="2800" b="1" dirty="0">
+                <a:solidFill>
+                  <a:srgbClr val="14203A"/>
+                </a:solidFill>
+                <a:latin typeface="Calibri" pitchFamily="34" charset="0"/>
+                <a:ea typeface="Calibri" pitchFamily="34" charset="-122"/>
+                <a:cs typeface="Calibri" pitchFamily="34" charset="-120"/>
+              </a:rPr>
+              <a:t>3. Portal for control project data (5/7)</a:t>
+            </a:r>
+            <a:endParaRPr lang="en-US" sz="2800" dirty="0"/>
+          </a:p>
+        </p:txBody>
+      </p:sp>
+      <p:sp>
+        <p:nvSpPr>
+          <p:cNvPr id="25" name="Text 0">
+            <a:extLst>
+              <a:ext uri="{FF2B5EF4-FFF2-40B4-BE49-F238E27FC236}">
+                <a16:creationId xmlns:a16="http://schemas.microsoft.com/office/drawing/2014/main" id="{07CC4AD0-7CF7-90B7-C88D-44628D160E87}"/>
+              </a:ext>
+            </a:extLst>
+          </p:cNvPr>
+          <p:cNvSpPr/>
+          <p:nvPr/>
+        </p:nvSpPr>
+        <p:spPr>
+          <a:xfrm>
+            <a:off x="548640" y="1311178"/>
+            <a:ext cx="8229600" cy="274320"/>
+          </a:xfrm>
+          <a:prstGeom prst="rect">
+            <a:avLst/>
+          </a:prstGeom>
+          <a:noFill/>
+          <a:ln/>
+        </p:spPr>
+        <p:txBody>
+          <a:bodyPr wrap="square" lIns="0" tIns="0" rIns="0" bIns="0" rtlCol="0" anchor="ctr"/>
+          <a:lstStyle/>
+          <a:p>
+            <a:endParaRPr lang="en-US" sz="1200" dirty="0"/>
+          </a:p>
+        </p:txBody>
+      </p:sp>
+      <p:pic>
+        <p:nvPicPr>
+          <p:cNvPr id="6" name="図 5">
+            <a:extLst>
+              <a:ext uri="{FF2B5EF4-FFF2-40B4-BE49-F238E27FC236}">
+                <a16:creationId xmlns:a16="http://schemas.microsoft.com/office/drawing/2014/main" id="{72770624-21D5-FC4D-A68C-A5E971AE1A01}"/>
+              </a:ext>
+            </a:extLst>
+          </p:cNvPr>
+          <p:cNvPicPr>
+            <a:picLocks noChangeAspect="1"/>
+          </p:cNvPicPr>
+          <p:nvPr/>
+        </p:nvPicPr>
+        <p:blipFill>
+          <a:blip r:embed="rId3"/>
+          <a:stretch>
+            <a:fillRect/>
+          </a:stretch>
+        </p:blipFill>
+        <p:spPr>
+          <a:xfrm>
+            <a:off x="133927" y="1100128"/>
+            <a:ext cx="10039927" cy="3495155"/>
+          </a:xfrm>
+          <a:prstGeom prst="rect">
+            <a:avLst/>
+          </a:prstGeom>
+          <a:ln>
+            <a:solidFill>
+              <a:schemeClr val="accent1"/>
+            </a:solidFill>
+          </a:ln>
+        </p:spPr>
+      </p:pic>
+      <p:pic>
+        <p:nvPicPr>
+          <p:cNvPr id="8" name="図 7">
+            <a:extLst>
+              <a:ext uri="{FF2B5EF4-FFF2-40B4-BE49-F238E27FC236}">
+                <a16:creationId xmlns:a16="http://schemas.microsoft.com/office/drawing/2014/main" id="{08F6181F-6128-1DD4-E389-E84D71802DB4}"/>
+              </a:ext>
+            </a:extLst>
+          </p:cNvPr>
+          <p:cNvPicPr>
+            <a:picLocks noChangeAspect="1"/>
+          </p:cNvPicPr>
+          <p:nvPr/>
+        </p:nvPicPr>
+        <p:blipFill>
+          <a:blip r:embed="rId4"/>
+          <a:stretch>
+            <a:fillRect/>
+          </a:stretch>
+        </p:blipFill>
+        <p:spPr>
+          <a:xfrm>
+            <a:off x="3482247" y="3479760"/>
+            <a:ext cx="8358840" cy="2942745"/>
+          </a:xfrm>
+          <a:prstGeom prst="rect">
+            <a:avLst/>
+          </a:prstGeom>
+          <a:ln>
+            <a:solidFill>
+              <a:schemeClr val="accent1"/>
+            </a:solidFill>
+          </a:ln>
+        </p:spPr>
+      </p:pic>
+    </p:spTree>
+    <p:extLst>
+      <p:ext uri="{BB962C8B-B14F-4D97-AF65-F5344CB8AC3E}">
+        <p14:creationId xmlns:p14="http://schemas.microsoft.com/office/powerpoint/2010/main" val="1065739613"/>
+      </p:ext>
+    </p:extLst>
+  </p:cSld>
+  <p:clrMapOvr>
+    <a:masterClrMapping/>
+  </p:clrMapOvr>
+</p:sld>
+</file>
+
+<file path=ppt/slides/slide18.xml><?xml version="1.0" encoding="utf-8"?>
+<p:sld xmlns:a="http://schemas.openxmlformats.org/drawingml/2006/main" xmlns:r="http://schemas.openxmlformats.org/officeDocument/2006/relationships" xmlns:p="http://schemas.openxmlformats.org/presentationml/2006/main">
+  <p:cSld>
+    <p:bg>
+      <p:bgPr>
+        <a:solidFill>
+          <a:srgbClr val="F4F6F9"/>
+        </a:solidFill>
+        <a:effectLst/>
+      </p:bgPr>
+    </p:bg>
+    <p:spTree>
+      <p:nvGrpSpPr>
+        <p:cNvPr id="1" name="">
+          <a:extLst>
+            <a:ext uri="{FF2B5EF4-FFF2-40B4-BE49-F238E27FC236}">
+              <a16:creationId xmlns:a16="http://schemas.microsoft.com/office/drawing/2014/main" id="{DA58C536-DF20-E5BC-1D67-A6F610A2C55F}"/>
+            </a:ext>
+          </a:extLst>
+        </p:cNvPr>
+        <p:cNvGrpSpPr/>
+        <p:nvPr/>
+      </p:nvGrpSpPr>
+      <p:grpSpPr>
+        <a:xfrm>
+          <a:off x="0" y="0"/>
+          <a:ext cx="0" cy="0"/>
+          <a:chOff x="0" y="0"/>
+          <a:chExt cx="0" cy="0"/>
+        </a:xfrm>
+      </p:grpSpPr>
+      <p:sp>
+        <p:nvSpPr>
+          <p:cNvPr id="2" name="Text 0">
+            <a:extLst>
+              <a:ext uri="{FF2B5EF4-FFF2-40B4-BE49-F238E27FC236}">
+                <a16:creationId xmlns:a16="http://schemas.microsoft.com/office/drawing/2014/main" id="{E75688BB-F9EF-C450-5078-6DE1FEE9971D}"/>
+              </a:ext>
+            </a:extLst>
+          </p:cNvPr>
+          <p:cNvSpPr/>
+          <p:nvPr/>
+        </p:nvSpPr>
+        <p:spPr>
+          <a:xfrm>
+            <a:off x="548640" y="161175"/>
+            <a:ext cx="8229600" cy="274320"/>
+          </a:xfrm>
+          <a:prstGeom prst="rect">
+            <a:avLst/>
+          </a:prstGeom>
+          <a:noFill/>
+          <a:ln/>
+        </p:spPr>
+        <p:txBody>
+          <a:bodyPr wrap="square" lIns="0" tIns="0" rIns="0" bIns="0" rtlCol="0" anchor="ctr"/>
+          <a:lstStyle/>
+          <a:p>
+            <a:pPr marL="0" indent="0">
+              <a:buNone/>
+            </a:pPr>
+            <a:r>
+              <a:rPr lang="en-US" dirty="0" err="1"/>
+              <a:t>Apendix</a:t>
+            </a:r>
+            <a:r>
+              <a:rPr lang="en-US" dirty="0"/>
+              <a:t> </a:t>
+            </a:r>
+          </a:p>
+        </p:txBody>
+      </p:sp>
+      <p:sp>
+        <p:nvSpPr>
+          <p:cNvPr id="3" name="Text 1">
+            <a:extLst>
+              <a:ext uri="{FF2B5EF4-FFF2-40B4-BE49-F238E27FC236}">
+                <a16:creationId xmlns:a16="http://schemas.microsoft.com/office/drawing/2014/main" id="{8FE7D0CC-59B7-33BF-0C03-1436AC39E388}"/>
+              </a:ext>
+            </a:extLst>
+          </p:cNvPr>
+          <p:cNvSpPr/>
+          <p:nvPr/>
+        </p:nvSpPr>
+        <p:spPr>
+          <a:xfrm>
+            <a:off x="548640" y="435495"/>
+            <a:ext cx="10972800" cy="640080"/>
+          </a:xfrm>
+          <a:prstGeom prst="rect">
+            <a:avLst/>
+          </a:prstGeom>
+          <a:noFill/>
+          <a:ln/>
+        </p:spPr>
+        <p:txBody>
+          <a:bodyPr wrap="square" lIns="0" tIns="0" rIns="0" bIns="0" rtlCol="0" anchor="ctr"/>
+          <a:lstStyle/>
+          <a:p>
+            <a:pPr marL="0" indent="0">
+              <a:buNone/>
+            </a:pPr>
+            <a:r>
+              <a:rPr lang="en-US" sz="2800" b="1" dirty="0">
+                <a:solidFill>
+                  <a:srgbClr val="14203A"/>
+                </a:solidFill>
+                <a:latin typeface="Calibri" pitchFamily="34" charset="0"/>
+                <a:ea typeface="Calibri" pitchFamily="34" charset="-122"/>
+                <a:cs typeface="Calibri" pitchFamily="34" charset="-120"/>
+              </a:rPr>
+              <a:t>3. Portal for control project data (6/7)</a:t>
+            </a:r>
+            <a:endParaRPr lang="en-US" sz="2800" dirty="0"/>
+          </a:p>
+        </p:txBody>
+      </p:sp>
+      <p:sp>
+        <p:nvSpPr>
+          <p:cNvPr id="25" name="Text 0">
+            <a:extLst>
+              <a:ext uri="{FF2B5EF4-FFF2-40B4-BE49-F238E27FC236}">
+                <a16:creationId xmlns:a16="http://schemas.microsoft.com/office/drawing/2014/main" id="{BE4F5B19-64C1-B99E-A62A-B8537E6EF756}"/>
+              </a:ext>
+            </a:extLst>
+          </p:cNvPr>
+          <p:cNvSpPr/>
+          <p:nvPr/>
+        </p:nvSpPr>
+        <p:spPr>
+          <a:xfrm>
+            <a:off x="548640" y="1311178"/>
+            <a:ext cx="8229600" cy="274320"/>
+          </a:xfrm>
+          <a:prstGeom prst="rect">
+            <a:avLst/>
+          </a:prstGeom>
+          <a:noFill/>
+          <a:ln/>
+        </p:spPr>
+        <p:txBody>
+          <a:bodyPr wrap="square" lIns="0" tIns="0" rIns="0" bIns="0" rtlCol="0" anchor="ctr"/>
+          <a:lstStyle/>
+          <a:p>
+            <a:endParaRPr lang="en-US" sz="1200" dirty="0"/>
+          </a:p>
+        </p:txBody>
+      </p:sp>
+      <p:pic>
+        <p:nvPicPr>
+          <p:cNvPr id="5" name="図 4">
+            <a:extLst>
+              <a:ext uri="{FF2B5EF4-FFF2-40B4-BE49-F238E27FC236}">
+                <a16:creationId xmlns:a16="http://schemas.microsoft.com/office/drawing/2014/main" id="{202B7DCF-FC05-AB0B-BC57-D4EF35C13C07}"/>
+              </a:ext>
+            </a:extLst>
+          </p:cNvPr>
+          <p:cNvPicPr>
+            <a:picLocks noChangeAspect="1"/>
+          </p:cNvPicPr>
+          <p:nvPr/>
+        </p:nvPicPr>
+        <p:blipFill>
+          <a:blip r:embed="rId3"/>
+          <a:stretch>
+            <a:fillRect/>
+          </a:stretch>
+        </p:blipFill>
+        <p:spPr>
+          <a:xfrm>
+            <a:off x="197238" y="1075575"/>
+            <a:ext cx="7075894" cy="5600036"/>
+          </a:xfrm>
+          <a:prstGeom prst="rect">
+            <a:avLst/>
+          </a:prstGeom>
+          <a:ln>
+            <a:solidFill>
+              <a:schemeClr val="accent1"/>
+            </a:solidFill>
+          </a:ln>
+        </p:spPr>
+      </p:pic>
+      <p:pic>
+        <p:nvPicPr>
+          <p:cNvPr id="9" name="図 8">
+            <a:extLst>
+              <a:ext uri="{FF2B5EF4-FFF2-40B4-BE49-F238E27FC236}">
+                <a16:creationId xmlns:a16="http://schemas.microsoft.com/office/drawing/2014/main" id="{99F707D4-6F0D-4DF6-8093-2B9251E66C8D}"/>
+              </a:ext>
+            </a:extLst>
+          </p:cNvPr>
+          <p:cNvPicPr>
+            <a:picLocks noChangeAspect="1"/>
+          </p:cNvPicPr>
+          <p:nvPr/>
+        </p:nvPicPr>
+        <p:blipFill>
+          <a:blip r:embed="rId4"/>
+          <a:stretch>
+            <a:fillRect/>
+          </a:stretch>
+        </p:blipFill>
+        <p:spPr>
+          <a:xfrm>
+            <a:off x="3471106" y="3926314"/>
+            <a:ext cx="8600739" cy="2830623"/>
+          </a:xfrm>
+          <a:prstGeom prst="rect">
+            <a:avLst/>
+          </a:prstGeom>
+          <a:ln>
+            <a:solidFill>
+              <a:schemeClr val="accent1"/>
+            </a:solidFill>
+          </a:ln>
+        </p:spPr>
+      </p:pic>
+    </p:spTree>
+    <p:extLst>
+      <p:ext uri="{BB962C8B-B14F-4D97-AF65-F5344CB8AC3E}">
+        <p14:creationId xmlns:p14="http://schemas.microsoft.com/office/powerpoint/2010/main" val="393621826"/>
+      </p:ext>
+    </p:extLst>
+  </p:cSld>
+  <p:clrMapOvr>
+    <a:masterClrMapping/>
+  </p:clrMapOvr>
+</p:sld>
+</file>
+
+<file path=ppt/slides/slide19.xml><?xml version="1.0" encoding="utf-8"?>
+<p:sld xmlns:a="http://schemas.openxmlformats.org/drawingml/2006/main" xmlns:r="http://schemas.openxmlformats.org/officeDocument/2006/relationships" xmlns:p="http://schemas.openxmlformats.org/presentationml/2006/main">
+  <p:cSld>
+    <p:bg>
+      <p:bgPr>
+        <a:solidFill>
+          <a:srgbClr val="F4F6F9"/>
+        </a:solidFill>
+        <a:effectLst/>
+      </p:bgPr>
+    </p:bg>
+    <p:spTree>
+      <p:nvGrpSpPr>
+        <p:cNvPr id="1" name="">
+          <a:extLst>
+            <a:ext uri="{FF2B5EF4-FFF2-40B4-BE49-F238E27FC236}">
+              <a16:creationId xmlns:a16="http://schemas.microsoft.com/office/drawing/2014/main" id="{DC22C368-2282-7DAC-7CCD-627B5A61DDC3}"/>
+            </a:ext>
+          </a:extLst>
+        </p:cNvPr>
+        <p:cNvGrpSpPr/>
+        <p:nvPr/>
+      </p:nvGrpSpPr>
+      <p:grpSpPr>
+        <a:xfrm>
+          <a:off x="0" y="0"/>
+          <a:ext cx="0" cy="0"/>
+          <a:chOff x="0" y="0"/>
+          <a:chExt cx="0" cy="0"/>
+        </a:xfrm>
+      </p:grpSpPr>
+      <p:sp>
+        <p:nvSpPr>
+          <p:cNvPr id="2" name="Text 0">
+            <a:extLst>
+              <a:ext uri="{FF2B5EF4-FFF2-40B4-BE49-F238E27FC236}">
+                <a16:creationId xmlns:a16="http://schemas.microsoft.com/office/drawing/2014/main" id="{7F49C747-FB3F-EEAA-32C5-EF92313B46EA}"/>
+              </a:ext>
+            </a:extLst>
+          </p:cNvPr>
+          <p:cNvSpPr/>
+          <p:nvPr/>
+        </p:nvSpPr>
+        <p:spPr>
+          <a:xfrm>
+            <a:off x="548640" y="161175"/>
+            <a:ext cx="8229600" cy="274320"/>
+          </a:xfrm>
+          <a:prstGeom prst="rect">
+            <a:avLst/>
+          </a:prstGeom>
+          <a:noFill/>
+          <a:ln/>
+        </p:spPr>
+        <p:txBody>
+          <a:bodyPr wrap="square" lIns="0" tIns="0" rIns="0" bIns="0" rtlCol="0" anchor="ctr"/>
+          <a:lstStyle/>
+          <a:p>
+            <a:pPr marL="0" indent="0">
+              <a:buNone/>
+            </a:pPr>
+            <a:r>
+              <a:rPr lang="en-US" dirty="0" err="1"/>
+              <a:t>Apendix</a:t>
+            </a:r>
+            <a:r>
+              <a:rPr lang="en-US" dirty="0"/>
+              <a:t> </a:t>
+            </a:r>
+          </a:p>
+        </p:txBody>
+      </p:sp>
+      <p:sp>
+        <p:nvSpPr>
+          <p:cNvPr id="3" name="Text 1">
+            <a:extLst>
+              <a:ext uri="{FF2B5EF4-FFF2-40B4-BE49-F238E27FC236}">
+                <a16:creationId xmlns:a16="http://schemas.microsoft.com/office/drawing/2014/main" id="{838B9237-6906-77F1-DD18-178BE47D4DDC}"/>
+              </a:ext>
+            </a:extLst>
+          </p:cNvPr>
+          <p:cNvSpPr/>
+          <p:nvPr/>
+        </p:nvSpPr>
+        <p:spPr>
+          <a:xfrm>
+            <a:off x="548640" y="435495"/>
+            <a:ext cx="10972800" cy="640080"/>
+          </a:xfrm>
+          <a:prstGeom prst="rect">
+            <a:avLst/>
+          </a:prstGeom>
+          <a:noFill/>
+          <a:ln/>
+        </p:spPr>
+        <p:txBody>
+          <a:bodyPr wrap="square" lIns="0" tIns="0" rIns="0" bIns="0" rtlCol="0" anchor="ctr"/>
+          <a:lstStyle/>
+          <a:p>
+            <a:pPr marL="0" indent="0">
+              <a:buNone/>
+            </a:pPr>
+            <a:r>
+              <a:rPr lang="en-US" sz="2800" b="1" dirty="0">
+                <a:solidFill>
+                  <a:srgbClr val="14203A"/>
+                </a:solidFill>
+                <a:latin typeface="Calibri" pitchFamily="34" charset="0"/>
+                <a:ea typeface="Calibri" pitchFamily="34" charset="-122"/>
+                <a:cs typeface="Calibri" pitchFamily="34" charset="-120"/>
+              </a:rPr>
+              <a:t>3. Portal for control project data (7/7)</a:t>
+            </a:r>
+            <a:endParaRPr lang="en-US" sz="2800" dirty="0"/>
+          </a:p>
+        </p:txBody>
+      </p:sp>
+      <p:sp>
+        <p:nvSpPr>
+          <p:cNvPr id="25" name="Text 0">
+            <a:extLst>
+              <a:ext uri="{FF2B5EF4-FFF2-40B4-BE49-F238E27FC236}">
+                <a16:creationId xmlns:a16="http://schemas.microsoft.com/office/drawing/2014/main" id="{B4F79116-5FB8-2AA8-3F76-CDD05839C01E}"/>
+              </a:ext>
+            </a:extLst>
+          </p:cNvPr>
+          <p:cNvSpPr/>
+          <p:nvPr/>
+        </p:nvSpPr>
+        <p:spPr>
+          <a:xfrm>
+            <a:off x="548640" y="1311178"/>
+            <a:ext cx="8229600" cy="274320"/>
+          </a:xfrm>
+          <a:prstGeom prst="rect">
+            <a:avLst/>
+          </a:prstGeom>
+          <a:noFill/>
+          <a:ln/>
+        </p:spPr>
+        <p:txBody>
+          <a:bodyPr wrap="square" lIns="0" tIns="0" rIns="0" bIns="0" rtlCol="0" anchor="ctr"/>
+          <a:lstStyle/>
+          <a:p>
+            <a:endParaRPr lang="en-US" sz="1200" dirty="0"/>
+          </a:p>
+        </p:txBody>
+      </p:sp>
+      <p:pic>
+        <p:nvPicPr>
+          <p:cNvPr id="6" name="図 5">
+            <a:extLst>
+              <a:ext uri="{FF2B5EF4-FFF2-40B4-BE49-F238E27FC236}">
+                <a16:creationId xmlns:a16="http://schemas.microsoft.com/office/drawing/2014/main" id="{3C17AB82-E118-92DC-8E5F-48D727E82D59}"/>
+              </a:ext>
+            </a:extLst>
+          </p:cNvPr>
+          <p:cNvPicPr>
+            <a:picLocks noChangeAspect="1"/>
+          </p:cNvPicPr>
+          <p:nvPr/>
+        </p:nvPicPr>
+        <p:blipFill>
+          <a:blip r:embed="rId3"/>
+          <a:stretch>
+            <a:fillRect/>
+          </a:stretch>
+        </p:blipFill>
+        <p:spPr>
+          <a:xfrm>
+            <a:off x="166254" y="1075575"/>
+            <a:ext cx="7925720" cy="3598025"/>
+          </a:xfrm>
+          <a:prstGeom prst="rect">
+            <a:avLst/>
+          </a:prstGeom>
+          <a:ln>
+            <a:solidFill>
+              <a:schemeClr val="accent1"/>
+            </a:solidFill>
+          </a:ln>
+        </p:spPr>
+      </p:pic>
+      <p:pic>
+        <p:nvPicPr>
+          <p:cNvPr id="8" name="図 7">
+            <a:extLst>
+              <a:ext uri="{FF2B5EF4-FFF2-40B4-BE49-F238E27FC236}">
+                <a16:creationId xmlns:a16="http://schemas.microsoft.com/office/drawing/2014/main" id="{0F810763-C878-FEC0-01BE-107D40F33B54}"/>
+              </a:ext>
+            </a:extLst>
+          </p:cNvPr>
+          <p:cNvPicPr>
+            <a:picLocks noChangeAspect="1"/>
+          </p:cNvPicPr>
+          <p:nvPr/>
+        </p:nvPicPr>
+        <p:blipFill>
+          <a:blip r:embed="rId4"/>
+          <a:stretch>
+            <a:fillRect/>
+          </a:stretch>
+        </p:blipFill>
+        <p:spPr>
+          <a:xfrm>
+            <a:off x="3722254" y="3388234"/>
+            <a:ext cx="8229600" cy="3250725"/>
+          </a:xfrm>
+          <a:prstGeom prst="rect">
+            <a:avLst/>
+          </a:prstGeom>
+          <a:ln>
+            <a:solidFill>
+              <a:schemeClr val="accent1"/>
+            </a:solidFill>
+          </a:ln>
+        </p:spPr>
+      </p:pic>
+    </p:spTree>
+    <p:extLst>
+      <p:ext uri="{BB962C8B-B14F-4D97-AF65-F5344CB8AC3E}">
+        <p14:creationId xmlns:p14="http://schemas.microsoft.com/office/powerpoint/2010/main" val="881807303"/>
+      </p:ext>
+    </p:extLst>
   </p:cSld>
   <p:clrMapOvr>
     <a:masterClrMapping/>
@@ -2823,6 +6109,7 @@
         <a:solidFill>
           <a:srgbClr val="F4F6F9"/>
         </a:solidFill>
+        <a:effectLst/>
       </p:bgPr>
     </p:bg>
     <p:spTree>
@@ -2860,11 +6147,11 @@
           <a:bodyPr wrap="square" lIns="0" tIns="0" rIns="0" bIns="0" rtlCol="0" anchor="ctr"/>
           <a:lstStyle/>
           <a:p>
-            <a:pPr indent="0" marL="0">
-              <a:buNone/>
-            </a:pPr>
-            <a:r>
-              <a:rPr lang="en-US" sz="1200" b="1" spc="300" kern="0" dirty="0">
+            <a:pPr marL="0" indent="0">
+              <a:buNone/>
+            </a:pPr>
+            <a:r>
+              <a:rPr lang="en-US" sz="1200" b="1" kern="0" spc="300" dirty="0">
                 <a:solidFill>
                   <a:srgbClr val="0F766E"/>
                 </a:solidFill>
@@ -2899,7 +6186,7 @@
           <a:bodyPr wrap="square" lIns="0" tIns="0" rIns="0" bIns="0" rtlCol="0" anchor="ctr"/>
           <a:lstStyle/>
           <a:p>
-            <a:pPr indent="0" marL="0">
+            <a:pPr marL="0" indent="0">
               <a:buNone/>
             </a:pPr>
             <a:r>
@@ -2943,13 +6230,20 @@
             <a:prstDash val="solid"/>
           </a:ln>
           <a:effectLst>
-            <a:outerShdw sx="100000" sy="100000" kx="0" ky="0" algn="bl" rotWithShape="0" blurRad="114300" dist="38100" dir="5400000">
+            <a:outerShdw blurRad="114300" dist="38100" dir="5400000" algn="bl" rotWithShape="0">
               <a:srgbClr val="9AA6B8">
                 <a:alpha val="32000"/>
               </a:srgbClr>
             </a:outerShdw>
           </a:effectLst>
         </p:spPr>
+        <p:txBody>
+          <a:bodyPr/>
+          <a:lstStyle/>
+          <a:p>
+            <a:endParaRPr lang="ja-JP" altLang="en-US"/>
+          </a:p>
+        </p:txBody>
       </p:sp>
       <p:sp>
         <p:nvSpPr>
@@ -2970,6 +6264,13 @@
           </a:solidFill>
           <a:ln/>
         </p:spPr>
+        <p:txBody>
+          <a:bodyPr/>
+          <a:lstStyle/>
+          <a:p>
+            <a:endParaRPr lang="ja-JP" altLang="en-US"/>
+          </a:p>
+        </p:txBody>
       </p:sp>
       <p:sp>
         <p:nvSpPr>
@@ -2992,7 +6293,7 @@
           <a:bodyPr wrap="square" lIns="0" tIns="0" rIns="0" bIns="0" rtlCol="0" anchor="ctr"/>
           <a:lstStyle/>
           <a:p>
-            <a:pPr algn="ctr" indent="0" marL="0">
+            <a:pPr marL="0" indent="0" algn="ctr">
               <a:buNone/>
             </a:pPr>
             <a:r>
@@ -3031,7 +6332,7 @@
           <a:bodyPr wrap="square" lIns="0" tIns="0" rIns="0" bIns="0" rtlCol="0" anchor="ctr"/>
           <a:lstStyle/>
           <a:p>
-            <a:pPr indent="0" marL="0">
+            <a:pPr marL="0" indent="0">
               <a:buNone/>
             </a:pPr>
             <a:r>
@@ -3070,7 +6371,7 @@
           <a:bodyPr wrap="square" lIns="0" tIns="0" rIns="0" bIns="0" rtlCol="0" anchor="ctr"/>
           <a:lstStyle/>
           <a:p>
-            <a:pPr indent="0" marL="0">
+            <a:pPr marL="0" indent="0">
               <a:lnSpc>
                 <a:spcPct val="105000"/>
               </a:lnSpc>
@@ -3117,13 +6418,20 @@
             <a:prstDash val="solid"/>
           </a:ln>
           <a:effectLst>
-            <a:outerShdw sx="100000" sy="100000" kx="0" ky="0" algn="bl" rotWithShape="0" blurRad="114300" dist="38100" dir="5400000">
+            <a:outerShdw blurRad="114300" dist="38100" dir="5400000" algn="bl" rotWithShape="0">
               <a:srgbClr val="9AA6B8">
                 <a:alpha val="32000"/>
               </a:srgbClr>
             </a:outerShdw>
           </a:effectLst>
         </p:spPr>
+        <p:txBody>
+          <a:bodyPr/>
+          <a:lstStyle/>
+          <a:p>
+            <a:endParaRPr lang="ja-JP" altLang="en-US"/>
+          </a:p>
+        </p:txBody>
       </p:sp>
       <p:sp>
         <p:nvSpPr>
@@ -3144,6 +6452,13 @@
           </a:solidFill>
           <a:ln/>
         </p:spPr>
+        <p:txBody>
+          <a:bodyPr/>
+          <a:lstStyle/>
+          <a:p>
+            <a:endParaRPr lang="ja-JP" altLang="en-US"/>
+          </a:p>
+        </p:txBody>
       </p:sp>
       <p:sp>
         <p:nvSpPr>
@@ -3166,7 +6481,7 @@
           <a:bodyPr wrap="square" lIns="0" tIns="0" rIns="0" bIns="0" rtlCol="0" anchor="ctr"/>
           <a:lstStyle/>
           <a:p>
-            <a:pPr algn="ctr" indent="0" marL="0">
+            <a:pPr marL="0" indent="0" algn="ctr">
               <a:buNone/>
             </a:pPr>
             <a:r>
@@ -3205,7 +6520,7 @@
           <a:bodyPr wrap="square" lIns="0" tIns="0" rIns="0" bIns="0" rtlCol="0" anchor="ctr"/>
           <a:lstStyle/>
           <a:p>
-            <a:pPr indent="0" marL="0">
+            <a:pPr marL="0" indent="0">
               <a:buNone/>
             </a:pPr>
             <a:r>
@@ -3244,7 +6559,7 @@
           <a:bodyPr wrap="square" lIns="0" tIns="0" rIns="0" bIns="0" rtlCol="0" anchor="ctr"/>
           <a:lstStyle/>
           <a:p>
-            <a:pPr indent="0" marL="0">
+            <a:pPr marL="0" indent="0">
               <a:lnSpc>
                 <a:spcPct val="105000"/>
               </a:lnSpc>
@@ -3291,13 +6606,20 @@
             <a:prstDash val="solid"/>
           </a:ln>
           <a:effectLst>
-            <a:outerShdw sx="100000" sy="100000" kx="0" ky="0" algn="bl" rotWithShape="0" blurRad="114300" dist="38100" dir="5400000">
+            <a:outerShdw blurRad="114300" dist="38100" dir="5400000" algn="bl" rotWithShape="0">
               <a:srgbClr val="9AA6B8">
                 <a:alpha val="32000"/>
               </a:srgbClr>
             </a:outerShdw>
           </a:effectLst>
         </p:spPr>
+        <p:txBody>
+          <a:bodyPr/>
+          <a:lstStyle/>
+          <a:p>
+            <a:endParaRPr lang="ja-JP" altLang="en-US"/>
+          </a:p>
+        </p:txBody>
       </p:sp>
       <p:sp>
         <p:nvSpPr>
@@ -3318,6 +6640,13 @@
           </a:solidFill>
           <a:ln/>
         </p:spPr>
+        <p:txBody>
+          <a:bodyPr/>
+          <a:lstStyle/>
+          <a:p>
+            <a:endParaRPr lang="ja-JP" altLang="en-US"/>
+          </a:p>
+        </p:txBody>
       </p:sp>
       <p:sp>
         <p:nvSpPr>
@@ -3340,7 +6669,7 @@
           <a:bodyPr wrap="square" lIns="0" tIns="0" rIns="0" bIns="0" rtlCol="0" anchor="ctr"/>
           <a:lstStyle/>
           <a:p>
-            <a:pPr algn="ctr" indent="0" marL="0">
+            <a:pPr marL="0" indent="0" algn="ctr">
               <a:buNone/>
             </a:pPr>
             <a:r>
@@ -3379,7 +6708,7 @@
           <a:bodyPr wrap="square" lIns="0" tIns="0" rIns="0" bIns="0" rtlCol="0" anchor="ctr"/>
           <a:lstStyle/>
           <a:p>
-            <a:pPr indent="0" marL="0">
+            <a:pPr marL="0" indent="0">
               <a:buNone/>
             </a:pPr>
             <a:r>
@@ -3418,7 +6747,7 @@
           <a:bodyPr wrap="square" lIns="0" tIns="0" rIns="0" bIns="0" rtlCol="0" anchor="ctr"/>
           <a:lstStyle/>
           <a:p>
-            <a:pPr indent="0" marL="0">
+            <a:pPr marL="0" indent="0">
               <a:lnSpc>
                 <a:spcPct val="105000"/>
               </a:lnSpc>
@@ -3465,13 +6794,20 @@
             <a:prstDash val="solid"/>
           </a:ln>
           <a:effectLst>
-            <a:outerShdw sx="100000" sy="100000" kx="0" ky="0" algn="bl" rotWithShape="0" blurRad="114300" dist="38100" dir="5400000">
+            <a:outerShdw blurRad="114300" dist="38100" dir="5400000" algn="bl" rotWithShape="0">
               <a:srgbClr val="9AA6B8">
                 <a:alpha val="32000"/>
               </a:srgbClr>
             </a:outerShdw>
           </a:effectLst>
         </p:spPr>
+        <p:txBody>
+          <a:bodyPr/>
+          <a:lstStyle/>
+          <a:p>
+            <a:endParaRPr lang="ja-JP" altLang="en-US"/>
+          </a:p>
+        </p:txBody>
       </p:sp>
       <p:sp>
         <p:nvSpPr>
@@ -3492,6 +6828,13 @@
           </a:solidFill>
           <a:ln/>
         </p:spPr>
+        <p:txBody>
+          <a:bodyPr/>
+          <a:lstStyle/>
+          <a:p>
+            <a:endParaRPr lang="ja-JP" altLang="en-US"/>
+          </a:p>
+        </p:txBody>
       </p:sp>
       <p:sp>
         <p:nvSpPr>
@@ -3514,7 +6857,7 @@
           <a:bodyPr wrap="square" lIns="0" tIns="0" rIns="0" bIns="0" rtlCol="0" anchor="ctr"/>
           <a:lstStyle/>
           <a:p>
-            <a:pPr algn="ctr" indent="0" marL="0">
+            <a:pPr marL="0" indent="0" algn="ctr">
               <a:buNone/>
             </a:pPr>
             <a:r>
@@ -3553,7 +6896,7 @@
           <a:bodyPr wrap="square" lIns="0" tIns="0" rIns="0" bIns="0" rtlCol="0" anchor="ctr"/>
           <a:lstStyle/>
           <a:p>
-            <a:pPr indent="0" marL="0">
+            <a:pPr marL="0" indent="0">
               <a:buNone/>
             </a:pPr>
             <a:r>
@@ -3592,7 +6935,7 @@
           <a:bodyPr wrap="square" lIns="0" tIns="0" rIns="0" bIns="0" rtlCol="0" anchor="ctr"/>
           <a:lstStyle/>
           <a:p>
-            <a:pPr indent="0" marL="0">
+            <a:pPr marL="0" indent="0">
               <a:lnSpc>
                 <a:spcPct val="105000"/>
               </a:lnSpc>
@@ -3634,7 +6977,7 @@
           <a:bodyPr wrap="square" lIns="0" tIns="0" rIns="0" bIns="0" rtlCol="0" anchor="ctr"/>
           <a:lstStyle/>
           <a:p>
-            <a:pPr indent="0" marL="0">
+            <a:pPr marL="0" indent="0">
               <a:buNone/>
             </a:pPr>
             <a:r>
@@ -3653,6 +6996,913 @@
         </p:txBody>
       </p:sp>
     </p:spTree>
+  </p:cSld>
+  <p:clrMapOvr>
+    <a:masterClrMapping/>
+  </p:clrMapOvr>
+</p:sld>
+</file>
+
+<file path=ppt/slides/slide20.xml><?xml version="1.0" encoding="utf-8"?>
+<p:sld xmlns:a="http://schemas.openxmlformats.org/drawingml/2006/main" xmlns:r="http://schemas.openxmlformats.org/officeDocument/2006/relationships" xmlns:p="http://schemas.openxmlformats.org/presentationml/2006/main">
+  <p:cSld>
+    <p:bg>
+      <p:bgPr>
+        <a:solidFill>
+          <a:srgbClr val="F4F6F9"/>
+        </a:solidFill>
+        <a:effectLst/>
+      </p:bgPr>
+    </p:bg>
+    <p:spTree>
+      <p:nvGrpSpPr>
+        <p:cNvPr id="1" name="">
+          <a:extLst>
+            <a:ext uri="{FF2B5EF4-FFF2-40B4-BE49-F238E27FC236}">
+              <a16:creationId xmlns:a16="http://schemas.microsoft.com/office/drawing/2014/main" id="{6401DAAD-88D2-0BA0-6FA4-5BE328B0495F}"/>
+            </a:ext>
+          </a:extLst>
+        </p:cNvPr>
+        <p:cNvGrpSpPr/>
+        <p:nvPr/>
+      </p:nvGrpSpPr>
+      <p:grpSpPr>
+        <a:xfrm>
+          <a:off x="0" y="0"/>
+          <a:ext cx="0" cy="0"/>
+          <a:chOff x="0" y="0"/>
+          <a:chExt cx="0" cy="0"/>
+        </a:xfrm>
+      </p:grpSpPr>
+      <p:sp>
+        <p:nvSpPr>
+          <p:cNvPr id="2" name="Text 0">
+            <a:extLst>
+              <a:ext uri="{FF2B5EF4-FFF2-40B4-BE49-F238E27FC236}">
+                <a16:creationId xmlns:a16="http://schemas.microsoft.com/office/drawing/2014/main" id="{726306DC-CC8D-0CAE-484B-79867675F315}"/>
+              </a:ext>
+            </a:extLst>
+          </p:cNvPr>
+          <p:cNvSpPr/>
+          <p:nvPr/>
+        </p:nvSpPr>
+        <p:spPr>
+          <a:xfrm>
+            <a:off x="548640" y="161175"/>
+            <a:ext cx="8229600" cy="274320"/>
+          </a:xfrm>
+          <a:prstGeom prst="rect">
+            <a:avLst/>
+          </a:prstGeom>
+          <a:noFill/>
+          <a:ln/>
+        </p:spPr>
+        <p:txBody>
+          <a:bodyPr wrap="square" lIns="0" tIns="0" rIns="0" bIns="0" rtlCol="0" anchor="ctr"/>
+          <a:lstStyle/>
+          <a:p>
+            <a:pPr marL="0" indent="0">
+              <a:buNone/>
+            </a:pPr>
+            <a:r>
+              <a:rPr lang="en-US" dirty="0" err="1"/>
+              <a:t>Apendix</a:t>
+            </a:r>
+            <a:r>
+              <a:rPr lang="en-US" dirty="0"/>
+              <a:t> </a:t>
+            </a:r>
+          </a:p>
+        </p:txBody>
+      </p:sp>
+      <p:sp>
+        <p:nvSpPr>
+          <p:cNvPr id="3" name="Text 1">
+            <a:extLst>
+              <a:ext uri="{FF2B5EF4-FFF2-40B4-BE49-F238E27FC236}">
+                <a16:creationId xmlns:a16="http://schemas.microsoft.com/office/drawing/2014/main" id="{976AE1C5-DFB0-55A7-AD64-D6DE5D1687A9}"/>
+              </a:ext>
+            </a:extLst>
+          </p:cNvPr>
+          <p:cNvSpPr/>
+          <p:nvPr/>
+        </p:nvSpPr>
+        <p:spPr>
+          <a:xfrm>
+            <a:off x="548640" y="435495"/>
+            <a:ext cx="10972800" cy="640080"/>
+          </a:xfrm>
+          <a:prstGeom prst="rect">
+            <a:avLst/>
+          </a:prstGeom>
+          <a:noFill/>
+          <a:ln/>
+        </p:spPr>
+        <p:txBody>
+          <a:bodyPr wrap="square" lIns="0" tIns="0" rIns="0" bIns="0" rtlCol="0" anchor="ctr"/>
+          <a:lstStyle/>
+          <a:p>
+            <a:pPr marL="0" indent="0">
+              <a:buNone/>
+            </a:pPr>
+            <a:r>
+              <a:rPr lang="en-US" sz="2800" b="1" dirty="0">
+                <a:solidFill>
+                  <a:srgbClr val="14203A"/>
+                </a:solidFill>
+                <a:latin typeface="Calibri" pitchFamily="34" charset="0"/>
+                <a:ea typeface="Calibri" pitchFamily="34" charset="-122"/>
+                <a:cs typeface="Calibri" pitchFamily="34" charset="-120"/>
+              </a:rPr>
+              <a:t>4. Auto Harness Level </a:t>
+            </a:r>
+            <a:r>
+              <a:rPr lang="en-US" sz="2800" b="1" dirty="0" err="1">
+                <a:solidFill>
+                  <a:srgbClr val="14203A"/>
+                </a:solidFill>
+                <a:latin typeface="Calibri" pitchFamily="34" charset="0"/>
+                <a:ea typeface="Calibri" pitchFamily="34" charset="-122"/>
+                <a:cs typeface="Calibri" pitchFamily="34" charset="-120"/>
+              </a:rPr>
+              <a:t>Avaluate</a:t>
+            </a:r>
+            <a:r>
+              <a:rPr lang="en-US" sz="2800" b="1" dirty="0">
+                <a:solidFill>
+                  <a:srgbClr val="14203A"/>
+                </a:solidFill>
+                <a:latin typeface="Calibri" pitchFamily="34" charset="0"/>
+                <a:ea typeface="Calibri" pitchFamily="34" charset="-122"/>
+                <a:cs typeface="Calibri" pitchFamily="34" charset="-120"/>
+              </a:rPr>
+              <a:t> on portal (1/4)</a:t>
+            </a:r>
+            <a:endParaRPr lang="en-US" sz="2800" dirty="0"/>
+          </a:p>
+        </p:txBody>
+      </p:sp>
+      <p:sp>
+        <p:nvSpPr>
+          <p:cNvPr id="25" name="Text 0">
+            <a:extLst>
+              <a:ext uri="{FF2B5EF4-FFF2-40B4-BE49-F238E27FC236}">
+                <a16:creationId xmlns:a16="http://schemas.microsoft.com/office/drawing/2014/main" id="{D4D2C29E-E135-746C-AF64-EDC087F6A873}"/>
+              </a:ext>
+            </a:extLst>
+          </p:cNvPr>
+          <p:cNvSpPr/>
+          <p:nvPr/>
+        </p:nvSpPr>
+        <p:spPr>
+          <a:xfrm>
+            <a:off x="548640" y="1311178"/>
+            <a:ext cx="8229600" cy="274320"/>
+          </a:xfrm>
+          <a:prstGeom prst="rect">
+            <a:avLst/>
+          </a:prstGeom>
+          <a:noFill/>
+          <a:ln/>
+        </p:spPr>
+        <p:txBody>
+          <a:bodyPr wrap="square" lIns="0" tIns="0" rIns="0" bIns="0" rtlCol="0" anchor="ctr"/>
+          <a:lstStyle/>
+          <a:p>
+            <a:endParaRPr lang="en-US" sz="1200" dirty="0"/>
+          </a:p>
+        </p:txBody>
+      </p:sp>
+      <p:pic>
+        <p:nvPicPr>
+          <p:cNvPr id="5" name="図 4">
+            <a:extLst>
+              <a:ext uri="{FF2B5EF4-FFF2-40B4-BE49-F238E27FC236}">
+                <a16:creationId xmlns:a16="http://schemas.microsoft.com/office/drawing/2014/main" id="{5F172B68-8457-D313-AFE7-CF1655F1AC12}"/>
+              </a:ext>
+            </a:extLst>
+          </p:cNvPr>
+          <p:cNvPicPr>
+            <a:picLocks noChangeAspect="1"/>
+          </p:cNvPicPr>
+          <p:nvPr/>
+        </p:nvPicPr>
+        <p:blipFill>
+          <a:blip r:embed="rId3"/>
+          <a:stretch>
+            <a:fillRect/>
+          </a:stretch>
+        </p:blipFill>
+        <p:spPr>
+          <a:xfrm>
+            <a:off x="1081631" y="1075575"/>
+            <a:ext cx="9484770" cy="5680357"/>
+          </a:xfrm>
+          <a:prstGeom prst="rect">
+            <a:avLst/>
+          </a:prstGeom>
+          <a:ln>
+            <a:solidFill>
+              <a:schemeClr val="accent1"/>
+            </a:solidFill>
+          </a:ln>
+        </p:spPr>
+      </p:pic>
+    </p:spTree>
+    <p:extLst>
+      <p:ext uri="{BB962C8B-B14F-4D97-AF65-F5344CB8AC3E}">
+        <p14:creationId xmlns:p14="http://schemas.microsoft.com/office/powerpoint/2010/main" val="2650050462"/>
+      </p:ext>
+    </p:extLst>
+  </p:cSld>
+  <p:clrMapOvr>
+    <a:masterClrMapping/>
+  </p:clrMapOvr>
+</p:sld>
+</file>
+
+<file path=ppt/slides/slide21.xml><?xml version="1.0" encoding="utf-8"?>
+<p:sld xmlns:a="http://schemas.openxmlformats.org/drawingml/2006/main" xmlns:r="http://schemas.openxmlformats.org/officeDocument/2006/relationships" xmlns:p="http://schemas.openxmlformats.org/presentationml/2006/main">
+  <p:cSld>
+    <p:bg>
+      <p:bgPr>
+        <a:solidFill>
+          <a:srgbClr val="F4F6F9"/>
+        </a:solidFill>
+        <a:effectLst/>
+      </p:bgPr>
+    </p:bg>
+    <p:spTree>
+      <p:nvGrpSpPr>
+        <p:cNvPr id="1" name="">
+          <a:extLst>
+            <a:ext uri="{FF2B5EF4-FFF2-40B4-BE49-F238E27FC236}">
+              <a16:creationId xmlns:a16="http://schemas.microsoft.com/office/drawing/2014/main" id="{141591EF-F049-42B3-7E3A-060589A924E8}"/>
+            </a:ext>
+          </a:extLst>
+        </p:cNvPr>
+        <p:cNvGrpSpPr/>
+        <p:nvPr/>
+      </p:nvGrpSpPr>
+      <p:grpSpPr>
+        <a:xfrm>
+          <a:off x="0" y="0"/>
+          <a:ext cx="0" cy="0"/>
+          <a:chOff x="0" y="0"/>
+          <a:chExt cx="0" cy="0"/>
+        </a:xfrm>
+      </p:grpSpPr>
+      <p:sp>
+        <p:nvSpPr>
+          <p:cNvPr id="2" name="Text 0">
+            <a:extLst>
+              <a:ext uri="{FF2B5EF4-FFF2-40B4-BE49-F238E27FC236}">
+                <a16:creationId xmlns:a16="http://schemas.microsoft.com/office/drawing/2014/main" id="{FA44F251-E41B-4CDA-EC43-6F5EA9B6B06B}"/>
+              </a:ext>
+            </a:extLst>
+          </p:cNvPr>
+          <p:cNvSpPr/>
+          <p:nvPr/>
+        </p:nvSpPr>
+        <p:spPr>
+          <a:xfrm>
+            <a:off x="548640" y="161175"/>
+            <a:ext cx="8229600" cy="274320"/>
+          </a:xfrm>
+          <a:prstGeom prst="rect">
+            <a:avLst/>
+          </a:prstGeom>
+          <a:noFill/>
+          <a:ln/>
+        </p:spPr>
+        <p:txBody>
+          <a:bodyPr wrap="square" lIns="0" tIns="0" rIns="0" bIns="0" rtlCol="0" anchor="ctr"/>
+          <a:lstStyle/>
+          <a:p>
+            <a:pPr marL="0" indent="0">
+              <a:buNone/>
+            </a:pPr>
+            <a:r>
+              <a:rPr lang="en-US" dirty="0" err="1"/>
+              <a:t>Apendix</a:t>
+            </a:r>
+            <a:r>
+              <a:rPr lang="en-US" dirty="0"/>
+              <a:t> </a:t>
+            </a:r>
+          </a:p>
+        </p:txBody>
+      </p:sp>
+      <p:sp>
+        <p:nvSpPr>
+          <p:cNvPr id="3" name="Text 1">
+            <a:extLst>
+              <a:ext uri="{FF2B5EF4-FFF2-40B4-BE49-F238E27FC236}">
+                <a16:creationId xmlns:a16="http://schemas.microsoft.com/office/drawing/2014/main" id="{DD519CD8-C928-D1BA-D3F8-4EFC3E8E2F30}"/>
+              </a:ext>
+            </a:extLst>
+          </p:cNvPr>
+          <p:cNvSpPr/>
+          <p:nvPr/>
+        </p:nvSpPr>
+        <p:spPr>
+          <a:xfrm>
+            <a:off x="548640" y="435495"/>
+            <a:ext cx="10972800" cy="640080"/>
+          </a:xfrm>
+          <a:prstGeom prst="rect">
+            <a:avLst/>
+          </a:prstGeom>
+          <a:noFill/>
+          <a:ln/>
+        </p:spPr>
+        <p:txBody>
+          <a:bodyPr wrap="square" lIns="0" tIns="0" rIns="0" bIns="0" rtlCol="0" anchor="ctr"/>
+          <a:lstStyle/>
+          <a:p>
+            <a:pPr marL="0" indent="0">
+              <a:buNone/>
+            </a:pPr>
+            <a:r>
+              <a:rPr lang="en-US" sz="2800" b="1" dirty="0">
+                <a:solidFill>
+                  <a:srgbClr val="14203A"/>
+                </a:solidFill>
+                <a:latin typeface="Calibri" pitchFamily="34" charset="0"/>
+                <a:ea typeface="Calibri" pitchFamily="34" charset="-122"/>
+                <a:cs typeface="Calibri" pitchFamily="34" charset="-120"/>
+              </a:rPr>
+              <a:t>4. Auto Harness Level </a:t>
+            </a:r>
+            <a:r>
+              <a:rPr lang="en-US" sz="2800" b="1" dirty="0" err="1">
+                <a:solidFill>
+                  <a:srgbClr val="14203A"/>
+                </a:solidFill>
+                <a:latin typeface="Calibri" pitchFamily="34" charset="0"/>
+                <a:ea typeface="Calibri" pitchFamily="34" charset="-122"/>
+                <a:cs typeface="Calibri" pitchFamily="34" charset="-120"/>
+              </a:rPr>
+              <a:t>Avaluate</a:t>
+            </a:r>
+            <a:r>
+              <a:rPr lang="en-US" sz="2800" b="1" dirty="0">
+                <a:solidFill>
+                  <a:srgbClr val="14203A"/>
+                </a:solidFill>
+                <a:latin typeface="Calibri" pitchFamily="34" charset="0"/>
+                <a:ea typeface="Calibri" pitchFamily="34" charset="-122"/>
+                <a:cs typeface="Calibri" pitchFamily="34" charset="-120"/>
+              </a:rPr>
+              <a:t> on portal (1/4)</a:t>
+            </a:r>
+            <a:endParaRPr lang="en-US" sz="2800" dirty="0"/>
+          </a:p>
+        </p:txBody>
+      </p:sp>
+      <p:sp>
+        <p:nvSpPr>
+          <p:cNvPr id="25" name="Text 0">
+            <a:extLst>
+              <a:ext uri="{FF2B5EF4-FFF2-40B4-BE49-F238E27FC236}">
+                <a16:creationId xmlns:a16="http://schemas.microsoft.com/office/drawing/2014/main" id="{B2AE42A8-93DA-6B61-1CD8-986071EAAC79}"/>
+              </a:ext>
+            </a:extLst>
+          </p:cNvPr>
+          <p:cNvSpPr/>
+          <p:nvPr/>
+        </p:nvSpPr>
+        <p:spPr>
+          <a:xfrm>
+            <a:off x="548640" y="1311178"/>
+            <a:ext cx="8229600" cy="274320"/>
+          </a:xfrm>
+          <a:prstGeom prst="rect">
+            <a:avLst/>
+          </a:prstGeom>
+          <a:noFill/>
+          <a:ln/>
+        </p:spPr>
+        <p:txBody>
+          <a:bodyPr wrap="square" lIns="0" tIns="0" rIns="0" bIns="0" rtlCol="0" anchor="ctr"/>
+          <a:lstStyle/>
+          <a:p>
+            <a:endParaRPr lang="en-US" sz="1200" dirty="0"/>
+          </a:p>
+        </p:txBody>
+      </p:sp>
+      <p:pic>
+        <p:nvPicPr>
+          <p:cNvPr id="6" name="図 5">
+            <a:extLst>
+              <a:ext uri="{FF2B5EF4-FFF2-40B4-BE49-F238E27FC236}">
+                <a16:creationId xmlns:a16="http://schemas.microsoft.com/office/drawing/2014/main" id="{1DBE161F-3F04-26C7-06E6-C0533E0F57EE}"/>
+              </a:ext>
+            </a:extLst>
+          </p:cNvPr>
+          <p:cNvPicPr>
+            <a:picLocks noChangeAspect="1"/>
+          </p:cNvPicPr>
+          <p:nvPr/>
+        </p:nvPicPr>
+        <p:blipFill>
+          <a:blip r:embed="rId3"/>
+          <a:stretch>
+            <a:fillRect/>
+          </a:stretch>
+        </p:blipFill>
+        <p:spPr>
+          <a:xfrm>
+            <a:off x="1275677" y="1123628"/>
+            <a:ext cx="9640645" cy="4610743"/>
+          </a:xfrm>
+          <a:prstGeom prst="rect">
+            <a:avLst/>
+          </a:prstGeom>
+          <a:ln>
+            <a:solidFill>
+              <a:schemeClr val="accent1"/>
+            </a:solidFill>
+          </a:ln>
+        </p:spPr>
+      </p:pic>
+    </p:spTree>
+    <p:extLst>
+      <p:ext uri="{BB962C8B-B14F-4D97-AF65-F5344CB8AC3E}">
+        <p14:creationId xmlns:p14="http://schemas.microsoft.com/office/powerpoint/2010/main" val="2880791940"/>
+      </p:ext>
+    </p:extLst>
+  </p:cSld>
+  <p:clrMapOvr>
+    <a:masterClrMapping/>
+  </p:clrMapOvr>
+</p:sld>
+</file>
+
+<file path=ppt/slides/slide22.xml><?xml version="1.0" encoding="utf-8"?>
+<p:sld xmlns:a="http://schemas.openxmlformats.org/drawingml/2006/main" xmlns:r="http://schemas.openxmlformats.org/officeDocument/2006/relationships" xmlns:p="http://schemas.openxmlformats.org/presentationml/2006/main">
+  <p:cSld>
+    <p:bg>
+      <p:bgPr>
+        <a:solidFill>
+          <a:srgbClr val="F4F6F9"/>
+        </a:solidFill>
+        <a:effectLst/>
+      </p:bgPr>
+    </p:bg>
+    <p:spTree>
+      <p:nvGrpSpPr>
+        <p:cNvPr id="1" name="">
+          <a:extLst>
+            <a:ext uri="{FF2B5EF4-FFF2-40B4-BE49-F238E27FC236}">
+              <a16:creationId xmlns:a16="http://schemas.microsoft.com/office/drawing/2014/main" id="{4FEDC61C-78E1-CE90-C520-E2F7283CF803}"/>
+            </a:ext>
+          </a:extLst>
+        </p:cNvPr>
+        <p:cNvGrpSpPr/>
+        <p:nvPr/>
+      </p:nvGrpSpPr>
+      <p:grpSpPr>
+        <a:xfrm>
+          <a:off x="0" y="0"/>
+          <a:ext cx="0" cy="0"/>
+          <a:chOff x="0" y="0"/>
+          <a:chExt cx="0" cy="0"/>
+        </a:xfrm>
+      </p:grpSpPr>
+      <p:sp>
+        <p:nvSpPr>
+          <p:cNvPr id="2" name="Text 0">
+            <a:extLst>
+              <a:ext uri="{FF2B5EF4-FFF2-40B4-BE49-F238E27FC236}">
+                <a16:creationId xmlns:a16="http://schemas.microsoft.com/office/drawing/2014/main" id="{905D39D4-561F-51B6-3BFE-46A91CD79C0D}"/>
+              </a:ext>
+            </a:extLst>
+          </p:cNvPr>
+          <p:cNvSpPr/>
+          <p:nvPr/>
+        </p:nvSpPr>
+        <p:spPr>
+          <a:xfrm>
+            <a:off x="548640" y="161175"/>
+            <a:ext cx="8229600" cy="274320"/>
+          </a:xfrm>
+          <a:prstGeom prst="rect">
+            <a:avLst/>
+          </a:prstGeom>
+          <a:noFill/>
+          <a:ln/>
+        </p:spPr>
+        <p:txBody>
+          <a:bodyPr wrap="square" lIns="0" tIns="0" rIns="0" bIns="0" rtlCol="0" anchor="ctr"/>
+          <a:lstStyle/>
+          <a:p>
+            <a:pPr marL="0" indent="0">
+              <a:buNone/>
+            </a:pPr>
+            <a:r>
+              <a:rPr lang="en-US" dirty="0" err="1"/>
+              <a:t>Apendix</a:t>
+            </a:r>
+            <a:r>
+              <a:rPr lang="en-US" dirty="0"/>
+              <a:t> </a:t>
+            </a:r>
+          </a:p>
+        </p:txBody>
+      </p:sp>
+      <p:sp>
+        <p:nvSpPr>
+          <p:cNvPr id="3" name="Text 1">
+            <a:extLst>
+              <a:ext uri="{FF2B5EF4-FFF2-40B4-BE49-F238E27FC236}">
+                <a16:creationId xmlns:a16="http://schemas.microsoft.com/office/drawing/2014/main" id="{1E33875A-28BF-3F0C-C4AE-1A1CDE07820D}"/>
+              </a:ext>
+            </a:extLst>
+          </p:cNvPr>
+          <p:cNvSpPr/>
+          <p:nvPr/>
+        </p:nvSpPr>
+        <p:spPr>
+          <a:xfrm>
+            <a:off x="548640" y="435495"/>
+            <a:ext cx="10972800" cy="640080"/>
+          </a:xfrm>
+          <a:prstGeom prst="rect">
+            <a:avLst/>
+          </a:prstGeom>
+          <a:noFill/>
+          <a:ln/>
+        </p:spPr>
+        <p:txBody>
+          <a:bodyPr wrap="square" lIns="0" tIns="0" rIns="0" bIns="0" rtlCol="0" anchor="ctr"/>
+          <a:lstStyle/>
+          <a:p>
+            <a:pPr marL="0" indent="0">
+              <a:buNone/>
+            </a:pPr>
+            <a:r>
+              <a:rPr lang="en-US" sz="2800" b="1" dirty="0">
+                <a:solidFill>
+                  <a:srgbClr val="14203A"/>
+                </a:solidFill>
+                <a:latin typeface="Calibri" pitchFamily="34" charset="0"/>
+                <a:ea typeface="Calibri" pitchFamily="34" charset="-122"/>
+                <a:cs typeface="Calibri" pitchFamily="34" charset="-120"/>
+              </a:rPr>
+              <a:t>4. Auto Harness Level </a:t>
+            </a:r>
+            <a:r>
+              <a:rPr lang="en-US" sz="2800" b="1" dirty="0" err="1">
+                <a:solidFill>
+                  <a:srgbClr val="14203A"/>
+                </a:solidFill>
+                <a:latin typeface="Calibri" pitchFamily="34" charset="0"/>
+                <a:ea typeface="Calibri" pitchFamily="34" charset="-122"/>
+                <a:cs typeface="Calibri" pitchFamily="34" charset="-120"/>
+              </a:rPr>
+              <a:t>Avaluate</a:t>
+            </a:r>
+            <a:r>
+              <a:rPr lang="en-US" sz="2800" b="1" dirty="0">
+                <a:solidFill>
+                  <a:srgbClr val="14203A"/>
+                </a:solidFill>
+                <a:latin typeface="Calibri" pitchFamily="34" charset="0"/>
+                <a:ea typeface="Calibri" pitchFamily="34" charset="-122"/>
+                <a:cs typeface="Calibri" pitchFamily="34" charset="-120"/>
+              </a:rPr>
+              <a:t> on portal (1/4)</a:t>
+            </a:r>
+            <a:endParaRPr lang="en-US" sz="2800" dirty="0"/>
+          </a:p>
+        </p:txBody>
+      </p:sp>
+      <p:sp>
+        <p:nvSpPr>
+          <p:cNvPr id="25" name="Text 0">
+            <a:extLst>
+              <a:ext uri="{FF2B5EF4-FFF2-40B4-BE49-F238E27FC236}">
+                <a16:creationId xmlns:a16="http://schemas.microsoft.com/office/drawing/2014/main" id="{CAE932C6-79DB-F08C-CA3D-E140581D2812}"/>
+              </a:ext>
+            </a:extLst>
+          </p:cNvPr>
+          <p:cNvSpPr/>
+          <p:nvPr/>
+        </p:nvSpPr>
+        <p:spPr>
+          <a:xfrm>
+            <a:off x="548640" y="1311178"/>
+            <a:ext cx="8229600" cy="274320"/>
+          </a:xfrm>
+          <a:prstGeom prst="rect">
+            <a:avLst/>
+          </a:prstGeom>
+          <a:noFill/>
+          <a:ln/>
+        </p:spPr>
+        <p:txBody>
+          <a:bodyPr wrap="square" lIns="0" tIns="0" rIns="0" bIns="0" rtlCol="0" anchor="ctr"/>
+          <a:lstStyle/>
+          <a:p>
+            <a:endParaRPr lang="en-US" sz="1200" dirty="0"/>
+          </a:p>
+        </p:txBody>
+      </p:sp>
+      <p:pic>
+        <p:nvPicPr>
+          <p:cNvPr id="5" name="図 4">
+            <a:extLst>
+              <a:ext uri="{FF2B5EF4-FFF2-40B4-BE49-F238E27FC236}">
+                <a16:creationId xmlns:a16="http://schemas.microsoft.com/office/drawing/2014/main" id="{7F295B32-0CC5-FDDF-AB02-9C2C38337A37}"/>
+              </a:ext>
+            </a:extLst>
+          </p:cNvPr>
+          <p:cNvPicPr>
+            <a:picLocks noChangeAspect="1"/>
+          </p:cNvPicPr>
+          <p:nvPr/>
+        </p:nvPicPr>
+        <p:blipFill>
+          <a:blip r:embed="rId3"/>
+          <a:stretch>
+            <a:fillRect/>
+          </a:stretch>
+        </p:blipFill>
+        <p:spPr>
+          <a:xfrm>
+            <a:off x="1733797" y="1075575"/>
+            <a:ext cx="8724405" cy="5505521"/>
+          </a:xfrm>
+          <a:prstGeom prst="rect">
+            <a:avLst/>
+          </a:prstGeom>
+          <a:ln>
+            <a:solidFill>
+              <a:schemeClr val="accent1"/>
+            </a:solidFill>
+          </a:ln>
+        </p:spPr>
+      </p:pic>
+    </p:spTree>
+    <p:extLst>
+      <p:ext uri="{BB962C8B-B14F-4D97-AF65-F5344CB8AC3E}">
+        <p14:creationId xmlns:p14="http://schemas.microsoft.com/office/powerpoint/2010/main" val="3519162458"/>
+      </p:ext>
+    </p:extLst>
+  </p:cSld>
+  <p:clrMapOvr>
+    <a:masterClrMapping/>
+  </p:clrMapOvr>
+</p:sld>
+</file>
+
+<file path=ppt/slides/slide23.xml><?xml version="1.0" encoding="utf-8"?>
+<p:sld xmlns:a="http://schemas.openxmlformats.org/drawingml/2006/main" xmlns:r="http://schemas.openxmlformats.org/officeDocument/2006/relationships" xmlns:p="http://schemas.openxmlformats.org/presentationml/2006/main">
+  <p:cSld>
+    <p:bg>
+      <p:bgPr>
+        <a:solidFill>
+          <a:srgbClr val="F4F6F9"/>
+        </a:solidFill>
+        <a:effectLst/>
+      </p:bgPr>
+    </p:bg>
+    <p:spTree>
+      <p:nvGrpSpPr>
+        <p:cNvPr id="1" name="">
+          <a:extLst>
+            <a:ext uri="{FF2B5EF4-FFF2-40B4-BE49-F238E27FC236}">
+              <a16:creationId xmlns:a16="http://schemas.microsoft.com/office/drawing/2014/main" id="{70D5AAF3-6B2E-FAB6-9547-D35DC83B68D8}"/>
+            </a:ext>
+          </a:extLst>
+        </p:cNvPr>
+        <p:cNvGrpSpPr/>
+        <p:nvPr/>
+      </p:nvGrpSpPr>
+      <p:grpSpPr>
+        <a:xfrm>
+          <a:off x="0" y="0"/>
+          <a:ext cx="0" cy="0"/>
+          <a:chOff x="0" y="0"/>
+          <a:chExt cx="0" cy="0"/>
+        </a:xfrm>
+      </p:grpSpPr>
+      <p:sp>
+        <p:nvSpPr>
+          <p:cNvPr id="2" name="Text 0">
+            <a:extLst>
+              <a:ext uri="{FF2B5EF4-FFF2-40B4-BE49-F238E27FC236}">
+                <a16:creationId xmlns:a16="http://schemas.microsoft.com/office/drawing/2014/main" id="{0B2FB51D-E369-F419-C3EC-42AE223FBDB4}"/>
+              </a:ext>
+            </a:extLst>
+          </p:cNvPr>
+          <p:cNvSpPr/>
+          <p:nvPr/>
+        </p:nvSpPr>
+        <p:spPr>
+          <a:xfrm>
+            <a:off x="548640" y="161175"/>
+            <a:ext cx="8229600" cy="274320"/>
+          </a:xfrm>
+          <a:prstGeom prst="rect">
+            <a:avLst/>
+          </a:prstGeom>
+          <a:noFill/>
+          <a:ln/>
+        </p:spPr>
+        <p:txBody>
+          <a:bodyPr wrap="square" lIns="0" tIns="0" rIns="0" bIns="0" rtlCol="0" anchor="ctr"/>
+          <a:lstStyle/>
+          <a:p>
+            <a:pPr marL="0" indent="0">
+              <a:buNone/>
+            </a:pPr>
+            <a:r>
+              <a:rPr lang="en-US" dirty="0" err="1"/>
+              <a:t>Apendix</a:t>
+            </a:r>
+            <a:r>
+              <a:rPr lang="en-US" dirty="0"/>
+              <a:t> </a:t>
+            </a:r>
+          </a:p>
+        </p:txBody>
+      </p:sp>
+      <p:sp>
+        <p:nvSpPr>
+          <p:cNvPr id="3" name="Text 1">
+            <a:extLst>
+              <a:ext uri="{FF2B5EF4-FFF2-40B4-BE49-F238E27FC236}">
+                <a16:creationId xmlns:a16="http://schemas.microsoft.com/office/drawing/2014/main" id="{DE718581-30B9-BFB0-BB75-1368BB283675}"/>
+              </a:ext>
+            </a:extLst>
+          </p:cNvPr>
+          <p:cNvSpPr/>
+          <p:nvPr/>
+        </p:nvSpPr>
+        <p:spPr>
+          <a:xfrm>
+            <a:off x="548640" y="435495"/>
+            <a:ext cx="10972800" cy="640080"/>
+          </a:xfrm>
+          <a:prstGeom prst="rect">
+            <a:avLst/>
+          </a:prstGeom>
+          <a:noFill/>
+          <a:ln/>
+        </p:spPr>
+        <p:txBody>
+          <a:bodyPr wrap="square" lIns="0" tIns="0" rIns="0" bIns="0" rtlCol="0" anchor="ctr"/>
+          <a:lstStyle/>
+          <a:p>
+            <a:pPr marL="0" indent="0">
+              <a:buNone/>
+            </a:pPr>
+            <a:r>
+              <a:rPr lang="en-US" sz="2800" b="1" dirty="0">
+                <a:solidFill>
+                  <a:srgbClr val="14203A"/>
+                </a:solidFill>
+                <a:latin typeface="Calibri" pitchFamily="34" charset="0"/>
+                <a:ea typeface="Calibri" pitchFamily="34" charset="-122"/>
+                <a:cs typeface="Calibri" pitchFamily="34" charset="-120"/>
+              </a:rPr>
+              <a:t>4. Auto Harness Level </a:t>
+            </a:r>
+            <a:r>
+              <a:rPr lang="en-US" sz="2800" b="1" dirty="0" err="1">
+                <a:solidFill>
+                  <a:srgbClr val="14203A"/>
+                </a:solidFill>
+                <a:latin typeface="Calibri" pitchFamily="34" charset="0"/>
+                <a:ea typeface="Calibri" pitchFamily="34" charset="-122"/>
+                <a:cs typeface="Calibri" pitchFamily="34" charset="-120"/>
+              </a:rPr>
+              <a:t>Avaluate</a:t>
+            </a:r>
+            <a:r>
+              <a:rPr lang="en-US" sz="2800" b="1" dirty="0">
+                <a:solidFill>
+                  <a:srgbClr val="14203A"/>
+                </a:solidFill>
+                <a:latin typeface="Calibri" pitchFamily="34" charset="0"/>
+                <a:ea typeface="Calibri" pitchFamily="34" charset="-122"/>
+                <a:cs typeface="Calibri" pitchFamily="34" charset="-120"/>
+              </a:rPr>
+              <a:t> on portal (4/4)</a:t>
+            </a:r>
+            <a:endParaRPr lang="en-US" sz="2800" dirty="0"/>
+          </a:p>
+        </p:txBody>
+      </p:sp>
+      <p:sp>
+        <p:nvSpPr>
+          <p:cNvPr id="25" name="Text 0">
+            <a:extLst>
+              <a:ext uri="{FF2B5EF4-FFF2-40B4-BE49-F238E27FC236}">
+                <a16:creationId xmlns:a16="http://schemas.microsoft.com/office/drawing/2014/main" id="{C13819E9-AFC0-F033-41EB-A2AACFD957AA}"/>
+              </a:ext>
+            </a:extLst>
+          </p:cNvPr>
+          <p:cNvSpPr/>
+          <p:nvPr/>
+        </p:nvSpPr>
+        <p:spPr>
+          <a:xfrm>
+            <a:off x="548640" y="1311178"/>
+            <a:ext cx="8229600" cy="274320"/>
+          </a:xfrm>
+          <a:prstGeom prst="rect">
+            <a:avLst/>
+          </a:prstGeom>
+          <a:noFill/>
+          <a:ln/>
+        </p:spPr>
+        <p:txBody>
+          <a:bodyPr wrap="square" lIns="0" tIns="0" rIns="0" bIns="0" rtlCol="0" anchor="ctr"/>
+          <a:lstStyle/>
+          <a:p>
+            <a:endParaRPr lang="en-US" sz="1200" dirty="0"/>
+          </a:p>
+        </p:txBody>
+      </p:sp>
+      <p:pic>
+        <p:nvPicPr>
+          <p:cNvPr id="8" name="図 7">
+            <a:extLst>
+              <a:ext uri="{FF2B5EF4-FFF2-40B4-BE49-F238E27FC236}">
+                <a16:creationId xmlns:a16="http://schemas.microsoft.com/office/drawing/2014/main" id="{E7280D3E-D490-A3C0-C8CA-41B6C7A85C38}"/>
+              </a:ext>
+            </a:extLst>
+          </p:cNvPr>
+          <p:cNvPicPr>
+            <a:picLocks noChangeAspect="1"/>
+          </p:cNvPicPr>
+          <p:nvPr/>
+        </p:nvPicPr>
+        <p:blipFill>
+          <a:blip r:embed="rId3"/>
+          <a:stretch>
+            <a:fillRect/>
+          </a:stretch>
+        </p:blipFill>
+        <p:spPr>
+          <a:xfrm>
+            <a:off x="5429863" y="2705751"/>
+            <a:ext cx="6696754" cy="4062610"/>
+          </a:xfrm>
+          <a:prstGeom prst="rect">
+            <a:avLst/>
+          </a:prstGeom>
+          <a:ln>
+            <a:solidFill>
+              <a:schemeClr val="accent1"/>
+            </a:solidFill>
+          </a:ln>
+        </p:spPr>
+      </p:pic>
+      <p:pic>
+        <p:nvPicPr>
+          <p:cNvPr id="6" name="図 5">
+            <a:extLst>
+              <a:ext uri="{FF2B5EF4-FFF2-40B4-BE49-F238E27FC236}">
+                <a16:creationId xmlns:a16="http://schemas.microsoft.com/office/drawing/2014/main" id="{6BF53A88-D2AE-779F-3700-107E375235C4}"/>
+              </a:ext>
+            </a:extLst>
+          </p:cNvPr>
+          <p:cNvPicPr>
+            <a:picLocks noChangeAspect="1"/>
+          </p:cNvPicPr>
+          <p:nvPr/>
+        </p:nvPicPr>
+        <p:blipFill>
+          <a:blip r:embed="rId4"/>
+          <a:stretch>
+            <a:fillRect/>
+          </a:stretch>
+        </p:blipFill>
+        <p:spPr>
+          <a:xfrm>
+            <a:off x="175492" y="1003449"/>
+            <a:ext cx="6696754" cy="5299926"/>
+          </a:xfrm>
+          <a:prstGeom prst="rect">
+            <a:avLst/>
+          </a:prstGeom>
+          <a:ln>
+            <a:solidFill>
+              <a:schemeClr val="accent1"/>
+            </a:solidFill>
+          </a:ln>
+        </p:spPr>
+      </p:pic>
+    </p:spTree>
+    <p:extLst>
+      <p:ext uri="{BB962C8B-B14F-4D97-AF65-F5344CB8AC3E}">
+        <p14:creationId xmlns:p14="http://schemas.microsoft.com/office/powerpoint/2010/main" val="3508413719"/>
+      </p:ext>
+    </p:extLst>
   </p:cSld>
   <p:clrMapOvr>
     <a:masterClrMapping/>
@@ -3668,6 +7918,7 @@
         <a:solidFill>
           <a:srgbClr val="F4F6F9"/>
         </a:solidFill>
+        <a:effectLst/>
       </p:bgPr>
     </p:bg>
     <p:spTree>
@@ -3705,11 +7956,11 @@
           <a:bodyPr wrap="square" lIns="0" tIns="0" rIns="0" bIns="0" rtlCol="0" anchor="ctr"/>
           <a:lstStyle/>
           <a:p>
-            <a:pPr indent="0" marL="0">
-              <a:buNone/>
-            </a:pPr>
-            <a:r>
-              <a:rPr lang="en-US" sz="1200" b="1" spc="300" kern="0" dirty="0">
+            <a:pPr marL="0" indent="0">
+              <a:buNone/>
+            </a:pPr>
+            <a:r>
+              <a:rPr lang="en-US" sz="1200" b="1" kern="0" spc="300" dirty="0">
                 <a:solidFill>
                   <a:srgbClr val="0F766E"/>
                 </a:solidFill>
@@ -3744,7 +7995,7 @@
           <a:bodyPr wrap="square" lIns="0" tIns="0" rIns="0" bIns="0" rtlCol="0" anchor="ctr"/>
           <a:lstStyle/>
           <a:p>
-            <a:pPr indent="0" marL="0">
+            <a:pPr marL="0" indent="0">
               <a:buNone/>
             </a:pPr>
             <a:r>
@@ -3783,7 +8034,7 @@
           <a:bodyPr wrap="square" lIns="0" tIns="0" rIns="0" bIns="0" rtlCol="0" anchor="ctr"/>
           <a:lstStyle/>
           <a:p>
-            <a:pPr indent="0" marL="0">
+            <a:pPr marL="0" indent="0">
               <a:lnSpc>
                 <a:spcPct val="120000"/>
               </a:lnSpc>
@@ -3800,12 +8051,6 @@
               </a:rPr>
               <a:t>AI Harness adds </a:t>
             </a:r>
-            <a:pPr indent="0" marL="0">
-              <a:lnSpc>
-                <a:spcPct val="120000"/>
-              </a:lnSpc>
-              <a:buNone/>
-            </a:pPr>
             <a:r>
               <a:rPr lang="en-US" sz="1600" b="1" dirty="0">
                 <a:solidFill>
@@ -3817,12 +8062,6 @@
               </a:rPr>
               <a:t>identity, policy, evaluation and audit</a:t>
             </a:r>
-            <a:pPr indent="0" marL="0">
-              <a:lnSpc>
-                <a:spcPct val="120000"/>
-              </a:lnSpc>
-              <a:buNone/>
-            </a:pPr>
             <a:r>
               <a:rPr lang="en-US" sz="1600" dirty="0">
                 <a:solidFill>
@@ -3857,6 +8096,13 @@
           </a:solidFill>
           <a:ln/>
         </p:spPr>
+        <p:txBody>
+          <a:bodyPr/>
+          <a:lstStyle/>
+          <a:p>
+            <a:endParaRPr lang="ja-JP" altLang="en-US"/>
+          </a:p>
+        </p:txBody>
       </p:sp>
       <p:sp>
         <p:nvSpPr>
@@ -3879,7 +8125,7 @@
           <a:bodyPr wrap="square" lIns="0" tIns="0" rIns="0" bIns="0" rtlCol="0" anchor="ctr"/>
           <a:lstStyle/>
           <a:p>
-            <a:pPr algn="ctr" indent="0" marL="0">
+            <a:pPr marL="0" indent="0" algn="ctr">
               <a:buNone/>
             </a:pPr>
             <a:r>
@@ -3918,7 +8164,7 @@
           <a:bodyPr wrap="square" lIns="0" tIns="0" rIns="0" bIns="0" rtlCol="0" anchor="ctr"/>
           <a:lstStyle/>
           <a:p>
-            <a:pPr indent="0" marL="0">
+            <a:pPr marL="0" indent="0">
               <a:buNone/>
             </a:pPr>
             <a:r>
@@ -3955,6 +8201,13 @@
           </a:solidFill>
           <a:ln/>
         </p:spPr>
+        <p:txBody>
+          <a:bodyPr/>
+          <a:lstStyle/>
+          <a:p>
+            <a:endParaRPr lang="ja-JP" altLang="en-US"/>
+          </a:p>
+        </p:txBody>
       </p:sp>
       <p:sp>
         <p:nvSpPr>
@@ -3977,7 +8230,7 @@
           <a:bodyPr wrap="square" lIns="0" tIns="0" rIns="0" bIns="0" rtlCol="0" anchor="ctr"/>
           <a:lstStyle/>
           <a:p>
-            <a:pPr algn="ctr" indent="0" marL="0">
+            <a:pPr marL="0" indent="0" algn="ctr">
               <a:buNone/>
             </a:pPr>
             <a:r>
@@ -4016,7 +8269,7 @@
           <a:bodyPr wrap="square" lIns="0" tIns="0" rIns="0" bIns="0" rtlCol="0" anchor="ctr"/>
           <a:lstStyle/>
           <a:p>
-            <a:pPr indent="0" marL="0">
+            <a:pPr marL="0" indent="0">
               <a:buNone/>
             </a:pPr>
             <a:r>
@@ -4053,6 +8306,13 @@
           </a:solidFill>
           <a:ln/>
         </p:spPr>
+        <p:txBody>
+          <a:bodyPr/>
+          <a:lstStyle/>
+          <a:p>
+            <a:endParaRPr lang="ja-JP" altLang="en-US"/>
+          </a:p>
+        </p:txBody>
       </p:sp>
       <p:sp>
         <p:nvSpPr>
@@ -4075,7 +8335,7 @@
           <a:bodyPr wrap="square" lIns="0" tIns="0" rIns="0" bIns="0" rtlCol="0" anchor="ctr"/>
           <a:lstStyle/>
           <a:p>
-            <a:pPr algn="ctr" indent="0" marL="0">
+            <a:pPr marL="0" indent="0" algn="ctr">
               <a:buNone/>
             </a:pPr>
             <a:r>
@@ -4114,7 +8374,7 @@
           <a:bodyPr wrap="square" lIns="0" tIns="0" rIns="0" bIns="0" rtlCol="0" anchor="ctr"/>
           <a:lstStyle/>
           <a:p>
-            <a:pPr indent="0" marL="0">
+            <a:pPr marL="0" indent="0">
               <a:buNone/>
             </a:pPr>
             <a:r>
@@ -4151,6 +8411,13 @@
           </a:solidFill>
           <a:ln/>
         </p:spPr>
+        <p:txBody>
+          <a:bodyPr/>
+          <a:lstStyle/>
+          <a:p>
+            <a:endParaRPr lang="ja-JP" altLang="en-US"/>
+          </a:p>
+        </p:txBody>
       </p:sp>
       <p:sp>
         <p:nvSpPr>
@@ -4173,7 +8440,7 @@
           <a:bodyPr wrap="square" lIns="0" tIns="0" rIns="0" bIns="0" rtlCol="0" anchor="ctr"/>
           <a:lstStyle/>
           <a:p>
-            <a:pPr algn="ctr" indent="0" marL="0">
+            <a:pPr marL="0" indent="0" algn="ctr">
               <a:buNone/>
             </a:pPr>
             <a:r>
@@ -4212,7 +8479,7 @@
           <a:bodyPr wrap="square" lIns="0" tIns="0" rIns="0" bIns="0" rtlCol="0" anchor="ctr"/>
           <a:lstStyle/>
           <a:p>
-            <a:pPr indent="0" marL="0">
+            <a:pPr marL="0" indent="0">
               <a:buNone/>
             </a:pPr>
             <a:r>
@@ -4256,13 +8523,20 @@
             <a:prstDash val="solid"/>
           </a:ln>
           <a:effectLst>
-            <a:outerShdw sx="100000" sy="100000" kx="0" ky="0" algn="bl" rotWithShape="0" blurRad="114300" dist="38100" dir="5400000">
+            <a:outerShdw blurRad="114300" dist="38100" dir="5400000" algn="bl" rotWithShape="0">
               <a:srgbClr val="9AA6B8">
                 <a:alpha val="32000"/>
               </a:srgbClr>
             </a:outerShdw>
           </a:effectLst>
         </p:spPr>
+        <p:txBody>
+          <a:bodyPr/>
+          <a:lstStyle/>
+          <a:p>
+            <a:endParaRPr lang="ja-JP" altLang="en-US"/>
+          </a:p>
+        </p:txBody>
       </p:sp>
       <p:sp>
         <p:nvSpPr>
@@ -4283,6 +8557,13 @@
           </a:solidFill>
           <a:ln/>
         </p:spPr>
+        <p:txBody>
+          <a:bodyPr/>
+          <a:lstStyle/>
+          <a:p>
+            <a:endParaRPr lang="ja-JP" altLang="en-US"/>
+          </a:p>
+        </p:txBody>
       </p:sp>
       <p:sp>
         <p:nvSpPr>
@@ -4305,7 +8586,7 @@
           <a:bodyPr wrap="square" lIns="0" tIns="0" rIns="0" bIns="0" rtlCol="0" anchor="ctr"/>
           <a:lstStyle/>
           <a:p>
-            <a:pPr algn="ctr" indent="0" marL="0">
+            <a:pPr marL="0" indent="0" algn="ctr">
               <a:buNone/>
             </a:pPr>
             <a:r>
@@ -4344,7 +8625,7 @@
           <a:bodyPr wrap="square" lIns="0" tIns="0" rIns="0" bIns="0" rtlCol="0" anchor="ctr"/>
           <a:lstStyle/>
           <a:p>
-            <a:pPr algn="ctr" indent="0" marL="0">
+            <a:pPr marL="0" indent="0" algn="ctr">
               <a:buNone/>
             </a:pPr>
             <a:r>
@@ -4383,7 +8664,7 @@
           <a:bodyPr wrap="square" lIns="0" tIns="0" rIns="0" bIns="0" rtlCol="0" anchor="ctr"/>
           <a:lstStyle/>
           <a:p>
-            <a:pPr algn="ctr" indent="0" marL="0">
+            <a:pPr marL="0" indent="0" algn="ctr">
               <a:buNone/>
             </a:pPr>
             <a:r>
@@ -4427,13 +8708,20 @@
             <a:prstDash val="solid"/>
           </a:ln>
           <a:effectLst>
-            <a:outerShdw sx="100000" sy="100000" kx="0" ky="0" algn="bl" rotWithShape="0" blurRad="114300" dist="38100" dir="5400000">
+            <a:outerShdw blurRad="114300" dist="38100" dir="5400000" algn="bl" rotWithShape="0">
               <a:srgbClr val="9AA6B8">
                 <a:alpha val="32000"/>
               </a:srgbClr>
             </a:outerShdw>
           </a:effectLst>
         </p:spPr>
+        <p:txBody>
+          <a:bodyPr/>
+          <a:lstStyle/>
+          <a:p>
+            <a:endParaRPr lang="ja-JP" altLang="en-US"/>
+          </a:p>
+        </p:txBody>
       </p:sp>
       <p:sp>
         <p:nvSpPr>
@@ -4454,6 +8742,13 @@
           </a:solidFill>
           <a:ln/>
         </p:spPr>
+        <p:txBody>
+          <a:bodyPr/>
+          <a:lstStyle/>
+          <a:p>
+            <a:endParaRPr lang="ja-JP" altLang="en-US"/>
+          </a:p>
+        </p:txBody>
       </p:sp>
       <p:sp>
         <p:nvSpPr>
@@ -4476,7 +8771,7 @@
           <a:bodyPr wrap="square" lIns="0" tIns="0" rIns="0" bIns="0" rtlCol="0" anchor="ctr"/>
           <a:lstStyle/>
           <a:p>
-            <a:pPr algn="ctr" indent="0" marL="0">
+            <a:pPr marL="0" indent="0" algn="ctr">
               <a:buNone/>
             </a:pPr>
             <a:r>
@@ -4515,7 +8810,7 @@
           <a:bodyPr wrap="square" lIns="0" tIns="0" rIns="0" bIns="0" rtlCol="0" anchor="ctr"/>
           <a:lstStyle/>
           <a:p>
-            <a:pPr algn="ctr" indent="0" marL="0">
+            <a:pPr marL="0" indent="0" algn="ctr">
               <a:buNone/>
             </a:pPr>
             <a:r>
@@ -4554,7 +8849,7 @@
           <a:bodyPr wrap="square" lIns="0" tIns="0" rIns="0" bIns="0" rtlCol="0" anchor="ctr"/>
           <a:lstStyle/>
           <a:p>
-            <a:pPr algn="ctr" indent="0" marL="0">
+            <a:pPr marL="0" indent="0" algn="ctr">
               <a:buNone/>
             </a:pPr>
             <a:r>
@@ -4598,13 +8893,20 @@
             <a:prstDash val="solid"/>
           </a:ln>
           <a:effectLst>
-            <a:outerShdw sx="100000" sy="100000" kx="0" ky="0" algn="bl" rotWithShape="0" blurRad="114300" dist="38100" dir="5400000">
+            <a:outerShdw blurRad="114300" dist="38100" dir="5400000" algn="bl" rotWithShape="0">
               <a:srgbClr val="9AA6B8">
                 <a:alpha val="32000"/>
               </a:srgbClr>
             </a:outerShdw>
           </a:effectLst>
         </p:spPr>
+        <p:txBody>
+          <a:bodyPr/>
+          <a:lstStyle/>
+          <a:p>
+            <a:endParaRPr lang="ja-JP" altLang="en-US"/>
+          </a:p>
+        </p:txBody>
       </p:sp>
       <p:sp>
         <p:nvSpPr>
@@ -4625,6 +8927,13 @@
           </a:solidFill>
           <a:ln/>
         </p:spPr>
+        <p:txBody>
+          <a:bodyPr/>
+          <a:lstStyle/>
+          <a:p>
+            <a:endParaRPr lang="ja-JP" altLang="en-US"/>
+          </a:p>
+        </p:txBody>
       </p:sp>
       <p:sp>
         <p:nvSpPr>
@@ -4647,7 +8956,7 @@
           <a:bodyPr wrap="square" lIns="0" tIns="0" rIns="0" bIns="0" rtlCol="0" anchor="ctr"/>
           <a:lstStyle/>
           <a:p>
-            <a:pPr algn="ctr" indent="0" marL="0">
+            <a:pPr marL="0" indent="0" algn="ctr">
               <a:buNone/>
             </a:pPr>
             <a:r>
@@ -4686,7 +8995,7 @@
           <a:bodyPr wrap="square" lIns="0" tIns="0" rIns="0" bIns="0" rtlCol="0" anchor="ctr"/>
           <a:lstStyle/>
           <a:p>
-            <a:pPr algn="ctr" indent="0" marL="0">
+            <a:pPr marL="0" indent="0" algn="ctr">
               <a:buNone/>
             </a:pPr>
             <a:r>
@@ -4725,7 +9034,7 @@
           <a:bodyPr wrap="square" lIns="0" tIns="0" rIns="0" bIns="0" rtlCol="0" anchor="ctr"/>
           <a:lstStyle/>
           <a:p>
-            <a:pPr algn="ctr" indent="0" marL="0">
+            <a:pPr marL="0" indent="0" algn="ctr">
               <a:buNone/>
             </a:pPr>
             <a:r>
@@ -4769,13 +9078,20 @@
             <a:prstDash val="solid"/>
           </a:ln>
           <a:effectLst>
-            <a:outerShdw sx="100000" sy="100000" kx="0" ky="0" algn="bl" rotWithShape="0" blurRad="114300" dist="38100" dir="5400000">
+            <a:outerShdw blurRad="114300" dist="38100" dir="5400000" algn="bl" rotWithShape="0">
               <a:srgbClr val="9AA6B8">
                 <a:alpha val="32000"/>
               </a:srgbClr>
             </a:outerShdw>
           </a:effectLst>
         </p:spPr>
+        <p:txBody>
+          <a:bodyPr/>
+          <a:lstStyle/>
+          <a:p>
+            <a:endParaRPr lang="ja-JP" altLang="en-US"/>
+          </a:p>
+        </p:txBody>
       </p:sp>
       <p:sp>
         <p:nvSpPr>
@@ -4796,6 +9112,13 @@
           </a:solidFill>
           <a:ln/>
         </p:spPr>
+        <p:txBody>
+          <a:bodyPr/>
+          <a:lstStyle/>
+          <a:p>
+            <a:endParaRPr lang="ja-JP" altLang="en-US"/>
+          </a:p>
+        </p:txBody>
       </p:sp>
       <p:sp>
         <p:nvSpPr>
@@ -4818,7 +9141,7 @@
           <a:bodyPr wrap="square" lIns="0" tIns="0" rIns="0" bIns="0" rtlCol="0" anchor="ctr"/>
           <a:lstStyle/>
           <a:p>
-            <a:pPr algn="ctr" indent="0" marL="0">
+            <a:pPr marL="0" indent="0" algn="ctr">
               <a:buNone/>
             </a:pPr>
             <a:r>
@@ -4857,7 +9180,7 @@
           <a:bodyPr wrap="square" lIns="0" tIns="0" rIns="0" bIns="0" rtlCol="0" anchor="ctr"/>
           <a:lstStyle/>
           <a:p>
-            <a:pPr algn="ctr" indent="0" marL="0">
+            <a:pPr marL="0" indent="0" algn="ctr">
               <a:buNone/>
             </a:pPr>
             <a:r>
@@ -4896,7 +9219,7 @@
           <a:bodyPr wrap="square" lIns="0" tIns="0" rIns="0" bIns="0" rtlCol="0" anchor="ctr"/>
           <a:lstStyle/>
           <a:p>
-            <a:pPr algn="ctr" indent="0" marL="0">
+            <a:pPr marL="0" indent="0" algn="ctr">
               <a:buNone/>
             </a:pPr>
             <a:r>
@@ -4930,6 +9253,7 @@
         <a:solidFill>
           <a:srgbClr val="F4F6F9"/>
         </a:solidFill>
+        <a:effectLst/>
       </p:bgPr>
     </p:bg>
     <p:spTree>
@@ -4967,6 +9291,13 @@
           </a:solidFill>
           <a:ln/>
         </p:spPr>
+        <p:txBody>
+          <a:bodyPr/>
+          <a:lstStyle/>
+          <a:p>
+            <a:endParaRPr lang="ja-JP" altLang="en-US"/>
+          </a:p>
+        </p:txBody>
       </p:sp>
       <p:sp>
         <p:nvSpPr>
@@ -4989,7 +9320,7 @@
           <a:bodyPr wrap="square" lIns="0" tIns="0" rIns="0" bIns="0" rtlCol="0" anchor="ctr"/>
           <a:lstStyle/>
           <a:p>
-            <a:pPr algn="ctr" indent="0" marL="0">
+            <a:pPr marL="0" indent="0" algn="ctr">
               <a:buNone/>
             </a:pPr>
             <a:r>
@@ -5028,7 +9359,7 @@
           <a:bodyPr wrap="square" lIns="0" tIns="0" rIns="0" bIns="0" rtlCol="0" anchor="ctr"/>
           <a:lstStyle/>
           <a:p>
-            <a:pPr indent="0" marL="0">
+            <a:pPr marL="0" indent="0">
               <a:buNone/>
             </a:pPr>
             <a:r>
@@ -5067,7 +9398,7 @@
           <a:bodyPr wrap="square" lIns="0" tIns="0" rIns="0" bIns="0" rtlCol="0" anchor="ctr"/>
           <a:lstStyle/>
           <a:p>
-            <a:pPr indent="0" marL="0">
+            <a:pPr marL="0" indent="0">
               <a:buNone/>
             </a:pPr>
             <a:r>
@@ -5111,13 +9442,20 @@
             <a:prstDash val="solid"/>
           </a:ln>
           <a:effectLst>
-            <a:outerShdw sx="100000" sy="100000" kx="0" ky="0" algn="bl" rotWithShape="0" blurRad="114300" dist="38100" dir="5400000">
+            <a:outerShdw blurRad="114300" dist="38100" dir="5400000" algn="bl" rotWithShape="0">
               <a:srgbClr val="9AA6B8">
                 <a:alpha val="32000"/>
               </a:srgbClr>
             </a:outerShdw>
           </a:effectLst>
         </p:spPr>
+        <p:txBody>
+          <a:bodyPr/>
+          <a:lstStyle/>
+          <a:p>
+            <a:endParaRPr lang="ja-JP" altLang="en-US"/>
+          </a:p>
+        </p:txBody>
       </p:sp>
       <p:sp>
         <p:nvSpPr>
@@ -5138,6 +9476,13 @@
           </a:solidFill>
           <a:ln/>
         </p:spPr>
+        <p:txBody>
+          <a:bodyPr/>
+          <a:lstStyle/>
+          <a:p>
+            <a:endParaRPr lang="ja-JP" altLang="en-US"/>
+          </a:p>
+        </p:txBody>
       </p:sp>
       <p:sp>
         <p:nvSpPr>
@@ -5160,7 +9505,7 @@
           <a:bodyPr wrap="square" lIns="0" tIns="0" rIns="0" bIns="0" rtlCol="0" anchor="ctr"/>
           <a:lstStyle/>
           <a:p>
-            <a:pPr algn="ctr" indent="0" marL="0">
+            <a:pPr marL="0" indent="0" algn="ctr">
               <a:buNone/>
             </a:pPr>
             <a:r>
@@ -5199,7 +9544,7 @@
           <a:bodyPr wrap="square" lIns="0" tIns="0" rIns="0" bIns="0" rtlCol="0" anchor="t"/>
           <a:lstStyle/>
           <a:p>
-            <a:pPr indent="0" marL="0">
+            <a:pPr marL="0" indent="0">
               <a:buNone/>
             </a:pPr>
             <a:r>
@@ -5238,7 +9583,7 @@
           <a:bodyPr wrap="square" lIns="0" tIns="0" rIns="0" bIns="0" rtlCol="0" anchor="t"/>
           <a:lstStyle/>
           <a:p>
-            <a:pPr indent="0" marL="0">
+            <a:pPr marL="0" indent="0">
               <a:lnSpc>
                 <a:spcPct val="102000"/>
               </a:lnSpc>
@@ -5285,13 +9630,20 @@
             <a:prstDash val="solid"/>
           </a:ln>
           <a:effectLst>
-            <a:outerShdw sx="100000" sy="100000" kx="0" ky="0" algn="bl" rotWithShape="0" blurRad="114300" dist="38100" dir="5400000">
+            <a:outerShdw blurRad="114300" dist="38100" dir="5400000" algn="bl" rotWithShape="0">
               <a:srgbClr val="9AA6B8">
                 <a:alpha val="32000"/>
               </a:srgbClr>
             </a:outerShdw>
           </a:effectLst>
         </p:spPr>
+        <p:txBody>
+          <a:bodyPr/>
+          <a:lstStyle/>
+          <a:p>
+            <a:endParaRPr lang="ja-JP" altLang="en-US"/>
+          </a:p>
+        </p:txBody>
       </p:sp>
       <p:sp>
         <p:nvSpPr>
@@ -5312,6 +9664,13 @@
           </a:solidFill>
           <a:ln/>
         </p:spPr>
+        <p:txBody>
+          <a:bodyPr/>
+          <a:lstStyle/>
+          <a:p>
+            <a:endParaRPr lang="ja-JP" altLang="en-US"/>
+          </a:p>
+        </p:txBody>
       </p:sp>
       <p:sp>
         <p:nvSpPr>
@@ -5334,7 +9693,7 @@
           <a:bodyPr wrap="square" lIns="0" tIns="0" rIns="0" bIns="0" rtlCol="0" anchor="ctr"/>
           <a:lstStyle/>
           <a:p>
-            <a:pPr algn="ctr" indent="0" marL="0">
+            <a:pPr marL="0" indent="0" algn="ctr">
               <a:buNone/>
             </a:pPr>
             <a:r>
@@ -5373,7 +9732,7 @@
           <a:bodyPr wrap="square" lIns="0" tIns="0" rIns="0" bIns="0" rtlCol="0" anchor="t"/>
           <a:lstStyle/>
           <a:p>
-            <a:pPr indent="0" marL="0">
+            <a:pPr marL="0" indent="0">
               <a:buNone/>
             </a:pPr>
             <a:r>
@@ -5412,7 +9771,7 @@
           <a:bodyPr wrap="square" lIns="0" tIns="0" rIns="0" bIns="0" rtlCol="0" anchor="t"/>
           <a:lstStyle/>
           <a:p>
-            <a:pPr indent="0" marL="0">
+            <a:pPr marL="0" indent="0">
               <a:lnSpc>
                 <a:spcPct val="102000"/>
               </a:lnSpc>
@@ -5459,13 +9818,20 @@
             <a:prstDash val="solid"/>
           </a:ln>
           <a:effectLst>
-            <a:outerShdw sx="100000" sy="100000" kx="0" ky="0" algn="bl" rotWithShape="0" blurRad="114300" dist="38100" dir="5400000">
+            <a:outerShdw blurRad="114300" dist="38100" dir="5400000" algn="bl" rotWithShape="0">
               <a:srgbClr val="9AA6B8">
                 <a:alpha val="32000"/>
               </a:srgbClr>
             </a:outerShdw>
           </a:effectLst>
         </p:spPr>
+        <p:txBody>
+          <a:bodyPr/>
+          <a:lstStyle/>
+          <a:p>
+            <a:endParaRPr lang="ja-JP" altLang="en-US"/>
+          </a:p>
+        </p:txBody>
       </p:sp>
       <p:sp>
         <p:nvSpPr>
@@ -5486,6 +9852,13 @@
           </a:solidFill>
           <a:ln/>
         </p:spPr>
+        <p:txBody>
+          <a:bodyPr/>
+          <a:lstStyle/>
+          <a:p>
+            <a:endParaRPr lang="ja-JP" altLang="en-US"/>
+          </a:p>
+        </p:txBody>
       </p:sp>
       <p:sp>
         <p:nvSpPr>
@@ -5508,7 +9881,7 @@
           <a:bodyPr wrap="square" lIns="0" tIns="0" rIns="0" bIns="0" rtlCol="0" anchor="ctr"/>
           <a:lstStyle/>
           <a:p>
-            <a:pPr algn="ctr" indent="0" marL="0">
+            <a:pPr marL="0" indent="0" algn="ctr">
               <a:buNone/>
             </a:pPr>
             <a:r>
@@ -5547,7 +9920,7 @@
           <a:bodyPr wrap="square" lIns="0" tIns="0" rIns="0" bIns="0" rtlCol="0" anchor="t"/>
           <a:lstStyle/>
           <a:p>
-            <a:pPr indent="0" marL="0">
+            <a:pPr marL="0" indent="0">
               <a:buNone/>
             </a:pPr>
             <a:r>
@@ -5586,7 +9959,7 @@
           <a:bodyPr wrap="square" lIns="0" tIns="0" rIns="0" bIns="0" rtlCol="0" anchor="t"/>
           <a:lstStyle/>
           <a:p>
-            <a:pPr indent="0" marL="0">
+            <a:pPr marL="0" indent="0">
               <a:lnSpc>
                 <a:spcPct val="102000"/>
               </a:lnSpc>
@@ -5633,13 +10006,20 @@
             <a:prstDash val="solid"/>
           </a:ln>
           <a:effectLst>
-            <a:outerShdw sx="100000" sy="100000" kx="0" ky="0" algn="bl" rotWithShape="0" blurRad="114300" dist="38100" dir="5400000">
+            <a:outerShdw blurRad="114300" dist="38100" dir="5400000" algn="bl" rotWithShape="0">
               <a:srgbClr val="9AA6B8">
                 <a:alpha val="32000"/>
               </a:srgbClr>
             </a:outerShdw>
           </a:effectLst>
         </p:spPr>
+        <p:txBody>
+          <a:bodyPr/>
+          <a:lstStyle/>
+          <a:p>
+            <a:endParaRPr lang="ja-JP" altLang="en-US"/>
+          </a:p>
+        </p:txBody>
       </p:sp>
       <p:sp>
         <p:nvSpPr>
@@ -5660,6 +10040,13 @@
           </a:solidFill>
           <a:ln/>
         </p:spPr>
+        <p:txBody>
+          <a:bodyPr/>
+          <a:lstStyle/>
+          <a:p>
+            <a:endParaRPr lang="ja-JP" altLang="en-US"/>
+          </a:p>
+        </p:txBody>
       </p:sp>
       <p:sp>
         <p:nvSpPr>
@@ -5682,7 +10069,7 @@
           <a:bodyPr wrap="square" lIns="0" tIns="0" rIns="0" bIns="0" rtlCol="0" anchor="ctr"/>
           <a:lstStyle/>
           <a:p>
-            <a:pPr algn="ctr" indent="0" marL="0">
+            <a:pPr marL="0" indent="0" algn="ctr">
               <a:buNone/>
             </a:pPr>
             <a:r>
@@ -5721,7 +10108,7 @@
           <a:bodyPr wrap="square" lIns="0" tIns="0" rIns="0" bIns="0" rtlCol="0" anchor="t"/>
           <a:lstStyle/>
           <a:p>
-            <a:pPr indent="0" marL="0">
+            <a:pPr marL="0" indent="0">
               <a:buNone/>
             </a:pPr>
             <a:r>
@@ -5760,7 +10147,7 @@
           <a:bodyPr wrap="square" lIns="0" tIns="0" rIns="0" bIns="0" rtlCol="0" anchor="t"/>
           <a:lstStyle/>
           <a:p>
-            <a:pPr indent="0" marL="0">
+            <a:pPr marL="0" indent="0">
               <a:lnSpc>
                 <a:spcPct val="102000"/>
               </a:lnSpc>
@@ -5807,6 +10194,13 @@
             <a:prstDash val="solid"/>
           </a:ln>
         </p:spPr>
+        <p:txBody>
+          <a:bodyPr/>
+          <a:lstStyle/>
+          <a:p>
+            <a:endParaRPr lang="ja-JP" altLang="en-US"/>
+          </a:p>
+        </p:txBody>
       </p:sp>
       <p:sp>
         <p:nvSpPr>
@@ -5829,7 +10223,7 @@
           <a:bodyPr wrap="square" lIns="0" tIns="0" rIns="0" bIns="0" rtlCol="0" anchor="ctr"/>
           <a:lstStyle/>
           <a:p>
-            <a:pPr indent="0" marL="0">
+            <a:pPr marL="0" indent="0">
               <a:buNone/>
             </a:pPr>
             <a:r>
@@ -5863,6 +10257,7 @@
         <a:solidFill>
           <a:srgbClr val="F4F6F9"/>
         </a:solidFill>
+        <a:effectLst/>
       </p:bgPr>
     </p:bg>
     <p:spTree>
@@ -5900,6 +10295,13 @@
           </a:solidFill>
           <a:ln/>
         </p:spPr>
+        <p:txBody>
+          <a:bodyPr/>
+          <a:lstStyle/>
+          <a:p>
+            <a:endParaRPr lang="ja-JP" altLang="en-US"/>
+          </a:p>
+        </p:txBody>
       </p:sp>
       <p:sp>
         <p:nvSpPr>
@@ -5922,7 +10324,7 @@
           <a:bodyPr wrap="square" lIns="0" tIns="0" rIns="0" bIns="0" rtlCol="0" anchor="ctr"/>
           <a:lstStyle/>
           <a:p>
-            <a:pPr algn="ctr" indent="0" marL="0">
+            <a:pPr marL="0" indent="0" algn="ctr">
               <a:buNone/>
             </a:pPr>
             <a:r>
@@ -5961,7 +10363,7 @@
           <a:bodyPr wrap="square" lIns="0" tIns="0" rIns="0" bIns="0" rtlCol="0" anchor="ctr"/>
           <a:lstStyle/>
           <a:p>
-            <a:pPr indent="0" marL="0">
+            <a:pPr marL="0" indent="0">
               <a:buNone/>
             </a:pPr>
             <a:r>
@@ -6000,7 +10402,7 @@
           <a:bodyPr wrap="square" lIns="0" tIns="0" rIns="0" bIns="0" rtlCol="0" anchor="ctr"/>
           <a:lstStyle/>
           <a:p>
-            <a:pPr indent="0" marL="0">
+            <a:pPr marL="0" indent="0">
               <a:buNone/>
             </a:pPr>
             <a:r>
@@ -6044,13 +10446,20 @@
             <a:prstDash val="solid"/>
           </a:ln>
           <a:effectLst>
-            <a:outerShdw sx="100000" sy="100000" kx="0" ky="0" algn="bl" rotWithShape="0" blurRad="114300" dist="38100" dir="5400000">
+            <a:outerShdw blurRad="114300" dist="38100" dir="5400000" algn="bl" rotWithShape="0">
               <a:srgbClr val="9AA6B8">
                 <a:alpha val="32000"/>
               </a:srgbClr>
             </a:outerShdw>
           </a:effectLst>
         </p:spPr>
+        <p:txBody>
+          <a:bodyPr/>
+          <a:lstStyle/>
+          <a:p>
+            <a:endParaRPr lang="ja-JP" altLang="en-US"/>
+          </a:p>
+        </p:txBody>
       </p:sp>
       <p:sp>
         <p:nvSpPr>
@@ -6071,6 +10480,13 @@
           </a:solidFill>
           <a:ln/>
         </p:spPr>
+        <p:txBody>
+          <a:bodyPr/>
+          <a:lstStyle/>
+          <a:p>
+            <a:endParaRPr lang="ja-JP" altLang="en-US"/>
+          </a:p>
+        </p:txBody>
       </p:sp>
       <p:sp>
         <p:nvSpPr>
@@ -6093,7 +10509,7 @@
           <a:bodyPr wrap="square" lIns="0" tIns="0" rIns="0" bIns="0" rtlCol="0" anchor="ctr"/>
           <a:lstStyle/>
           <a:p>
-            <a:pPr algn="ctr" indent="0" marL="0">
+            <a:pPr marL="0" indent="0" algn="ctr">
               <a:buNone/>
             </a:pPr>
             <a:r>
@@ -6132,11 +10548,11 @@
           <a:bodyPr wrap="square" lIns="0" tIns="0" rIns="0" bIns="0" rtlCol="0" anchor="ctr"/>
           <a:lstStyle/>
           <a:p>
-            <a:pPr algn="ctr" indent="0" marL="0">
-              <a:buNone/>
-            </a:pPr>
-            <a:r>
-              <a:rPr lang="en-US" sz="1100" b="1" spc="200" kern="0" dirty="0">
+            <a:pPr marL="0" indent="0" algn="ctr">
+              <a:buNone/>
+            </a:pPr>
+            <a:r>
+              <a:rPr lang="en-US" sz="1100" b="1" kern="0" spc="200" dirty="0">
                 <a:solidFill>
                   <a:srgbClr val="0F766E"/>
                 </a:solidFill>
@@ -6171,7 +10587,7 @@
           <a:bodyPr wrap="square" lIns="0" tIns="0" rIns="0" bIns="0" rtlCol="0" anchor="ctr"/>
           <a:lstStyle/>
           <a:p>
-            <a:pPr algn="ctr" indent="0" marL="0">
+            <a:pPr marL="0" indent="0" algn="ctr">
               <a:buNone/>
             </a:pPr>
             <a:r>
@@ -6210,7 +10626,7 @@
           <a:bodyPr wrap="square" lIns="0" tIns="0" rIns="0" bIns="0" rtlCol="0" anchor="ctr"/>
           <a:lstStyle/>
           <a:p>
-            <a:pPr algn="ctr" indent="0" marL="0">
+            <a:pPr marL="0" indent="0" algn="ctr">
               <a:lnSpc>
                 <a:spcPct val="105000"/>
               </a:lnSpc>
@@ -6252,7 +10668,7 @@
           <a:bodyPr wrap="square" lIns="0" tIns="0" rIns="0" bIns="0" rtlCol="0" anchor="ctr"/>
           <a:lstStyle/>
           <a:p>
-            <a:pPr algn="ctr" indent="0" marL="0">
+            <a:pPr marL="0" indent="0" algn="ctr">
               <a:buNone/>
             </a:pPr>
             <a:r>
@@ -6296,13 +10712,20 @@
             <a:prstDash val="solid"/>
           </a:ln>
           <a:effectLst>
-            <a:outerShdw sx="100000" sy="100000" kx="0" ky="0" algn="bl" rotWithShape="0" blurRad="114300" dist="38100" dir="5400000">
+            <a:outerShdw blurRad="114300" dist="38100" dir="5400000" algn="bl" rotWithShape="0">
               <a:srgbClr val="9AA6B8">
                 <a:alpha val="32000"/>
               </a:srgbClr>
             </a:outerShdw>
           </a:effectLst>
         </p:spPr>
+        <p:txBody>
+          <a:bodyPr/>
+          <a:lstStyle/>
+          <a:p>
+            <a:endParaRPr lang="ja-JP" altLang="en-US"/>
+          </a:p>
+        </p:txBody>
       </p:sp>
       <p:sp>
         <p:nvSpPr>
@@ -6323,6 +10746,13 @@
           </a:solidFill>
           <a:ln/>
         </p:spPr>
+        <p:txBody>
+          <a:bodyPr/>
+          <a:lstStyle/>
+          <a:p>
+            <a:endParaRPr lang="ja-JP" altLang="en-US"/>
+          </a:p>
+        </p:txBody>
       </p:sp>
       <p:sp>
         <p:nvSpPr>
@@ -6345,7 +10775,7 @@
           <a:bodyPr wrap="square" lIns="0" tIns="0" rIns="0" bIns="0" rtlCol="0" anchor="ctr"/>
           <a:lstStyle/>
           <a:p>
-            <a:pPr algn="ctr" indent="0" marL="0">
+            <a:pPr marL="0" indent="0" algn="ctr">
               <a:buNone/>
             </a:pPr>
             <a:r>
@@ -6384,11 +10814,11 @@
           <a:bodyPr wrap="square" lIns="0" tIns="0" rIns="0" bIns="0" rtlCol="0" anchor="ctr"/>
           <a:lstStyle/>
           <a:p>
-            <a:pPr algn="ctr" indent="0" marL="0">
-              <a:buNone/>
-            </a:pPr>
-            <a:r>
-              <a:rPr lang="en-US" sz="1100" b="1" spc="200" kern="0" dirty="0">
+            <a:pPr marL="0" indent="0" algn="ctr">
+              <a:buNone/>
+            </a:pPr>
+            <a:r>
+              <a:rPr lang="en-US" sz="1100" b="1" kern="0" spc="200" dirty="0">
                 <a:solidFill>
                   <a:srgbClr val="0F766E"/>
                 </a:solidFill>
@@ -6423,7 +10853,7 @@
           <a:bodyPr wrap="square" lIns="0" tIns="0" rIns="0" bIns="0" rtlCol="0" anchor="ctr"/>
           <a:lstStyle/>
           <a:p>
-            <a:pPr algn="ctr" indent="0" marL="0">
+            <a:pPr marL="0" indent="0" algn="ctr">
               <a:buNone/>
             </a:pPr>
             <a:r>
@@ -6462,7 +10892,7 @@
           <a:bodyPr wrap="square" lIns="0" tIns="0" rIns="0" bIns="0" rtlCol="0" anchor="ctr"/>
           <a:lstStyle/>
           <a:p>
-            <a:pPr algn="ctr" indent="0" marL="0">
+            <a:pPr marL="0" indent="0" algn="ctr">
               <a:lnSpc>
                 <a:spcPct val="105000"/>
               </a:lnSpc>
@@ -6504,7 +10934,7 @@
           <a:bodyPr wrap="square" lIns="0" tIns="0" rIns="0" bIns="0" rtlCol="0" anchor="ctr"/>
           <a:lstStyle/>
           <a:p>
-            <a:pPr algn="ctr" indent="0" marL="0">
+            <a:pPr marL="0" indent="0" algn="ctr">
               <a:buNone/>
             </a:pPr>
             <a:r>
@@ -6548,13 +10978,20 @@
             <a:prstDash val="solid"/>
           </a:ln>
           <a:effectLst>
-            <a:outerShdw sx="100000" sy="100000" kx="0" ky="0" algn="bl" rotWithShape="0" blurRad="114300" dist="38100" dir="5400000">
+            <a:outerShdw blurRad="114300" dist="38100" dir="5400000" algn="bl" rotWithShape="0">
               <a:srgbClr val="9AA6B8">
                 <a:alpha val="32000"/>
               </a:srgbClr>
             </a:outerShdw>
           </a:effectLst>
         </p:spPr>
+        <p:txBody>
+          <a:bodyPr/>
+          <a:lstStyle/>
+          <a:p>
+            <a:endParaRPr lang="ja-JP" altLang="en-US"/>
+          </a:p>
+        </p:txBody>
       </p:sp>
       <p:sp>
         <p:nvSpPr>
@@ -6575,6 +11012,13 @@
           </a:solidFill>
           <a:ln/>
         </p:spPr>
+        <p:txBody>
+          <a:bodyPr/>
+          <a:lstStyle/>
+          <a:p>
+            <a:endParaRPr lang="ja-JP" altLang="en-US"/>
+          </a:p>
+        </p:txBody>
       </p:sp>
       <p:sp>
         <p:nvSpPr>
@@ -6597,7 +11041,7 @@
           <a:bodyPr wrap="square" lIns="0" tIns="0" rIns="0" bIns="0" rtlCol="0" anchor="ctr"/>
           <a:lstStyle/>
           <a:p>
-            <a:pPr algn="ctr" indent="0" marL="0">
+            <a:pPr marL="0" indent="0" algn="ctr">
               <a:buNone/>
             </a:pPr>
             <a:r>
@@ -6636,11 +11080,11 @@
           <a:bodyPr wrap="square" lIns="0" tIns="0" rIns="0" bIns="0" rtlCol="0" anchor="ctr"/>
           <a:lstStyle/>
           <a:p>
-            <a:pPr algn="ctr" indent="0" marL="0">
-              <a:buNone/>
-            </a:pPr>
-            <a:r>
-              <a:rPr lang="en-US" sz="1100" b="1" spc="200" kern="0" dirty="0">
+            <a:pPr marL="0" indent="0" algn="ctr">
+              <a:buNone/>
+            </a:pPr>
+            <a:r>
+              <a:rPr lang="en-US" sz="1100" b="1" kern="0" spc="200" dirty="0">
                 <a:solidFill>
                   <a:srgbClr val="0F766E"/>
                 </a:solidFill>
@@ -6675,7 +11119,7 @@
           <a:bodyPr wrap="square" lIns="0" tIns="0" rIns="0" bIns="0" rtlCol="0" anchor="ctr"/>
           <a:lstStyle/>
           <a:p>
-            <a:pPr algn="ctr" indent="0" marL="0">
+            <a:pPr marL="0" indent="0" algn="ctr">
               <a:buNone/>
             </a:pPr>
             <a:r>
@@ -6714,7 +11158,7 @@
           <a:bodyPr wrap="square" lIns="0" tIns="0" rIns="0" bIns="0" rtlCol="0" anchor="ctr"/>
           <a:lstStyle/>
           <a:p>
-            <a:pPr algn="ctr" indent="0" marL="0">
+            <a:pPr marL="0" indent="0" algn="ctr">
               <a:lnSpc>
                 <a:spcPct val="105000"/>
               </a:lnSpc>
@@ -6761,6 +11205,13 @@
             <a:prstDash val="solid"/>
           </a:ln>
         </p:spPr>
+        <p:txBody>
+          <a:bodyPr/>
+          <a:lstStyle/>
+          <a:p>
+            <a:endParaRPr lang="ja-JP" altLang="en-US"/>
+          </a:p>
+        </p:txBody>
       </p:sp>
       <p:sp>
         <p:nvSpPr>
@@ -6783,7 +11234,7 @@
           <a:bodyPr wrap="square" lIns="0" tIns="0" rIns="0" bIns="0" rtlCol="0" anchor="ctr"/>
           <a:lstStyle/>
           <a:p>
-            <a:pPr indent="0" marL="0">
+            <a:pPr marL="0" indent="0">
               <a:buNone/>
             </a:pPr>
             <a:r>
@@ -6817,6 +11268,7 @@
         <a:solidFill>
           <a:srgbClr val="F4F6F9"/>
         </a:solidFill>
+        <a:effectLst/>
       </p:bgPr>
     </p:bg>
     <p:spTree>
@@ -6854,6 +11306,13 @@
           </a:solidFill>
           <a:ln/>
         </p:spPr>
+        <p:txBody>
+          <a:bodyPr/>
+          <a:lstStyle/>
+          <a:p>
+            <a:endParaRPr lang="ja-JP" altLang="en-US"/>
+          </a:p>
+        </p:txBody>
       </p:sp>
       <p:sp>
         <p:nvSpPr>
@@ -6876,7 +11335,7 @@
           <a:bodyPr wrap="square" lIns="0" tIns="0" rIns="0" bIns="0" rtlCol="0" anchor="ctr"/>
           <a:lstStyle/>
           <a:p>
-            <a:pPr algn="ctr" indent="0" marL="0">
+            <a:pPr marL="0" indent="0" algn="ctr">
               <a:buNone/>
             </a:pPr>
             <a:r>
@@ -6915,7 +11374,7 @@
           <a:bodyPr wrap="square" lIns="0" tIns="0" rIns="0" bIns="0" rtlCol="0" anchor="ctr"/>
           <a:lstStyle/>
           <a:p>
-            <a:pPr indent="0" marL="0">
+            <a:pPr marL="0" indent="0">
               <a:buNone/>
             </a:pPr>
             <a:r>
@@ -6954,7 +11413,7 @@
           <a:bodyPr wrap="square" lIns="0" tIns="0" rIns="0" bIns="0" rtlCol="0" anchor="ctr"/>
           <a:lstStyle/>
           <a:p>
-            <a:pPr indent="0" marL="0">
+            <a:pPr marL="0" indent="0">
               <a:buNone/>
             </a:pPr>
             <a:r>
@@ -6998,13 +11457,20 @@
             <a:prstDash val="solid"/>
           </a:ln>
           <a:effectLst>
-            <a:outerShdw sx="100000" sy="100000" kx="0" ky="0" algn="bl" rotWithShape="0" blurRad="114300" dist="38100" dir="5400000">
+            <a:outerShdw blurRad="114300" dist="38100" dir="5400000" algn="bl" rotWithShape="0">
               <a:srgbClr val="9AA6B8">
                 <a:alpha val="32000"/>
               </a:srgbClr>
             </a:outerShdw>
           </a:effectLst>
         </p:spPr>
+        <p:txBody>
+          <a:bodyPr/>
+          <a:lstStyle/>
+          <a:p>
+            <a:endParaRPr lang="ja-JP" altLang="en-US"/>
+          </a:p>
+        </p:txBody>
       </p:sp>
       <p:sp>
         <p:nvSpPr>
@@ -7025,6 +11491,13 @@
           </a:solidFill>
           <a:ln/>
         </p:spPr>
+        <p:txBody>
+          <a:bodyPr/>
+          <a:lstStyle/>
+          <a:p>
+            <a:endParaRPr lang="ja-JP" altLang="en-US"/>
+          </a:p>
+        </p:txBody>
       </p:sp>
       <p:sp>
         <p:nvSpPr>
@@ -7047,7 +11520,7 @@
           <a:bodyPr wrap="square" lIns="0" tIns="0" rIns="0" bIns="0" rtlCol="0" anchor="ctr"/>
           <a:lstStyle/>
           <a:p>
-            <a:pPr algn="ctr" indent="0" marL="0">
+            <a:pPr marL="0" indent="0" algn="ctr">
               <a:buNone/>
             </a:pPr>
             <a:r>
@@ -7086,7 +11559,7 @@
           <a:bodyPr wrap="square" lIns="0" tIns="0" rIns="0" bIns="0" rtlCol="0" anchor="t"/>
           <a:lstStyle/>
           <a:p>
-            <a:pPr indent="0" marL="0">
+            <a:pPr marL="0" indent="0">
               <a:buNone/>
             </a:pPr>
             <a:r>
@@ -7125,7 +11598,7 @@
           <a:bodyPr wrap="square" lIns="0" tIns="0" rIns="0" bIns="0" rtlCol="0" anchor="t"/>
           <a:lstStyle/>
           <a:p>
-            <a:pPr indent="0" marL="0">
+            <a:pPr marL="0" indent="0">
               <a:lnSpc>
                 <a:spcPct val="102000"/>
               </a:lnSpc>
@@ -7172,13 +11645,20 @@
             <a:prstDash val="solid"/>
           </a:ln>
           <a:effectLst>
-            <a:outerShdw sx="100000" sy="100000" kx="0" ky="0" algn="bl" rotWithShape="0" blurRad="114300" dist="38100" dir="5400000">
+            <a:outerShdw blurRad="114300" dist="38100" dir="5400000" algn="bl" rotWithShape="0">
               <a:srgbClr val="9AA6B8">
                 <a:alpha val="32000"/>
               </a:srgbClr>
             </a:outerShdw>
           </a:effectLst>
         </p:spPr>
+        <p:txBody>
+          <a:bodyPr/>
+          <a:lstStyle/>
+          <a:p>
+            <a:endParaRPr lang="ja-JP" altLang="en-US"/>
+          </a:p>
+        </p:txBody>
       </p:sp>
       <p:sp>
         <p:nvSpPr>
@@ -7199,6 +11679,13 @@
           </a:solidFill>
           <a:ln/>
         </p:spPr>
+        <p:txBody>
+          <a:bodyPr/>
+          <a:lstStyle/>
+          <a:p>
+            <a:endParaRPr lang="ja-JP" altLang="en-US"/>
+          </a:p>
+        </p:txBody>
       </p:sp>
       <p:sp>
         <p:nvSpPr>
@@ -7221,7 +11708,7 @@
           <a:bodyPr wrap="square" lIns="0" tIns="0" rIns="0" bIns="0" rtlCol="0" anchor="ctr"/>
           <a:lstStyle/>
           <a:p>
-            <a:pPr algn="ctr" indent="0" marL="0">
+            <a:pPr marL="0" indent="0" algn="ctr">
               <a:buNone/>
             </a:pPr>
             <a:r>
@@ -7260,7 +11747,7 @@
           <a:bodyPr wrap="square" lIns="0" tIns="0" rIns="0" bIns="0" rtlCol="0" anchor="t"/>
           <a:lstStyle/>
           <a:p>
-            <a:pPr indent="0" marL="0">
+            <a:pPr marL="0" indent="0">
               <a:buNone/>
             </a:pPr>
             <a:r>
@@ -7299,7 +11786,7 @@
           <a:bodyPr wrap="square" lIns="0" tIns="0" rIns="0" bIns="0" rtlCol="0" anchor="t"/>
           <a:lstStyle/>
           <a:p>
-            <a:pPr indent="0" marL="0">
+            <a:pPr marL="0" indent="0">
               <a:lnSpc>
                 <a:spcPct val="102000"/>
               </a:lnSpc>
@@ -7346,13 +11833,20 @@
             <a:prstDash val="solid"/>
           </a:ln>
           <a:effectLst>
-            <a:outerShdw sx="100000" sy="100000" kx="0" ky="0" algn="bl" rotWithShape="0" blurRad="114300" dist="38100" dir="5400000">
+            <a:outerShdw blurRad="114300" dist="38100" dir="5400000" algn="bl" rotWithShape="0">
               <a:srgbClr val="9AA6B8">
                 <a:alpha val="32000"/>
               </a:srgbClr>
             </a:outerShdw>
           </a:effectLst>
         </p:spPr>
+        <p:txBody>
+          <a:bodyPr/>
+          <a:lstStyle/>
+          <a:p>
+            <a:endParaRPr lang="ja-JP" altLang="en-US"/>
+          </a:p>
+        </p:txBody>
       </p:sp>
       <p:sp>
         <p:nvSpPr>
@@ -7373,6 +11867,13 @@
           </a:solidFill>
           <a:ln/>
         </p:spPr>
+        <p:txBody>
+          <a:bodyPr/>
+          <a:lstStyle/>
+          <a:p>
+            <a:endParaRPr lang="ja-JP" altLang="en-US"/>
+          </a:p>
+        </p:txBody>
       </p:sp>
       <p:sp>
         <p:nvSpPr>
@@ -7395,7 +11896,7 @@
           <a:bodyPr wrap="square" lIns="0" tIns="0" rIns="0" bIns="0" rtlCol="0" anchor="ctr"/>
           <a:lstStyle/>
           <a:p>
-            <a:pPr algn="ctr" indent="0" marL="0">
+            <a:pPr marL="0" indent="0" algn="ctr">
               <a:buNone/>
             </a:pPr>
             <a:r>
@@ -7434,7 +11935,7 @@
           <a:bodyPr wrap="square" lIns="0" tIns="0" rIns="0" bIns="0" rtlCol="0" anchor="t"/>
           <a:lstStyle/>
           <a:p>
-            <a:pPr indent="0" marL="0">
+            <a:pPr marL="0" indent="0">
               <a:buNone/>
             </a:pPr>
             <a:r>
@@ -7473,7 +11974,7 @@
           <a:bodyPr wrap="square" lIns="0" tIns="0" rIns="0" bIns="0" rtlCol="0" anchor="t"/>
           <a:lstStyle/>
           <a:p>
-            <a:pPr indent="0" marL="0">
+            <a:pPr marL="0" indent="0">
               <a:lnSpc>
                 <a:spcPct val="102000"/>
               </a:lnSpc>
@@ -7520,13 +12021,20 @@
             <a:prstDash val="solid"/>
           </a:ln>
           <a:effectLst>
-            <a:outerShdw sx="100000" sy="100000" kx="0" ky="0" algn="bl" rotWithShape="0" blurRad="114300" dist="38100" dir="5400000">
+            <a:outerShdw blurRad="114300" dist="38100" dir="5400000" algn="bl" rotWithShape="0">
               <a:srgbClr val="9AA6B8">
                 <a:alpha val="32000"/>
               </a:srgbClr>
             </a:outerShdw>
           </a:effectLst>
         </p:spPr>
+        <p:txBody>
+          <a:bodyPr/>
+          <a:lstStyle/>
+          <a:p>
+            <a:endParaRPr lang="ja-JP" altLang="en-US"/>
+          </a:p>
+        </p:txBody>
       </p:sp>
       <p:sp>
         <p:nvSpPr>
@@ -7547,6 +12055,13 @@
           </a:solidFill>
           <a:ln/>
         </p:spPr>
+        <p:txBody>
+          <a:bodyPr/>
+          <a:lstStyle/>
+          <a:p>
+            <a:endParaRPr lang="ja-JP" altLang="en-US"/>
+          </a:p>
+        </p:txBody>
       </p:sp>
       <p:sp>
         <p:nvSpPr>
@@ -7569,7 +12084,7 @@
           <a:bodyPr wrap="square" lIns="0" tIns="0" rIns="0" bIns="0" rtlCol="0" anchor="ctr"/>
           <a:lstStyle/>
           <a:p>
-            <a:pPr algn="ctr" indent="0" marL="0">
+            <a:pPr marL="0" indent="0" algn="ctr">
               <a:buNone/>
             </a:pPr>
             <a:r>
@@ -7608,7 +12123,7 @@
           <a:bodyPr wrap="square" lIns="0" tIns="0" rIns="0" bIns="0" rtlCol="0" anchor="t"/>
           <a:lstStyle/>
           <a:p>
-            <a:pPr indent="0" marL="0">
+            <a:pPr marL="0" indent="0">
               <a:buNone/>
             </a:pPr>
             <a:r>
@@ -7647,7 +12162,7 @@
           <a:bodyPr wrap="square" lIns="0" tIns="0" rIns="0" bIns="0" rtlCol="0" anchor="t"/>
           <a:lstStyle/>
           <a:p>
-            <a:pPr indent="0" marL="0">
+            <a:pPr marL="0" indent="0">
               <a:lnSpc>
                 <a:spcPct val="102000"/>
               </a:lnSpc>
@@ -7689,7 +12204,7 @@
           <a:bodyPr wrap="square" lIns="0" tIns="0" rIns="0" bIns="0" rtlCol="0" anchor="ctr"/>
           <a:lstStyle/>
           <a:p>
-            <a:pPr indent="0" marL="0">
+            <a:pPr marL="0" indent="0">
               <a:buNone/>
             </a:pPr>
             <a:r>
@@ -7728,6 +12243,13 @@
           </a:solidFill>
           <a:ln/>
         </p:spPr>
+        <p:txBody>
+          <a:bodyPr/>
+          <a:lstStyle/>
+          <a:p>
+            <a:endParaRPr lang="ja-JP" altLang="en-US"/>
+          </a:p>
+        </p:txBody>
       </p:sp>
       <p:sp>
         <p:nvSpPr>
@@ -7750,7 +12272,7 @@
           <a:bodyPr wrap="square" lIns="0" tIns="0" rIns="0" bIns="0" rtlCol="0" anchor="ctr"/>
           <a:lstStyle/>
           <a:p>
-            <a:pPr algn="ctr" indent="0" marL="0">
+            <a:pPr marL="0" indent="0" algn="ctr">
               <a:buNone/>
             </a:pPr>
             <a:r>
@@ -7789,6 +12311,13 @@
           </a:solidFill>
           <a:ln/>
         </p:spPr>
+        <p:txBody>
+          <a:bodyPr/>
+          <a:lstStyle/>
+          <a:p>
+            <a:endParaRPr lang="ja-JP" altLang="en-US"/>
+          </a:p>
+        </p:txBody>
       </p:sp>
       <p:sp>
         <p:nvSpPr>
@@ -7811,7 +12340,7 @@
           <a:bodyPr wrap="square" lIns="0" tIns="0" rIns="0" bIns="0" rtlCol="0" anchor="ctr"/>
           <a:lstStyle/>
           <a:p>
-            <a:pPr algn="ctr" indent="0" marL="0">
+            <a:pPr marL="0" indent="0" algn="ctr">
               <a:buNone/>
             </a:pPr>
             <a:r>
@@ -7850,6 +12379,13 @@
           </a:solidFill>
           <a:ln/>
         </p:spPr>
+        <p:txBody>
+          <a:bodyPr/>
+          <a:lstStyle/>
+          <a:p>
+            <a:endParaRPr lang="ja-JP" altLang="en-US"/>
+          </a:p>
+        </p:txBody>
       </p:sp>
       <p:sp>
         <p:nvSpPr>
@@ -7872,7 +12408,7 @@
           <a:bodyPr wrap="square" lIns="0" tIns="0" rIns="0" bIns="0" rtlCol="0" anchor="ctr"/>
           <a:lstStyle/>
           <a:p>
-            <a:pPr algn="ctr" indent="0" marL="0">
+            <a:pPr marL="0" indent="0" algn="ctr">
               <a:buNone/>
             </a:pPr>
             <a:r>
@@ -7916,6 +12452,13 @@
             <a:prstDash val="solid"/>
           </a:ln>
         </p:spPr>
+        <p:txBody>
+          <a:bodyPr/>
+          <a:lstStyle/>
+          <a:p>
+            <a:endParaRPr lang="ja-JP" altLang="en-US"/>
+          </a:p>
+        </p:txBody>
       </p:sp>
       <p:sp>
         <p:nvSpPr>
@@ -7938,7 +12481,7 @@
           <a:bodyPr wrap="square" lIns="0" tIns="0" rIns="0" bIns="0" rtlCol="0" anchor="ctr"/>
           <a:lstStyle/>
           <a:p>
-            <a:pPr indent="0" marL="0">
+            <a:pPr marL="0" indent="0">
               <a:buNone/>
             </a:pPr>
             <a:r>
@@ -7972,6 +12515,7 @@
         <a:solidFill>
           <a:srgbClr val="F4F6F9"/>
         </a:solidFill>
+        <a:effectLst/>
       </p:bgPr>
     </p:bg>
     <p:spTree>
@@ -8009,6 +12553,13 @@
           </a:solidFill>
           <a:ln/>
         </p:spPr>
+        <p:txBody>
+          <a:bodyPr/>
+          <a:lstStyle/>
+          <a:p>
+            <a:endParaRPr lang="ja-JP" altLang="en-US"/>
+          </a:p>
+        </p:txBody>
       </p:sp>
       <p:sp>
         <p:nvSpPr>
@@ -8031,7 +12582,7 @@
           <a:bodyPr wrap="square" lIns="0" tIns="0" rIns="0" bIns="0" rtlCol="0" anchor="ctr"/>
           <a:lstStyle/>
           <a:p>
-            <a:pPr algn="ctr" indent="0" marL="0">
+            <a:pPr marL="0" indent="0" algn="ctr">
               <a:buNone/>
             </a:pPr>
             <a:r>
@@ -8070,7 +12621,7 @@
           <a:bodyPr wrap="square" lIns="0" tIns="0" rIns="0" bIns="0" rtlCol="0" anchor="ctr"/>
           <a:lstStyle/>
           <a:p>
-            <a:pPr indent="0" marL="0">
+            <a:pPr marL="0" indent="0">
               <a:buNone/>
             </a:pPr>
             <a:r>
@@ -8109,7 +12660,7 @@
           <a:bodyPr wrap="square" lIns="0" tIns="0" rIns="0" bIns="0" rtlCol="0" anchor="ctr"/>
           <a:lstStyle/>
           <a:p>
-            <a:pPr indent="0" marL="0">
+            <a:pPr marL="0" indent="0">
               <a:buNone/>
             </a:pPr>
             <a:r>
@@ -8153,13 +12704,20 @@
             <a:prstDash val="solid"/>
           </a:ln>
           <a:effectLst>
-            <a:outerShdw sx="100000" sy="100000" kx="0" ky="0" algn="bl" rotWithShape="0" blurRad="114300" dist="38100" dir="5400000">
+            <a:outerShdw blurRad="114300" dist="38100" dir="5400000" algn="bl" rotWithShape="0">
               <a:srgbClr val="9AA6B8">
                 <a:alpha val="32000"/>
               </a:srgbClr>
             </a:outerShdw>
           </a:effectLst>
         </p:spPr>
+        <p:txBody>
+          <a:bodyPr/>
+          <a:lstStyle/>
+          <a:p>
+            <a:endParaRPr lang="ja-JP" altLang="en-US"/>
+          </a:p>
+        </p:txBody>
       </p:sp>
       <p:sp>
         <p:nvSpPr>
@@ -8180,6 +12738,13 @@
           </a:solidFill>
           <a:ln/>
         </p:spPr>
+        <p:txBody>
+          <a:bodyPr/>
+          <a:lstStyle/>
+          <a:p>
+            <a:endParaRPr lang="ja-JP" altLang="en-US"/>
+          </a:p>
+        </p:txBody>
       </p:sp>
       <p:sp>
         <p:nvSpPr>
@@ -8202,7 +12767,7 @@
           <a:bodyPr wrap="square" lIns="0" tIns="0" rIns="0" bIns="0" rtlCol="0" anchor="ctr"/>
           <a:lstStyle/>
           <a:p>
-            <a:pPr algn="ctr" indent="0" marL="0">
+            <a:pPr marL="0" indent="0" algn="ctr">
               <a:buNone/>
             </a:pPr>
             <a:r>
@@ -8241,7 +12806,7 @@
           <a:bodyPr wrap="square" lIns="0" tIns="0" rIns="0" bIns="0" rtlCol="0" anchor="t"/>
           <a:lstStyle/>
           <a:p>
-            <a:pPr indent="0" marL="0">
+            <a:pPr marL="0" indent="0">
               <a:buNone/>
             </a:pPr>
             <a:r>
@@ -8280,7 +12845,7 @@
           <a:bodyPr wrap="square" lIns="0" tIns="0" rIns="0" bIns="0" rtlCol="0" anchor="t"/>
           <a:lstStyle/>
           <a:p>
-            <a:pPr indent="0" marL="0">
+            <a:pPr marL="0" indent="0">
               <a:lnSpc>
                 <a:spcPct val="102000"/>
               </a:lnSpc>
@@ -8327,13 +12892,20 @@
             <a:prstDash val="solid"/>
           </a:ln>
           <a:effectLst>
-            <a:outerShdw sx="100000" sy="100000" kx="0" ky="0" algn="bl" rotWithShape="0" blurRad="114300" dist="38100" dir="5400000">
+            <a:outerShdw blurRad="114300" dist="38100" dir="5400000" algn="bl" rotWithShape="0">
               <a:srgbClr val="9AA6B8">
                 <a:alpha val="32000"/>
               </a:srgbClr>
             </a:outerShdw>
           </a:effectLst>
         </p:spPr>
+        <p:txBody>
+          <a:bodyPr/>
+          <a:lstStyle/>
+          <a:p>
+            <a:endParaRPr lang="ja-JP" altLang="en-US"/>
+          </a:p>
+        </p:txBody>
       </p:sp>
       <p:sp>
         <p:nvSpPr>
@@ -8354,6 +12926,13 @@
           </a:solidFill>
           <a:ln/>
         </p:spPr>
+        <p:txBody>
+          <a:bodyPr/>
+          <a:lstStyle/>
+          <a:p>
+            <a:endParaRPr lang="ja-JP" altLang="en-US"/>
+          </a:p>
+        </p:txBody>
       </p:sp>
       <p:sp>
         <p:nvSpPr>
@@ -8376,7 +12955,7 @@
           <a:bodyPr wrap="square" lIns="0" tIns="0" rIns="0" bIns="0" rtlCol="0" anchor="ctr"/>
           <a:lstStyle/>
           <a:p>
-            <a:pPr algn="ctr" indent="0" marL="0">
+            <a:pPr marL="0" indent="0" algn="ctr">
               <a:buNone/>
             </a:pPr>
             <a:r>
@@ -8415,7 +12994,7 @@
           <a:bodyPr wrap="square" lIns="0" tIns="0" rIns="0" bIns="0" rtlCol="0" anchor="t"/>
           <a:lstStyle/>
           <a:p>
-            <a:pPr indent="0" marL="0">
+            <a:pPr marL="0" indent="0">
               <a:buNone/>
             </a:pPr>
             <a:r>
@@ -8454,7 +13033,7 @@
           <a:bodyPr wrap="square" lIns="0" tIns="0" rIns="0" bIns="0" rtlCol="0" anchor="t"/>
           <a:lstStyle/>
           <a:p>
-            <a:pPr indent="0" marL="0">
+            <a:pPr marL="0" indent="0">
               <a:lnSpc>
                 <a:spcPct val="102000"/>
               </a:lnSpc>
@@ -8501,13 +13080,20 @@
             <a:prstDash val="solid"/>
           </a:ln>
           <a:effectLst>
-            <a:outerShdw sx="100000" sy="100000" kx="0" ky="0" algn="bl" rotWithShape="0" blurRad="114300" dist="38100" dir="5400000">
+            <a:outerShdw blurRad="114300" dist="38100" dir="5400000" algn="bl" rotWithShape="0">
               <a:srgbClr val="9AA6B8">
                 <a:alpha val="32000"/>
               </a:srgbClr>
             </a:outerShdw>
           </a:effectLst>
         </p:spPr>
+        <p:txBody>
+          <a:bodyPr/>
+          <a:lstStyle/>
+          <a:p>
+            <a:endParaRPr lang="ja-JP" altLang="en-US"/>
+          </a:p>
+        </p:txBody>
       </p:sp>
       <p:sp>
         <p:nvSpPr>
@@ -8528,6 +13114,13 @@
           </a:solidFill>
           <a:ln/>
         </p:spPr>
+        <p:txBody>
+          <a:bodyPr/>
+          <a:lstStyle/>
+          <a:p>
+            <a:endParaRPr lang="ja-JP" altLang="en-US"/>
+          </a:p>
+        </p:txBody>
       </p:sp>
       <p:sp>
         <p:nvSpPr>
@@ -8550,7 +13143,7 @@
           <a:bodyPr wrap="square" lIns="0" tIns="0" rIns="0" bIns="0" rtlCol="0" anchor="ctr"/>
           <a:lstStyle/>
           <a:p>
-            <a:pPr algn="ctr" indent="0" marL="0">
+            <a:pPr marL="0" indent="0" algn="ctr">
               <a:buNone/>
             </a:pPr>
             <a:r>
@@ -8589,7 +13182,7 @@
           <a:bodyPr wrap="square" lIns="0" tIns="0" rIns="0" bIns="0" rtlCol="0" anchor="t"/>
           <a:lstStyle/>
           <a:p>
-            <a:pPr indent="0" marL="0">
+            <a:pPr marL="0" indent="0">
               <a:buNone/>
             </a:pPr>
             <a:r>
@@ -8628,7 +13221,7 @@
           <a:bodyPr wrap="square" lIns="0" tIns="0" rIns="0" bIns="0" rtlCol="0" anchor="t"/>
           <a:lstStyle/>
           <a:p>
-            <a:pPr indent="0" marL="0">
+            <a:pPr marL="0" indent="0">
               <a:lnSpc>
                 <a:spcPct val="102000"/>
               </a:lnSpc>
@@ -8675,13 +13268,20 @@
             <a:prstDash val="solid"/>
           </a:ln>
           <a:effectLst>
-            <a:outerShdw sx="100000" sy="100000" kx="0" ky="0" algn="bl" rotWithShape="0" blurRad="114300" dist="38100" dir="5400000">
+            <a:outerShdw blurRad="114300" dist="38100" dir="5400000" algn="bl" rotWithShape="0">
               <a:srgbClr val="9AA6B8">
                 <a:alpha val="32000"/>
               </a:srgbClr>
             </a:outerShdw>
           </a:effectLst>
         </p:spPr>
+        <p:txBody>
+          <a:bodyPr/>
+          <a:lstStyle/>
+          <a:p>
+            <a:endParaRPr lang="ja-JP" altLang="en-US"/>
+          </a:p>
+        </p:txBody>
       </p:sp>
       <p:sp>
         <p:nvSpPr>
@@ -8702,6 +13302,13 @@
           </a:solidFill>
           <a:ln/>
         </p:spPr>
+        <p:txBody>
+          <a:bodyPr/>
+          <a:lstStyle/>
+          <a:p>
+            <a:endParaRPr lang="ja-JP" altLang="en-US"/>
+          </a:p>
+        </p:txBody>
       </p:sp>
       <p:sp>
         <p:nvSpPr>
@@ -8724,7 +13331,7 @@
           <a:bodyPr wrap="square" lIns="0" tIns="0" rIns="0" bIns="0" rtlCol="0" anchor="ctr"/>
           <a:lstStyle/>
           <a:p>
-            <a:pPr algn="ctr" indent="0" marL="0">
+            <a:pPr marL="0" indent="0" algn="ctr">
               <a:buNone/>
             </a:pPr>
             <a:r>
@@ -8763,7 +13370,7 @@
           <a:bodyPr wrap="square" lIns="0" tIns="0" rIns="0" bIns="0" rtlCol="0" anchor="t"/>
           <a:lstStyle/>
           <a:p>
-            <a:pPr indent="0" marL="0">
+            <a:pPr marL="0" indent="0">
               <a:buNone/>
             </a:pPr>
             <a:r>
@@ -8802,7 +13409,7 @@
           <a:bodyPr wrap="square" lIns="0" tIns="0" rIns="0" bIns="0" rtlCol="0" anchor="t"/>
           <a:lstStyle/>
           <a:p>
-            <a:pPr indent="0" marL="0">
+            <a:pPr marL="0" indent="0">
               <a:lnSpc>
                 <a:spcPct val="102000"/>
               </a:lnSpc>
@@ -8844,6 +13451,13 @@
           </a:solidFill>
           <a:ln/>
         </p:spPr>
+        <p:txBody>
+          <a:bodyPr/>
+          <a:lstStyle/>
+          <a:p>
+            <a:endParaRPr lang="ja-JP" altLang="en-US"/>
+          </a:p>
+        </p:txBody>
       </p:sp>
       <p:sp>
         <p:nvSpPr>
@@ -8866,7 +13480,7 @@
           <a:bodyPr wrap="square" lIns="0" tIns="0" rIns="0" bIns="0" rtlCol="0" anchor="ctr"/>
           <a:lstStyle/>
           <a:p>
-            <a:pPr algn="ctr" indent="0" marL="0">
+            <a:pPr marL="0" indent="0" algn="ctr">
               <a:buNone/>
             </a:pPr>
             <a:r>
@@ -8905,7 +13519,7 @@
           <a:bodyPr wrap="square" lIns="0" tIns="0" rIns="0" bIns="0" rtlCol="0" anchor="ctr"/>
           <a:lstStyle/>
           <a:p>
-            <a:pPr algn="ctr" indent="0" marL="0">
+            <a:pPr marL="0" indent="0" algn="ctr">
               <a:buNone/>
             </a:pPr>
             <a:r>
@@ -8944,6 +13558,13 @@
           </a:solidFill>
           <a:ln/>
         </p:spPr>
+        <p:txBody>
+          <a:bodyPr/>
+          <a:lstStyle/>
+          <a:p>
+            <a:endParaRPr lang="ja-JP" altLang="en-US"/>
+          </a:p>
+        </p:txBody>
       </p:sp>
       <p:sp>
         <p:nvSpPr>
@@ -8966,7 +13587,7 @@
           <a:bodyPr wrap="square" lIns="0" tIns="0" rIns="0" bIns="0" rtlCol="0" anchor="ctr"/>
           <a:lstStyle/>
           <a:p>
-            <a:pPr algn="ctr" indent="0" marL="0">
+            <a:pPr marL="0" indent="0" algn="ctr">
               <a:buNone/>
             </a:pPr>
             <a:r>
@@ -9005,7 +13626,7 @@
           <a:bodyPr wrap="square" lIns="0" tIns="0" rIns="0" bIns="0" rtlCol="0" anchor="ctr"/>
           <a:lstStyle/>
           <a:p>
-            <a:pPr algn="ctr" indent="0" marL="0">
+            <a:pPr marL="0" indent="0" algn="ctr">
               <a:buNone/>
             </a:pPr>
             <a:r>
@@ -9044,6 +13665,13 @@
           </a:solidFill>
           <a:ln/>
         </p:spPr>
+        <p:txBody>
+          <a:bodyPr/>
+          <a:lstStyle/>
+          <a:p>
+            <a:endParaRPr lang="ja-JP" altLang="en-US"/>
+          </a:p>
+        </p:txBody>
       </p:sp>
       <p:sp>
         <p:nvSpPr>
@@ -9066,7 +13694,7 @@
           <a:bodyPr wrap="square" lIns="0" tIns="0" rIns="0" bIns="0" rtlCol="0" anchor="ctr"/>
           <a:lstStyle/>
           <a:p>
-            <a:pPr algn="ctr" indent="0" marL="0">
+            <a:pPr marL="0" indent="0" algn="ctr">
               <a:buNone/>
             </a:pPr>
             <a:r>
@@ -9105,7 +13733,7 @@
           <a:bodyPr wrap="square" lIns="0" tIns="0" rIns="0" bIns="0" rtlCol="0" anchor="ctr"/>
           <a:lstStyle/>
           <a:p>
-            <a:pPr algn="ctr" indent="0" marL="0">
+            <a:pPr marL="0" indent="0" algn="ctr">
               <a:buNone/>
             </a:pPr>
             <a:r>
@@ -9144,6 +13772,13 @@
           </a:solidFill>
           <a:ln/>
         </p:spPr>
+        <p:txBody>
+          <a:bodyPr/>
+          <a:lstStyle/>
+          <a:p>
+            <a:endParaRPr lang="ja-JP" altLang="en-US"/>
+          </a:p>
+        </p:txBody>
       </p:sp>
       <p:sp>
         <p:nvSpPr>
@@ -9166,7 +13801,7 @@
           <a:bodyPr wrap="square" lIns="0" tIns="0" rIns="0" bIns="0" rtlCol="0" anchor="ctr"/>
           <a:lstStyle/>
           <a:p>
-            <a:pPr algn="ctr" indent="0" marL="0">
+            <a:pPr marL="0" indent="0" algn="ctr">
               <a:buNone/>
             </a:pPr>
             <a:r>
@@ -9205,7 +13840,7 @@
           <a:bodyPr wrap="square" lIns="0" tIns="0" rIns="0" bIns="0" rtlCol="0" anchor="ctr"/>
           <a:lstStyle/>
           <a:p>
-            <a:pPr algn="ctr" indent="0" marL="0">
+            <a:pPr marL="0" indent="0" algn="ctr">
               <a:buNone/>
             </a:pPr>
             <a:r>
@@ -9239,6 +13874,7 @@
         <a:solidFill>
           <a:srgbClr val="0E1524"/>
         </a:solidFill>
+        <a:effectLst/>
       </p:bgPr>
     </p:bg>
     <p:spTree>
@@ -9276,11 +13912,11 @@
           <a:bodyPr wrap="square" lIns="0" tIns="0" rIns="0" bIns="0" rtlCol="0" anchor="ctr"/>
           <a:lstStyle/>
           <a:p>
-            <a:pPr indent="0" marL="0">
-              <a:buNone/>
-            </a:pPr>
-            <a:r>
-              <a:rPr lang="en-US" sz="1200" b="1" spc="300" kern="0" dirty="0">
+            <a:pPr marL="0" indent="0">
+              <a:buNone/>
+            </a:pPr>
+            <a:r>
+              <a:rPr lang="en-US" sz="1200" b="1" kern="0" spc="300" dirty="0">
                 <a:solidFill>
                   <a:srgbClr val="2DD4BF"/>
                 </a:solidFill>
@@ -9315,7 +13951,7 @@
           <a:bodyPr wrap="square" lIns="0" tIns="0" rIns="0" bIns="0" rtlCol="0" anchor="ctr"/>
           <a:lstStyle/>
           <a:p>
-            <a:pPr indent="0" marL="0">
+            <a:pPr marL="0" indent="0">
               <a:buNone/>
             </a:pPr>
             <a:r>
@@ -9359,6 +13995,13 @@
             <a:prstDash val="solid"/>
           </a:ln>
         </p:spPr>
+        <p:txBody>
+          <a:bodyPr/>
+          <a:lstStyle/>
+          <a:p>
+            <a:endParaRPr lang="ja-JP" altLang="en-US"/>
+          </a:p>
+        </p:txBody>
       </p:sp>
       <p:sp>
         <p:nvSpPr>
@@ -9379,6 +14022,13 @@
           </a:solidFill>
           <a:ln/>
         </p:spPr>
+        <p:txBody>
+          <a:bodyPr/>
+          <a:lstStyle/>
+          <a:p>
+            <a:endParaRPr lang="ja-JP" altLang="en-US"/>
+          </a:p>
+        </p:txBody>
       </p:sp>
       <p:sp>
         <p:nvSpPr>
@@ -9401,7 +14051,7 @@
           <a:bodyPr wrap="square" lIns="0" tIns="0" rIns="0" bIns="0" rtlCol="0" anchor="ctr"/>
           <a:lstStyle/>
           <a:p>
-            <a:pPr algn="ctr" indent="0" marL="0">
+            <a:pPr marL="0" indent="0" algn="ctr">
               <a:buNone/>
             </a:pPr>
             <a:r>
@@ -9440,7 +14090,7 @@
           <a:bodyPr wrap="square" lIns="0" tIns="0" rIns="0" bIns="0" rtlCol="0" anchor="ctr"/>
           <a:lstStyle/>
           <a:p>
-            <a:pPr algn="ctr" indent="0" marL="0">
+            <a:pPr marL="0" indent="0" algn="ctr">
               <a:buNone/>
             </a:pPr>
             <a:r>
@@ -9479,7 +14129,7 @@
           <a:bodyPr wrap="square" lIns="0" tIns="0" rIns="0" bIns="0" rtlCol="0" anchor="ctr"/>
           <a:lstStyle/>
           <a:p>
-            <a:pPr algn="ctr" indent="0" marL="0">
+            <a:pPr marL="0" indent="0" algn="ctr">
               <a:lnSpc>
                 <a:spcPct val="102000"/>
               </a:lnSpc>
@@ -9521,7 +14171,7 @@
           <a:bodyPr wrap="square" lIns="0" tIns="0" rIns="0" bIns="0" rtlCol="0" anchor="ctr"/>
           <a:lstStyle/>
           <a:p>
-            <a:pPr algn="ctr" indent="0" marL="0">
+            <a:pPr marL="0" indent="0" algn="ctr">
               <a:buNone/>
             </a:pPr>
             <a:r>
@@ -9565,6 +14215,13 @@
             <a:prstDash val="solid"/>
           </a:ln>
         </p:spPr>
+        <p:txBody>
+          <a:bodyPr/>
+          <a:lstStyle/>
+          <a:p>
+            <a:endParaRPr lang="ja-JP" altLang="en-US"/>
+          </a:p>
+        </p:txBody>
       </p:sp>
       <p:sp>
         <p:nvSpPr>
@@ -9585,6 +14242,13 @@
           </a:solidFill>
           <a:ln/>
         </p:spPr>
+        <p:txBody>
+          <a:bodyPr/>
+          <a:lstStyle/>
+          <a:p>
+            <a:endParaRPr lang="ja-JP" altLang="en-US"/>
+          </a:p>
+        </p:txBody>
       </p:sp>
       <p:sp>
         <p:nvSpPr>
@@ -9607,7 +14271,7 @@
           <a:bodyPr wrap="square" lIns="0" tIns="0" rIns="0" bIns="0" rtlCol="0" anchor="ctr"/>
           <a:lstStyle/>
           <a:p>
-            <a:pPr algn="ctr" indent="0" marL="0">
+            <a:pPr marL="0" indent="0" algn="ctr">
               <a:buNone/>
             </a:pPr>
             <a:r>
@@ -9646,7 +14310,7 @@
           <a:bodyPr wrap="square" lIns="0" tIns="0" rIns="0" bIns="0" rtlCol="0" anchor="ctr"/>
           <a:lstStyle/>
           <a:p>
-            <a:pPr algn="ctr" indent="0" marL="0">
+            <a:pPr marL="0" indent="0" algn="ctr">
               <a:buNone/>
             </a:pPr>
             <a:r>
@@ -9685,7 +14349,7 @@
           <a:bodyPr wrap="square" lIns="0" tIns="0" rIns="0" bIns="0" rtlCol="0" anchor="ctr"/>
           <a:lstStyle/>
           <a:p>
-            <a:pPr algn="ctr" indent="0" marL="0">
+            <a:pPr marL="0" indent="0" algn="ctr">
               <a:lnSpc>
                 <a:spcPct val="102000"/>
               </a:lnSpc>
@@ -9727,7 +14391,7 @@
           <a:bodyPr wrap="square" lIns="0" tIns="0" rIns="0" bIns="0" rtlCol="0" anchor="ctr"/>
           <a:lstStyle/>
           <a:p>
-            <a:pPr algn="ctr" indent="0" marL="0">
+            <a:pPr marL="0" indent="0" algn="ctr">
               <a:buNone/>
             </a:pPr>
             <a:r>
@@ -9771,6 +14435,13 @@
             <a:prstDash val="solid"/>
           </a:ln>
         </p:spPr>
+        <p:txBody>
+          <a:bodyPr/>
+          <a:lstStyle/>
+          <a:p>
+            <a:endParaRPr lang="ja-JP" altLang="en-US"/>
+          </a:p>
+        </p:txBody>
       </p:sp>
       <p:sp>
         <p:nvSpPr>
@@ -9791,6 +14462,13 @@
           </a:solidFill>
           <a:ln/>
         </p:spPr>
+        <p:txBody>
+          <a:bodyPr/>
+          <a:lstStyle/>
+          <a:p>
+            <a:endParaRPr lang="ja-JP" altLang="en-US"/>
+          </a:p>
+        </p:txBody>
       </p:sp>
       <p:sp>
         <p:nvSpPr>
@@ -9813,7 +14491,7 @@
           <a:bodyPr wrap="square" lIns="0" tIns="0" rIns="0" bIns="0" rtlCol="0" anchor="ctr"/>
           <a:lstStyle/>
           <a:p>
-            <a:pPr algn="ctr" indent="0" marL="0">
+            <a:pPr marL="0" indent="0" algn="ctr">
               <a:buNone/>
             </a:pPr>
             <a:r>
@@ -9852,7 +14530,7 @@
           <a:bodyPr wrap="square" lIns="0" tIns="0" rIns="0" bIns="0" rtlCol="0" anchor="ctr"/>
           <a:lstStyle/>
           <a:p>
-            <a:pPr algn="ctr" indent="0" marL="0">
+            <a:pPr marL="0" indent="0" algn="ctr">
               <a:buNone/>
             </a:pPr>
             <a:r>
@@ -9891,7 +14569,7 @@
           <a:bodyPr wrap="square" lIns="0" tIns="0" rIns="0" bIns="0" rtlCol="0" anchor="ctr"/>
           <a:lstStyle/>
           <a:p>
-            <a:pPr algn="ctr" indent="0" marL="0">
+            <a:pPr marL="0" indent="0" algn="ctr">
               <a:lnSpc>
                 <a:spcPct val="102000"/>
               </a:lnSpc>
@@ -9933,7 +14611,7 @@
           <a:bodyPr wrap="square" lIns="0" tIns="0" rIns="0" bIns="0" rtlCol="0" anchor="ctr"/>
           <a:lstStyle/>
           <a:p>
-            <a:pPr algn="ctr" indent="0" marL="0">
+            <a:pPr marL="0" indent="0" algn="ctr">
               <a:buNone/>
             </a:pPr>
             <a:r>
@@ -9977,6 +14655,13 @@
             <a:prstDash val="solid"/>
           </a:ln>
         </p:spPr>
+        <p:txBody>
+          <a:bodyPr/>
+          <a:lstStyle/>
+          <a:p>
+            <a:endParaRPr lang="ja-JP" altLang="en-US"/>
+          </a:p>
+        </p:txBody>
       </p:sp>
       <p:sp>
         <p:nvSpPr>
@@ -9997,6 +14682,13 @@
           </a:solidFill>
           <a:ln/>
         </p:spPr>
+        <p:txBody>
+          <a:bodyPr/>
+          <a:lstStyle/>
+          <a:p>
+            <a:endParaRPr lang="ja-JP" altLang="en-US"/>
+          </a:p>
+        </p:txBody>
       </p:sp>
       <p:sp>
         <p:nvSpPr>
@@ -10019,7 +14711,7 @@
           <a:bodyPr wrap="square" lIns="0" tIns="0" rIns="0" bIns="0" rtlCol="0" anchor="ctr"/>
           <a:lstStyle/>
           <a:p>
-            <a:pPr algn="ctr" indent="0" marL="0">
+            <a:pPr marL="0" indent="0" algn="ctr">
               <a:buNone/>
             </a:pPr>
             <a:r>
@@ -10058,7 +14750,7 @@
           <a:bodyPr wrap="square" lIns="0" tIns="0" rIns="0" bIns="0" rtlCol="0" anchor="ctr"/>
           <a:lstStyle/>
           <a:p>
-            <a:pPr algn="ctr" indent="0" marL="0">
+            <a:pPr marL="0" indent="0" algn="ctr">
               <a:buNone/>
             </a:pPr>
             <a:r>
@@ -10097,7 +14789,7 @@
           <a:bodyPr wrap="square" lIns="0" tIns="0" rIns="0" bIns="0" rtlCol="0" anchor="ctr"/>
           <a:lstStyle/>
           <a:p>
-            <a:pPr algn="ctr" indent="0" marL="0">
+            <a:pPr marL="0" indent="0" algn="ctr">
               <a:lnSpc>
                 <a:spcPct val="102000"/>
               </a:lnSpc>
@@ -10144,6 +14836,13 @@
             <a:prstDash val="solid"/>
           </a:ln>
         </p:spPr>
+        <p:txBody>
+          <a:bodyPr/>
+          <a:lstStyle/>
+          <a:p>
+            <a:endParaRPr lang="ja-JP" altLang="en-US"/>
+          </a:p>
+        </p:txBody>
       </p:sp>
       <p:sp>
         <p:nvSpPr>
@@ -10166,7 +14865,7 @@
           <a:bodyPr wrap="square" lIns="0" tIns="0" rIns="0" bIns="0" rtlCol="0" anchor="ctr"/>
           <a:lstStyle/>
           <a:p>
-            <a:pPr indent="0" marL="0">
+            <a:pPr marL="0" indent="0">
               <a:buNone/>
             </a:pPr>
             <a:r>
@@ -10205,7 +14904,7 @@
           <a:bodyPr wrap="square" lIns="0" tIns="0" rIns="0" bIns="0" rtlCol="0" anchor="ctr"/>
           <a:lstStyle/>
           <a:p>
-            <a:pPr indent="0" marL="0">
+            <a:pPr marL="0" indent="0">
               <a:buNone/>
             </a:pPr>
             <a:r>
@@ -10239,6 +14938,7 @@
         <a:solidFill>
           <a:srgbClr val="F4F6F9"/>
         </a:solidFill>
+        <a:effectLst/>
       </p:bgPr>
     </p:bg>
     <p:spTree>
@@ -10276,11 +14976,11 @@
           <a:bodyPr wrap="square" lIns="0" tIns="0" rIns="0" bIns="0" rtlCol="0" anchor="ctr"/>
           <a:lstStyle/>
           <a:p>
-            <a:pPr indent="0" marL="0">
-              <a:buNone/>
-            </a:pPr>
-            <a:r>
-              <a:rPr lang="en-US" sz="1200" b="1" spc="300" kern="0" dirty="0">
+            <a:pPr marL="0" indent="0">
+              <a:buNone/>
+            </a:pPr>
+            <a:r>
+              <a:rPr lang="en-US" sz="1200" b="1" kern="0" spc="300" dirty="0">
                 <a:solidFill>
                   <a:srgbClr val="0F766E"/>
                 </a:solidFill>
@@ -10315,7 +15015,7 @@
           <a:bodyPr wrap="square" lIns="0" tIns="0" rIns="0" bIns="0" rtlCol="0" anchor="ctr"/>
           <a:lstStyle/>
           <a:p>
-            <a:pPr indent="0" marL="0">
+            <a:pPr marL="0" indent="0">
               <a:buNone/>
             </a:pPr>
             <a:r>
@@ -10359,13 +15059,20 @@
             <a:prstDash val="solid"/>
           </a:ln>
           <a:effectLst>
-            <a:outerShdw sx="100000" sy="100000" kx="0" ky="0" algn="bl" rotWithShape="0" blurRad="114300" dist="38100" dir="5400000">
+            <a:outerShdw blurRad="114300" dist="38100" dir="5400000" algn="bl" rotWithShape="0">
               <a:srgbClr val="9AA6B8">
                 <a:alpha val="32000"/>
               </a:srgbClr>
             </a:outerShdw>
           </a:effectLst>
         </p:spPr>
+        <p:txBody>
+          <a:bodyPr/>
+          <a:lstStyle/>
+          <a:p>
+            <a:endParaRPr lang="ja-JP" altLang="en-US"/>
+          </a:p>
+        </p:txBody>
       </p:sp>
       <p:sp>
         <p:nvSpPr>
@@ -10386,6 +15093,13 @@
           </a:solidFill>
           <a:ln/>
         </p:spPr>
+        <p:txBody>
+          <a:bodyPr/>
+          <a:lstStyle/>
+          <a:p>
+            <a:endParaRPr lang="ja-JP" altLang="en-US"/>
+          </a:p>
+        </p:txBody>
       </p:sp>
       <p:sp>
         <p:nvSpPr>
@@ -10408,7 +15122,7 @@
           <a:bodyPr wrap="square" lIns="0" tIns="0" rIns="0" bIns="0" rtlCol="0" anchor="ctr"/>
           <a:lstStyle/>
           <a:p>
-            <a:pPr algn="ctr" indent="0" marL="0">
+            <a:pPr marL="0" indent="0" algn="ctr">
               <a:buNone/>
             </a:pPr>
             <a:r>
@@ -10447,7 +15161,7 @@
           <a:bodyPr wrap="square" lIns="0" tIns="0" rIns="0" bIns="0" rtlCol="0" anchor="t"/>
           <a:lstStyle/>
           <a:p>
-            <a:pPr indent="0" marL="0">
+            <a:pPr marL="0" indent="0">
               <a:buNone/>
             </a:pPr>
             <a:r>
@@ -10486,7 +15200,7 @@
           <a:bodyPr wrap="square" lIns="0" tIns="0" rIns="0" bIns="0" rtlCol="0" anchor="t"/>
           <a:lstStyle/>
           <a:p>
-            <a:pPr indent="0" marL="0">
+            <a:pPr marL="0" indent="0">
               <a:lnSpc>
                 <a:spcPct val="102000"/>
               </a:lnSpc>
@@ -10533,13 +15247,20 @@
             <a:prstDash val="solid"/>
           </a:ln>
           <a:effectLst>
-            <a:outerShdw sx="100000" sy="100000" kx="0" ky="0" algn="bl" rotWithShape="0" blurRad="114300" dist="38100" dir="5400000">
+            <a:outerShdw blurRad="114300" dist="38100" dir="5400000" algn="bl" rotWithShape="0">
               <a:srgbClr val="9AA6B8">
                 <a:alpha val="32000"/>
               </a:srgbClr>
             </a:outerShdw>
           </a:effectLst>
         </p:spPr>
+        <p:txBody>
+          <a:bodyPr/>
+          <a:lstStyle/>
+          <a:p>
+            <a:endParaRPr lang="ja-JP" altLang="en-US"/>
+          </a:p>
+        </p:txBody>
       </p:sp>
       <p:sp>
         <p:nvSpPr>
@@ -10560,6 +15281,13 @@
           </a:solidFill>
           <a:ln/>
         </p:spPr>
+        <p:txBody>
+          <a:bodyPr/>
+          <a:lstStyle/>
+          <a:p>
+            <a:endParaRPr lang="ja-JP" altLang="en-US"/>
+          </a:p>
+        </p:txBody>
       </p:sp>
       <p:sp>
         <p:nvSpPr>
@@ -10582,7 +15310,7 @@
           <a:bodyPr wrap="square" lIns="0" tIns="0" rIns="0" bIns="0" rtlCol="0" anchor="ctr"/>
           <a:lstStyle/>
           <a:p>
-            <a:pPr algn="ctr" indent="0" marL="0">
+            <a:pPr marL="0" indent="0" algn="ctr">
               <a:buNone/>
             </a:pPr>
             <a:r>
@@ -10621,7 +15349,7 @@
           <a:bodyPr wrap="square" lIns="0" tIns="0" rIns="0" bIns="0" rtlCol="0" anchor="t"/>
           <a:lstStyle/>
           <a:p>
-            <a:pPr indent="0" marL="0">
+            <a:pPr marL="0" indent="0">
               <a:buNone/>
             </a:pPr>
             <a:r>
@@ -10660,7 +15388,7 @@
           <a:bodyPr wrap="square" lIns="0" tIns="0" rIns="0" bIns="0" rtlCol="0" anchor="t"/>
           <a:lstStyle/>
           <a:p>
-            <a:pPr indent="0" marL="0">
+            <a:pPr marL="0" indent="0">
               <a:lnSpc>
                 <a:spcPct val="102000"/>
               </a:lnSpc>
@@ -10707,13 +15435,20 @@
             <a:prstDash val="solid"/>
           </a:ln>
           <a:effectLst>
-            <a:outerShdw sx="100000" sy="100000" kx="0" ky="0" algn="bl" rotWithShape="0" blurRad="114300" dist="38100" dir="5400000">
+            <a:outerShdw blurRad="114300" dist="38100" dir="5400000" algn="bl" rotWithShape="0">
               <a:srgbClr val="9AA6B8">
                 <a:alpha val="32000"/>
               </a:srgbClr>
             </a:outerShdw>
           </a:effectLst>
         </p:spPr>
+        <p:txBody>
+          <a:bodyPr/>
+          <a:lstStyle/>
+          <a:p>
+            <a:endParaRPr lang="ja-JP" altLang="en-US"/>
+          </a:p>
+        </p:txBody>
       </p:sp>
       <p:sp>
         <p:nvSpPr>
@@ -10734,6 +15469,13 @@
           </a:solidFill>
           <a:ln/>
         </p:spPr>
+        <p:txBody>
+          <a:bodyPr/>
+          <a:lstStyle/>
+          <a:p>
+            <a:endParaRPr lang="ja-JP" altLang="en-US"/>
+          </a:p>
+        </p:txBody>
       </p:sp>
       <p:sp>
         <p:nvSpPr>
@@ -10756,7 +15498,7 @@
           <a:bodyPr wrap="square" lIns="0" tIns="0" rIns="0" bIns="0" rtlCol="0" anchor="ctr"/>
           <a:lstStyle/>
           <a:p>
-            <a:pPr algn="ctr" indent="0" marL="0">
+            <a:pPr marL="0" indent="0" algn="ctr">
               <a:buNone/>
             </a:pPr>
             <a:r>
@@ -10795,7 +15537,7 @@
           <a:bodyPr wrap="square" lIns="0" tIns="0" rIns="0" bIns="0" rtlCol="0" anchor="t"/>
           <a:lstStyle/>
           <a:p>
-            <a:pPr indent="0" marL="0">
+            <a:pPr marL="0" indent="0">
               <a:buNone/>
             </a:pPr>
             <a:r>
@@ -10834,7 +15576,7 @@
           <a:bodyPr wrap="square" lIns="0" tIns="0" rIns="0" bIns="0" rtlCol="0" anchor="t"/>
           <a:lstStyle/>
           <a:p>
-            <a:pPr indent="0" marL="0">
+            <a:pPr marL="0" indent="0">
               <a:lnSpc>
                 <a:spcPct val="102000"/>
               </a:lnSpc>
@@ -10881,13 +15623,20 @@
             <a:prstDash val="solid"/>
           </a:ln>
           <a:effectLst>
-            <a:outerShdw sx="100000" sy="100000" kx="0" ky="0" algn="bl" rotWithShape="0" blurRad="114300" dist="38100" dir="5400000">
+            <a:outerShdw blurRad="114300" dist="38100" dir="5400000" algn="bl" rotWithShape="0">
               <a:srgbClr val="9AA6B8">
                 <a:alpha val="32000"/>
               </a:srgbClr>
             </a:outerShdw>
           </a:effectLst>
         </p:spPr>
+        <p:txBody>
+          <a:bodyPr/>
+          <a:lstStyle/>
+          <a:p>
+            <a:endParaRPr lang="ja-JP" altLang="en-US"/>
+          </a:p>
+        </p:txBody>
       </p:sp>
       <p:sp>
         <p:nvSpPr>
@@ -10908,6 +15657,13 @@
           </a:solidFill>
           <a:ln/>
         </p:spPr>
+        <p:txBody>
+          <a:bodyPr/>
+          <a:lstStyle/>
+          <a:p>
+            <a:endParaRPr lang="ja-JP" altLang="en-US"/>
+          </a:p>
+        </p:txBody>
       </p:sp>
       <p:sp>
         <p:nvSpPr>
@@ -10930,7 +15686,7 @@
           <a:bodyPr wrap="square" lIns="0" tIns="0" rIns="0" bIns="0" rtlCol="0" anchor="ctr"/>
           <a:lstStyle/>
           <a:p>
-            <a:pPr algn="ctr" indent="0" marL="0">
+            <a:pPr marL="0" indent="0" algn="ctr">
               <a:buNone/>
             </a:pPr>
             <a:r>
@@ -10969,7 +15725,7 @@
           <a:bodyPr wrap="square" lIns="0" tIns="0" rIns="0" bIns="0" rtlCol="0" anchor="t"/>
           <a:lstStyle/>
           <a:p>
-            <a:pPr indent="0" marL="0">
+            <a:pPr marL="0" indent="0">
               <a:buNone/>
             </a:pPr>
             <a:r>
@@ -11008,7 +15764,7 @@
           <a:bodyPr wrap="square" lIns="0" tIns="0" rIns="0" bIns="0" rtlCol="0" anchor="t"/>
           <a:lstStyle/>
           <a:p>
-            <a:pPr indent="0" marL="0">
+            <a:pPr marL="0" indent="0">
               <a:lnSpc>
                 <a:spcPct val="102000"/>
               </a:lnSpc>
@@ -11050,7 +15806,7 @@
           <a:bodyPr wrap="square" lIns="0" tIns="0" rIns="0" bIns="0" rtlCol="0" anchor="ctr"/>
           <a:lstStyle/>
           <a:p>
-            <a:pPr indent="0" marL="0">
+            <a:pPr marL="0" indent="0">
               <a:buNone/>
             </a:pPr>
             <a:r>
@@ -11369,4 +16125,319 @@
     </a:ext>
   </a:extLst>
 </a:theme>
+</file>
+
+<file path=ppt/theme/theme2.xml><?xml version="1.0" encoding="utf-8"?>
+<a:theme xmlns:a="http://schemas.openxmlformats.org/drawingml/2006/main" name="Office テーマ">
+  <a:themeElements>
+    <a:clrScheme name="Office">
+      <a:dk1>
+        <a:sysClr val="windowText" lastClr="000000"/>
+      </a:dk1>
+      <a:lt1>
+        <a:sysClr val="window" lastClr="FFFFFF"/>
+      </a:lt1>
+      <a:dk2>
+        <a:srgbClr val="0E2841"/>
+      </a:dk2>
+      <a:lt2>
+        <a:srgbClr val="E8E8E8"/>
+      </a:lt2>
+      <a:accent1>
+        <a:srgbClr val="156082"/>
+      </a:accent1>
+      <a:accent2>
+        <a:srgbClr val="E97132"/>
+      </a:accent2>
+      <a:accent3>
+        <a:srgbClr val="196B24"/>
+      </a:accent3>
+      <a:accent4>
+        <a:srgbClr val="0F9ED5"/>
+      </a:accent4>
+      <a:accent5>
+        <a:srgbClr val="A02B93"/>
+      </a:accent5>
+      <a:accent6>
+        <a:srgbClr val="4EA72E"/>
+      </a:accent6>
+      <a:hlink>
+        <a:srgbClr val="467886"/>
+      </a:hlink>
+      <a:folHlink>
+        <a:srgbClr val="96607D"/>
+      </a:folHlink>
+    </a:clrScheme>
+    <a:fontScheme name="Office">
+      <a:majorFont>
+        <a:latin typeface="游ゴシック Light" panose="02110004020202020204"/>
+        <a:ea typeface=""/>
+        <a:cs typeface=""/>
+        <a:font script="Jpan" typeface="游ゴシック Light"/>
+        <a:font script="Hang" typeface="맑은 고딕"/>
+        <a:font script="Hans" typeface="等线 Light"/>
+        <a:font script="Hant" typeface="新細明體"/>
+        <a:font script="Arab" typeface="Times New Roman"/>
+        <a:font script="Hebr" typeface="Times New Roman"/>
+        <a:font script="Thai" typeface="Angsana New"/>
+        <a:font script="Ethi" typeface="Nyala"/>
+        <a:font script="Beng" typeface="Vrinda"/>
+        <a:font script="Gujr" typeface="Shruti"/>
+        <a:font script="Khmr" typeface="MoolBoran"/>
+        <a:font script="Knda" typeface="Tunga"/>
+        <a:font script="Guru" typeface="Raavi"/>
+        <a:font script="Cans" typeface="Euphemia"/>
+        <a:font script="Cher" typeface="Plantagenet Cherokee"/>
+        <a:font script="Yiii" typeface="Microsoft Yi Baiti"/>
+        <a:font script="Tibt" typeface="Microsoft Himalaya"/>
+        <a:font script="Thaa" typeface="MV Boli"/>
+        <a:font script="Deva" typeface="Mangal"/>
+        <a:font script="Telu" typeface="Gautami"/>
+        <a:font script="Taml" typeface="Latha"/>
+        <a:font script="Syrc" typeface="Estrangelo Edessa"/>
+        <a:font script="Orya" typeface="Kalinga"/>
+        <a:font script="Mlym" typeface="Kartika"/>
+        <a:font script="Laoo" typeface="DokChampa"/>
+        <a:font script="Sinh" typeface="Iskoola Pota"/>
+        <a:font script="Mong" typeface="Mongolian Baiti"/>
+        <a:font script="Viet" typeface="Times New Roman"/>
+        <a:font script="Uigh" typeface="Microsoft Uighur"/>
+        <a:font script="Geor" typeface="Sylfaen"/>
+        <a:font script="Armn" typeface="Arial"/>
+        <a:font script="Bugi" typeface="Leelawadee UI"/>
+        <a:font script="Bopo" typeface="Microsoft JhengHei"/>
+        <a:font script="Java" typeface="Javanese Text"/>
+        <a:font script="Lisu" typeface="Segoe UI"/>
+        <a:font script="Mymr" typeface="Myanmar Text"/>
+        <a:font script="Nkoo" typeface="Ebrima"/>
+        <a:font script="Olck" typeface="Nirmala UI"/>
+        <a:font script="Osma" typeface="Ebrima"/>
+        <a:font script="Phag" typeface="Phagspa"/>
+        <a:font script="Syrn" typeface="Estrangelo Edessa"/>
+        <a:font script="Syrj" typeface="Estrangelo Edessa"/>
+        <a:font script="Syre" typeface="Estrangelo Edessa"/>
+        <a:font script="Sora" typeface="Nirmala UI"/>
+        <a:font script="Tale" typeface="Microsoft Tai Le"/>
+        <a:font script="Talu" typeface="Microsoft New Tai Lue"/>
+        <a:font script="Tfng" typeface="Ebrima"/>
+      </a:majorFont>
+      <a:minorFont>
+        <a:latin typeface="游ゴシック" panose="02110004020202020204"/>
+        <a:ea typeface=""/>
+        <a:cs typeface=""/>
+        <a:font script="Jpan" typeface="游ゴシック"/>
+        <a:font script="Hang" typeface="맑은 고딕"/>
+        <a:font script="Hans" typeface="等线"/>
+        <a:font script="Hant" typeface="新細明體"/>
+        <a:font script="Arab" typeface="Arial"/>
+        <a:font script="Hebr" typeface="Arial"/>
+        <a:font script="Thai" typeface="Cordia New"/>
+        <a:font script="Ethi" typeface="Nyala"/>
+        <a:font script="Beng" typeface="Vrinda"/>
+        <a:font script="Gujr" typeface="Shruti"/>
+        <a:font script="Khmr" typeface="DaunPenh"/>
+        <a:font script="Knda" typeface="Tunga"/>
+        <a:font script="Guru" typeface="Raavi"/>
+        <a:font script="Cans" typeface="Euphemia"/>
+        <a:font script="Cher" typeface="Plantagenet Cherokee"/>
+        <a:font script="Yiii" typeface="Microsoft Yi Baiti"/>
+        <a:font script="Tibt" typeface="Microsoft Himalaya"/>
+        <a:font script="Thaa" typeface="MV Boli"/>
+        <a:font script="Deva" typeface="Mangal"/>
+        <a:font script="Telu" typeface="Gautami"/>
+        <a:font script="Taml" typeface="Latha"/>
+        <a:font script="Syrc" typeface="Estrangelo Edessa"/>
+        <a:font script="Orya" typeface="Kalinga"/>
+        <a:font script="Mlym" typeface="Kartika"/>
+        <a:font script="Laoo" typeface="DokChampa"/>
+        <a:font script="Sinh" typeface="Iskoola Pota"/>
+        <a:font script="Mong" typeface="Mongolian Baiti"/>
+        <a:font script="Viet" typeface="Arial"/>
+        <a:font script="Uigh" typeface="Microsoft Uighur"/>
+        <a:font script="Geor" typeface="Sylfaen"/>
+        <a:font script="Armn" typeface="Arial"/>
+        <a:font script="Bugi" typeface="Leelawadee UI"/>
+        <a:font script="Bopo" typeface="Microsoft JhengHei"/>
+        <a:font script="Java" typeface="Javanese Text"/>
+        <a:font script="Lisu" typeface="Segoe UI"/>
+        <a:font script="Mymr" typeface="Myanmar Text"/>
+        <a:font script="Nkoo" typeface="Ebrima"/>
+        <a:font script="Olck" typeface="Nirmala UI"/>
+        <a:font script="Osma" typeface="Ebrima"/>
+        <a:font script="Phag" typeface="Phagspa"/>
+        <a:font script="Syrn" typeface="Estrangelo Edessa"/>
+        <a:font script="Syrj" typeface="Estrangelo Edessa"/>
+        <a:font script="Syre" typeface="Estrangelo Edessa"/>
+        <a:font script="Sora" typeface="Nirmala UI"/>
+        <a:font script="Tale" typeface="Microsoft Tai Le"/>
+        <a:font script="Talu" typeface="Microsoft New Tai Lue"/>
+        <a:font script="Tfng" typeface="Ebrima"/>
+      </a:minorFont>
+    </a:fontScheme>
+    <a:fmtScheme name="Office">
+      <a:fillStyleLst>
+        <a:solidFill>
+          <a:schemeClr val="phClr"/>
+        </a:solidFill>
+        <a:gradFill rotWithShape="1">
+          <a:gsLst>
+            <a:gs pos="0">
+              <a:schemeClr val="phClr">
+                <a:lumMod val="110000"/>
+                <a:satMod val="105000"/>
+                <a:tint val="67000"/>
+              </a:schemeClr>
+            </a:gs>
+            <a:gs pos="50000">
+              <a:schemeClr val="phClr">
+                <a:lumMod val="105000"/>
+                <a:satMod val="103000"/>
+                <a:tint val="73000"/>
+              </a:schemeClr>
+            </a:gs>
+            <a:gs pos="100000">
+              <a:schemeClr val="phClr">
+                <a:lumMod val="105000"/>
+                <a:satMod val="109000"/>
+                <a:tint val="81000"/>
+              </a:schemeClr>
+            </a:gs>
+          </a:gsLst>
+          <a:lin ang="5400000" scaled="0"/>
+        </a:gradFill>
+        <a:gradFill rotWithShape="1">
+          <a:gsLst>
+            <a:gs pos="0">
+              <a:schemeClr val="phClr">
+                <a:satMod val="103000"/>
+                <a:lumMod val="102000"/>
+                <a:tint val="94000"/>
+              </a:schemeClr>
+            </a:gs>
+            <a:gs pos="50000">
+              <a:schemeClr val="phClr">
+                <a:satMod val="110000"/>
+                <a:lumMod val="100000"/>
+                <a:shade val="100000"/>
+              </a:schemeClr>
+            </a:gs>
+            <a:gs pos="100000">
+              <a:schemeClr val="phClr">
+                <a:lumMod val="99000"/>
+                <a:satMod val="120000"/>
+                <a:shade val="78000"/>
+              </a:schemeClr>
+            </a:gs>
+          </a:gsLst>
+          <a:lin ang="5400000" scaled="0"/>
+        </a:gradFill>
+      </a:fillStyleLst>
+      <a:lnStyleLst>
+        <a:ln w="12700" cap="flat" cmpd="sng" algn="ctr">
+          <a:solidFill>
+            <a:schemeClr val="phClr"/>
+          </a:solidFill>
+          <a:prstDash val="solid"/>
+          <a:miter lim="800000"/>
+        </a:ln>
+        <a:ln w="19050" cap="flat" cmpd="sng" algn="ctr">
+          <a:solidFill>
+            <a:schemeClr val="phClr"/>
+          </a:solidFill>
+          <a:prstDash val="solid"/>
+          <a:miter lim="800000"/>
+        </a:ln>
+        <a:ln w="25400" cap="flat" cmpd="sng" algn="ctr">
+          <a:solidFill>
+            <a:schemeClr val="phClr"/>
+          </a:solidFill>
+          <a:prstDash val="solid"/>
+          <a:miter lim="800000"/>
+        </a:ln>
+      </a:lnStyleLst>
+      <a:effectStyleLst>
+        <a:effectStyle>
+          <a:effectLst/>
+        </a:effectStyle>
+        <a:effectStyle>
+          <a:effectLst/>
+        </a:effectStyle>
+        <a:effectStyle>
+          <a:effectLst>
+            <a:outerShdw blurRad="57150" dist="19050" dir="5400000" algn="ctr" rotWithShape="0">
+              <a:srgbClr val="000000">
+                <a:alpha val="63000"/>
+              </a:srgbClr>
+            </a:outerShdw>
+          </a:effectLst>
+        </a:effectStyle>
+      </a:effectStyleLst>
+      <a:bgFillStyleLst>
+        <a:solidFill>
+          <a:schemeClr val="phClr"/>
+        </a:solidFill>
+        <a:solidFill>
+          <a:schemeClr val="phClr">
+            <a:tint val="95000"/>
+            <a:satMod val="170000"/>
+          </a:schemeClr>
+        </a:solidFill>
+        <a:gradFill rotWithShape="1">
+          <a:gsLst>
+            <a:gs pos="0">
+              <a:schemeClr val="phClr">
+                <a:tint val="93000"/>
+                <a:satMod val="150000"/>
+                <a:shade val="98000"/>
+                <a:lumMod val="102000"/>
+              </a:schemeClr>
+            </a:gs>
+            <a:gs pos="50000">
+              <a:schemeClr val="phClr">
+                <a:tint val="98000"/>
+                <a:satMod val="130000"/>
+                <a:shade val="90000"/>
+                <a:lumMod val="103000"/>
+              </a:schemeClr>
+            </a:gs>
+            <a:gs pos="100000">
+              <a:schemeClr val="phClr">
+                <a:shade val="63000"/>
+                <a:satMod val="120000"/>
+              </a:schemeClr>
+            </a:gs>
+          </a:gsLst>
+          <a:lin ang="5400000" scaled="0"/>
+        </a:gradFill>
+      </a:bgFillStyleLst>
+    </a:fmtScheme>
+  </a:themeElements>
+  <a:objectDefaults>
+    <a:lnDef>
+      <a:spPr/>
+      <a:bodyPr/>
+      <a:lstStyle/>
+      <a:style>
+        <a:lnRef idx="2">
+          <a:schemeClr val="accent1"/>
+        </a:lnRef>
+        <a:fillRef idx="0">
+          <a:schemeClr val="accent1"/>
+        </a:fillRef>
+        <a:effectRef idx="1">
+          <a:schemeClr val="accent1"/>
+        </a:effectRef>
+        <a:fontRef idx="minor">
+          <a:schemeClr val="tx1"/>
+        </a:fontRef>
+      </a:style>
+    </a:lnDef>
+  </a:objectDefaults>
+  <a:extraClrSchemeLst/>
+  <a:extLst>
+    <a:ext uri="{05A4C25C-085E-4340-85A3-A5531E510DB2}">
+      <thm15:themeFamily xmlns:thm15="http://schemas.microsoft.com/office/thememl/2012/main" name="Office Theme" id="{2E142A2C-CD16-42D6-873A-C26D2A0506FA}" vid="{1BDDFF52-6CD6-40A5-AB3C-68EB2F1E4D0A}"/>
+    </a:ext>
+  </a:extLst>
+</a:theme>
 </file>